--- a/documentation/Schloss_der_Finsternis.pptx
+++ b/documentation/Schloss_der_Finsternis.pptx
@@ -5,24 +5,23 @@
     <p:sldMasterId id="2147483648" r:id="rId1"/>
   </p:sldMasterIdLst>
   <p:notesMasterIdLst>
-    <p:notesMasterId r:id="rId17"/>
+    <p:notesMasterId r:id="rId16"/>
   </p:notesMasterIdLst>
   <p:sldIdLst>
     <p:sldId id="256" r:id="rId2"/>
     <p:sldId id="257" r:id="rId3"/>
-    <p:sldId id="258" r:id="rId4"/>
-    <p:sldId id="259" r:id="rId5"/>
-    <p:sldId id="261" r:id="rId6"/>
-    <p:sldId id="262" r:id="rId7"/>
-    <p:sldId id="263" r:id="rId8"/>
+    <p:sldId id="259" r:id="rId4"/>
+    <p:sldId id="261" r:id="rId5"/>
+    <p:sldId id="262" r:id="rId6"/>
+    <p:sldId id="263" r:id="rId7"/>
+    <p:sldId id="272" r:id="rId8"/>
     <p:sldId id="264" r:id="rId9"/>
     <p:sldId id="265" r:id="rId10"/>
     <p:sldId id="266" r:id="rId11"/>
     <p:sldId id="271" r:id="rId12"/>
     <p:sldId id="267" r:id="rId13"/>
     <p:sldId id="269" r:id="rId14"/>
-    <p:sldId id="272" r:id="rId15"/>
-    <p:sldId id="273" r:id="rId16"/>
+    <p:sldId id="273" r:id="rId15"/>
   </p:sldIdLst>
   <p:sldSz cx="9144000" cy="5143500" type="screen16x9"/>
   <p:notesSz cx="5143500" cy="9144000"/>
@@ -619,114 +618,6 @@
         <p:cNvPr id="1" name="">
           <a:extLst>
             <a:ext uri="{FF2B5EF4-FFF2-40B4-BE49-F238E27FC236}">
-              <a16:creationId xmlns:a16="http://schemas.microsoft.com/office/drawing/2014/main" id="{51B7F456-22D4-121E-C048-0615B6620A9F}"/>
-            </a:ext>
-          </a:extLst>
-        </p:cNvPr>
-        <p:cNvGrpSpPr/>
-        <p:nvPr/>
-      </p:nvGrpSpPr>
-      <p:grpSpPr>
-        <a:xfrm>
-          <a:off x="0" y="0"/>
-          <a:ext cx="0" cy="0"/>
-          <a:chOff x="0" y="0"/>
-          <a:chExt cx="0" cy="0"/>
-        </a:xfrm>
-      </p:grpSpPr>
-      <p:sp>
-        <p:nvSpPr>
-          <p:cNvPr id="2" name="Slide Image Placeholder 1">
-            <a:extLst>
-              <a:ext uri="{FF2B5EF4-FFF2-40B4-BE49-F238E27FC236}">
-                <a16:creationId xmlns:a16="http://schemas.microsoft.com/office/drawing/2014/main" id="{10B4BCF8-FBC2-811B-72D6-7A2ADD4C6C80}"/>
-              </a:ext>
-            </a:extLst>
-          </p:cNvPr>
-          <p:cNvSpPr>
-            <a:spLocks noGrp="1" noRot="1" noChangeAspect="1"/>
-          </p:cNvSpPr>
-          <p:nvPr>
-            <p:ph type="sldImg"/>
-          </p:nvPr>
-        </p:nvSpPr>
-        <p:spPr/>
-      </p:sp>
-      <p:sp>
-        <p:nvSpPr>
-          <p:cNvPr id="3" name="Notes Placeholder 2">
-            <a:extLst>
-              <a:ext uri="{FF2B5EF4-FFF2-40B4-BE49-F238E27FC236}">
-                <a16:creationId xmlns:a16="http://schemas.microsoft.com/office/drawing/2014/main" id="{6F24AFCC-4883-1D65-8E38-000727DE31F2}"/>
-              </a:ext>
-            </a:extLst>
-          </p:cNvPr>
-          <p:cNvSpPr>
-            <a:spLocks noGrp="1"/>
-          </p:cNvSpPr>
-          <p:nvPr>
-            <p:ph type="body" idx="1"/>
-          </p:nvPr>
-        </p:nvSpPr>
-        <p:spPr/>
-        <p:txBody>
-          <a:bodyPr/>
-          <a:lstStyle/>
-          <a:p>
-            <a:endParaRPr lang="en-US" dirty="0"/>
-          </a:p>
-        </p:txBody>
-      </p:sp>
-      <p:sp>
-        <p:nvSpPr>
-          <p:cNvPr id="4" name="Slide Number Placeholder 3">
-            <a:extLst>
-              <a:ext uri="{FF2B5EF4-FFF2-40B4-BE49-F238E27FC236}">
-                <a16:creationId xmlns:a16="http://schemas.microsoft.com/office/drawing/2014/main" id="{CF2A3872-84BB-D13A-3F5D-00FA33F0623A}"/>
-              </a:ext>
-            </a:extLst>
-          </p:cNvPr>
-          <p:cNvSpPr>
-            <a:spLocks noGrp="1"/>
-          </p:cNvSpPr>
-          <p:nvPr>
-            <p:ph type="sldNum" sz="quarter" idx="10"/>
-          </p:nvPr>
-        </p:nvSpPr>
-        <p:spPr/>
-        <p:txBody>
-          <a:bodyPr/>
-          <a:lstStyle/>
-          <a:p>
-            <a:fld id="{F7021451-1387-4CA6-816F-3879F97B5CBC}" type="slidenum">
-              <a:rPr lang="en-US"/>
-              <a:t>14</a:t>
-            </a:fld>
-            <a:endParaRPr lang="en-US"/>
-          </a:p>
-        </p:txBody>
-      </p:sp>
-    </p:spTree>
-    <p:extLst>
-      <p:ext uri="{BB962C8B-B14F-4D97-AF65-F5344CB8AC3E}">
-        <p14:creationId xmlns:p14="http://schemas.microsoft.com/office/powerpoint/2010/main" val="3732147177"/>
-      </p:ext>
-    </p:extLst>
-  </p:cSld>
-  <p:clrMapOvr>
-    <a:masterClrMapping/>
-  </p:clrMapOvr>
-</p:notes>
-</file>
-
-<file path=ppt/notesSlides/notesSlide14.xml><?xml version="1.0" encoding="utf-8"?>
-<p:notes xmlns:a="http://schemas.openxmlformats.org/drawingml/2006/main" xmlns:r="http://schemas.openxmlformats.org/officeDocument/2006/relationships" xmlns:p="http://schemas.openxmlformats.org/presentationml/2006/main">
-  <p:cSld>
-    <p:spTree>
-      <p:nvGrpSpPr>
-        <p:cNvPr id="1" name="">
-          <a:extLst>
-            <a:ext uri="{FF2B5EF4-FFF2-40B4-BE49-F238E27FC236}">
               <a16:creationId xmlns:a16="http://schemas.microsoft.com/office/drawing/2014/main" id="{2338038F-EC87-6CF2-864B-007BD8EA3D0C}"/>
             </a:ext>
           </a:extLst>
@@ -808,7 +699,7 @@
           <a:p>
             <a:fld id="{F7021451-1387-4CA6-816F-3879F97B5CBC}" type="slidenum">
               <a:rPr lang="en-US"/>
-              <a:t>15</a:t>
+              <a:t>14</a:t>
             </a:fld>
             <a:endParaRPr lang="en-US"/>
           </a:p>
@@ -1168,7 +1059,13 @@
   <p:cSld>
     <p:spTree>
       <p:nvGrpSpPr>
-        <p:cNvPr id="1" name=""/>
+        <p:cNvPr id="1" name="">
+          <a:extLst>
+            <a:ext uri="{FF2B5EF4-FFF2-40B4-BE49-F238E27FC236}">
+              <a16:creationId xmlns:a16="http://schemas.microsoft.com/office/drawing/2014/main" id="{51B7F456-22D4-121E-C048-0615B6620A9F}"/>
+            </a:ext>
+          </a:extLst>
+        </p:cNvPr>
         <p:cNvGrpSpPr/>
         <p:nvPr/>
       </p:nvGrpSpPr>
@@ -1182,7 +1079,13 @@
       </p:grpSpPr>
       <p:sp>
         <p:nvSpPr>
-          <p:cNvPr id="2" name="Slide Image Placeholder 1"/>
+          <p:cNvPr id="2" name="Slide Image Placeholder 1">
+            <a:extLst>
+              <a:ext uri="{FF2B5EF4-FFF2-40B4-BE49-F238E27FC236}">
+                <a16:creationId xmlns:a16="http://schemas.microsoft.com/office/drawing/2014/main" id="{10B4BCF8-FBC2-811B-72D6-7A2ADD4C6C80}"/>
+              </a:ext>
+            </a:extLst>
+          </p:cNvPr>
           <p:cNvSpPr>
             <a:spLocks noGrp="1" noRot="1" noChangeAspect="1"/>
           </p:cNvSpPr>
@@ -1194,7 +1097,13 @@
       </p:sp>
       <p:sp>
         <p:nvSpPr>
-          <p:cNvPr id="3" name="Notes Placeholder 2"/>
+          <p:cNvPr id="3" name="Notes Placeholder 2">
+            <a:extLst>
+              <a:ext uri="{FF2B5EF4-FFF2-40B4-BE49-F238E27FC236}">
+                <a16:creationId xmlns:a16="http://schemas.microsoft.com/office/drawing/2014/main" id="{6F24AFCC-4883-1D65-8E38-000727DE31F2}"/>
+              </a:ext>
+            </a:extLst>
+          </p:cNvPr>
           <p:cNvSpPr>
             <a:spLocks noGrp="1"/>
           </p:cNvSpPr>
@@ -1213,7 +1122,13 @@
       </p:sp>
       <p:sp>
         <p:nvSpPr>
-          <p:cNvPr id="4" name="Slide Number Placeholder 3"/>
+          <p:cNvPr id="4" name="Slide Number Placeholder 3">
+            <a:extLst>
+              <a:ext uri="{FF2B5EF4-FFF2-40B4-BE49-F238E27FC236}">
+                <a16:creationId xmlns:a16="http://schemas.microsoft.com/office/drawing/2014/main" id="{CF2A3872-84BB-D13A-3F5D-00FA33F0623A}"/>
+              </a:ext>
+            </a:extLst>
+          </p:cNvPr>
           <p:cNvSpPr>
             <a:spLocks noGrp="1"/>
           </p:cNvSpPr>
@@ -1237,7 +1152,7 @@
     </p:spTree>
     <p:extLst>
       <p:ext uri="{BB962C8B-B14F-4D97-AF65-F5344CB8AC3E}">
-        <p14:creationId xmlns:p14="http://schemas.microsoft.com/office/powerpoint/2010/main" val="1024086991"/>
+        <p14:creationId xmlns:p14="http://schemas.microsoft.com/office/powerpoint/2010/main" val="3732147177"/>
       </p:ext>
     </p:extLst>
   </p:cSld>
@@ -1526,13 +1441,13 @@
   <p:clrMapOvr>
     <a:masterClrMapping/>
   </p:clrMapOvr>
-  <mc:AlternateContent xmlns:mc="http://schemas.openxmlformats.org/markup-compatibility/2006">
-    <mc:Choice xmlns:p159="http://schemas.microsoft.com/office/powerpoint/2015/09/main" Requires="p159">
+  <mc:AlternateContent xmlns:mc="http://schemas.openxmlformats.org/markup-compatibility/2006" xmlns:p159="http://schemas.microsoft.com/office/powerpoint/2015/09/main">
+    <mc:Choice Requires="p159">
       <p:transition spd="slow">
         <p159:morph option="byObject"/>
       </p:transition>
     </mc:Choice>
-    <mc:Fallback>
+    <mc:Fallback xmlns="">
       <p:transition spd="slow">
         <p:fade/>
       </p:transition>
@@ -1688,7 +1603,7 @@
           <a:p>
             <a:fld id="{E4C066FF-F3C6-FA41-851A-0F8BDDD04D45}" type="datetimeFigureOut">
               <a:rPr lang="en-US" smtClean="0"/>
-              <a:t>6/12/26</a:t>
+              <a:t>6/24/26</a:t>
             </a:fld>
             <a:endParaRPr lang="en-US"/>
           </a:p>
@@ -1758,13 +1673,13 @@
   <p:clrMapOvr>
     <a:masterClrMapping/>
   </p:clrMapOvr>
-  <mc:AlternateContent xmlns:mc="http://schemas.openxmlformats.org/markup-compatibility/2006">
-    <mc:Choice xmlns:p159="http://schemas.microsoft.com/office/powerpoint/2015/09/main" Requires="p159">
+  <mc:AlternateContent xmlns:mc="http://schemas.openxmlformats.org/markup-compatibility/2006" xmlns:p159="http://schemas.microsoft.com/office/powerpoint/2015/09/main">
+    <mc:Choice Requires="p159">
       <p:transition spd="slow">
         <p159:morph option="byObject"/>
       </p:transition>
     </mc:Choice>
-    <mc:Fallback>
+    <mc:Fallback xmlns="">
       <p:transition spd="slow">
         <p:fade/>
       </p:transition>
@@ -1802,13 +1717,13 @@
     <p:sldLayoutId id="2147483649" r:id="rId1"/>
     <p:sldLayoutId id="2147483650" r:id="rId2"/>
   </p:sldLayoutIdLst>
-  <mc:AlternateContent xmlns:mc="http://schemas.openxmlformats.org/markup-compatibility/2006">
-    <mc:Choice xmlns:p159="http://schemas.microsoft.com/office/powerpoint/2015/09/main" Requires="p159">
+  <mc:AlternateContent xmlns:mc="http://schemas.openxmlformats.org/markup-compatibility/2006" xmlns:p159="http://schemas.microsoft.com/office/powerpoint/2015/09/main">
+    <mc:Choice Requires="p159">
       <p:transition spd="slow">
         <p159:morph option="byObject"/>
       </p:transition>
     </mc:Choice>
-    <mc:Fallback>
+    <mc:Fallback xmlns="">
       <p:transition spd="slow">
         <p:fade/>
       </p:transition>
@@ -2156,13 +2071,13 @@
   <p:clrMapOvr>
     <a:masterClrMapping/>
   </p:clrMapOvr>
-  <mc:AlternateContent xmlns:mc="http://schemas.openxmlformats.org/markup-compatibility/2006">
-    <mc:Choice xmlns:p159="http://schemas.microsoft.com/office/powerpoint/2015/09/main" Requires="p159">
+  <mc:AlternateContent xmlns:mc="http://schemas.openxmlformats.org/markup-compatibility/2006" xmlns:p159="http://schemas.microsoft.com/office/powerpoint/2015/09/main">
+    <mc:Choice Requires="p159">
       <p:transition spd="slow">
         <p159:morph option="byObject"/>
       </p:transition>
     </mc:Choice>
-    <mc:Fallback>
+    <mc:Fallback xmlns="">
       <p:transition spd="slow">
         <p:fade/>
       </p:transition>
@@ -3118,13 +3033,13 @@
   <p:clrMapOvr>
     <a:masterClrMapping/>
   </p:clrMapOvr>
-  <mc:AlternateContent xmlns:mc="http://schemas.openxmlformats.org/markup-compatibility/2006">
-    <mc:Choice xmlns:p159="http://schemas.microsoft.com/office/powerpoint/2015/09/main" Requires="p159">
+  <mc:AlternateContent xmlns:mc="http://schemas.openxmlformats.org/markup-compatibility/2006" xmlns:p159="http://schemas.microsoft.com/office/powerpoint/2015/09/main">
+    <mc:Choice Requires="p159">
       <p:transition spd="slow">
         <p159:morph option="byObject"/>
       </p:transition>
     </mc:Choice>
-    <mc:Fallback>
+    <mc:Fallback xmlns="">
       <p:transition spd="slow">
         <p:fade/>
       </p:transition>
@@ -4464,13 +4379,13 @@
   <p:clrMapOvr>
     <a:masterClrMapping/>
   </p:clrMapOvr>
-  <mc:AlternateContent xmlns:mc="http://schemas.openxmlformats.org/markup-compatibility/2006">
-    <mc:Choice xmlns:p159="http://schemas.microsoft.com/office/powerpoint/2015/09/main" Requires="p159">
+  <mc:AlternateContent xmlns:mc="http://schemas.openxmlformats.org/markup-compatibility/2006" xmlns:p159="http://schemas.microsoft.com/office/powerpoint/2015/09/main">
+    <mc:Choice Requires="p159">
       <p:transition spd="slow">
         <p159:morph option="byObject"/>
       </p:transition>
     </mc:Choice>
-    <mc:Fallback>
+    <mc:Fallback xmlns="">
       <p:transition spd="slow">
         <p:fade/>
       </p:transition>
@@ -4946,7 +4861,7 @@
         </p:nvSpPr>
         <p:spPr>
           <a:xfrm>
-            <a:off x="320040" y="1188720"/>
+            <a:off x="320040" y="1480545"/>
             <a:ext cx="4160520" cy="777240"/>
           </a:xfrm>
           <a:prstGeom prst="roundRect">
@@ -4989,7 +4904,7 @@
         </p:nvSpPr>
         <p:spPr>
           <a:xfrm>
-            <a:off x="429768" y="1344168"/>
+            <a:off x="429768" y="1635993"/>
             <a:ext cx="457200" cy="457200"/>
           </a:xfrm>
           <a:prstGeom prst="ellipse">
@@ -5021,7 +4936,7 @@
         </p:nvSpPr>
         <p:spPr>
           <a:xfrm>
-            <a:off x="429768" y="1344168"/>
+            <a:off x="429768" y="1635993"/>
             <a:ext cx="457200" cy="457200"/>
           </a:xfrm>
           <a:prstGeom prst="rect">
@@ -5060,7 +4975,7 @@
         </p:nvSpPr>
         <p:spPr>
           <a:xfrm>
-            <a:off x="1005840" y="1188720"/>
+            <a:off x="1005840" y="1480545"/>
             <a:ext cx="3383280" cy="777240"/>
           </a:xfrm>
           <a:prstGeom prst="rect">
@@ -5099,7 +5014,7 @@
         </p:nvSpPr>
         <p:spPr>
           <a:xfrm>
-            <a:off x="320040" y="2148840"/>
+            <a:off x="320040" y="2440665"/>
             <a:ext cx="4160520" cy="777240"/>
           </a:xfrm>
           <a:prstGeom prst="roundRect">
@@ -5142,7 +5057,7 @@
         </p:nvSpPr>
         <p:spPr>
           <a:xfrm>
-            <a:off x="429768" y="2304288"/>
+            <a:off x="429768" y="2596113"/>
             <a:ext cx="457200" cy="457200"/>
           </a:xfrm>
           <a:prstGeom prst="ellipse">
@@ -5174,7 +5089,7 @@
         </p:nvSpPr>
         <p:spPr>
           <a:xfrm>
-            <a:off x="429768" y="2304288"/>
+            <a:off x="429768" y="2596113"/>
             <a:ext cx="457200" cy="457200"/>
           </a:xfrm>
           <a:prstGeom prst="rect">
@@ -5213,7 +5128,7 @@
         </p:nvSpPr>
         <p:spPr>
           <a:xfrm>
-            <a:off x="1005840" y="2148840"/>
+            <a:off x="1005840" y="2440665"/>
             <a:ext cx="3383280" cy="777240"/>
           </a:xfrm>
           <a:prstGeom prst="rect">
@@ -5252,7 +5167,7 @@
         </p:nvSpPr>
         <p:spPr>
           <a:xfrm>
-            <a:off x="320040" y="3108960"/>
+            <a:off x="320040" y="3400785"/>
             <a:ext cx="4160520" cy="777240"/>
           </a:xfrm>
           <a:prstGeom prst="roundRect">
@@ -5295,7 +5210,7 @@
         </p:nvSpPr>
         <p:spPr>
           <a:xfrm>
-            <a:off x="429768" y="3264408"/>
+            <a:off x="429768" y="3556233"/>
             <a:ext cx="457200" cy="457200"/>
           </a:xfrm>
           <a:prstGeom prst="ellipse">
@@ -5327,7 +5242,7 @@
         </p:nvSpPr>
         <p:spPr>
           <a:xfrm>
-            <a:off x="429768" y="3264408"/>
+            <a:off x="429768" y="3556233"/>
             <a:ext cx="457200" cy="457200"/>
           </a:xfrm>
           <a:prstGeom prst="rect">
@@ -5366,7 +5281,7 @@
         </p:nvSpPr>
         <p:spPr>
           <a:xfrm>
-            <a:off x="1005840" y="3108960"/>
+            <a:off x="1005840" y="3400785"/>
             <a:ext cx="3383280" cy="777240"/>
           </a:xfrm>
           <a:prstGeom prst="rect">
@@ -5405,7 +5320,7 @@
         </p:nvSpPr>
         <p:spPr>
           <a:xfrm>
-            <a:off x="320040" y="4062000"/>
+            <a:off x="4754882" y="1473465"/>
             <a:ext cx="4160520" cy="777240"/>
           </a:xfrm>
           <a:prstGeom prst="roundRect">
@@ -5448,7 +5363,7 @@
         </p:nvSpPr>
         <p:spPr>
           <a:xfrm>
-            <a:off x="429768" y="4224528"/>
+            <a:off x="4864610" y="1635993"/>
             <a:ext cx="457200" cy="457200"/>
           </a:xfrm>
           <a:prstGeom prst="ellipse">
@@ -5480,7 +5395,7 @@
         </p:nvSpPr>
         <p:spPr>
           <a:xfrm>
-            <a:off x="429768" y="4224528"/>
+            <a:off x="4864610" y="1635993"/>
             <a:ext cx="457200" cy="457200"/>
           </a:xfrm>
           <a:prstGeom prst="rect">
@@ -5519,7 +5434,7 @@
         </p:nvSpPr>
         <p:spPr>
           <a:xfrm>
-            <a:off x="1005840" y="4069080"/>
+            <a:off x="5440682" y="1480545"/>
             <a:ext cx="3383280" cy="777240"/>
           </a:xfrm>
           <a:prstGeom prst="rect">
@@ -5558,7 +5473,7 @@
         </p:nvSpPr>
         <p:spPr>
           <a:xfrm>
-            <a:off x="4754880" y="1188720"/>
+            <a:off x="4754882" y="2440665"/>
             <a:ext cx="4160520" cy="777240"/>
           </a:xfrm>
           <a:prstGeom prst="roundRect">
@@ -5601,7 +5516,7 @@
         </p:nvSpPr>
         <p:spPr>
           <a:xfrm>
-            <a:off x="4864608" y="1344168"/>
+            <a:off x="4864610" y="2596113"/>
             <a:ext cx="457200" cy="457200"/>
           </a:xfrm>
           <a:prstGeom prst="ellipse">
@@ -5633,7 +5548,7 @@
         </p:nvSpPr>
         <p:spPr>
           <a:xfrm>
-            <a:off x="4864608" y="1344168"/>
+            <a:off x="4864610" y="2596113"/>
             <a:ext cx="457200" cy="457200"/>
           </a:xfrm>
           <a:prstGeom prst="rect">
@@ -5672,7 +5587,7 @@
         </p:nvSpPr>
         <p:spPr>
           <a:xfrm>
-            <a:off x="5440680" y="1188720"/>
+            <a:off x="5440682" y="2440665"/>
             <a:ext cx="3383280" cy="777240"/>
           </a:xfrm>
           <a:prstGeom prst="rect">
@@ -5711,7 +5626,7 @@
         </p:nvSpPr>
         <p:spPr>
           <a:xfrm>
-            <a:off x="4754880" y="2148840"/>
+            <a:off x="4754882" y="3400785"/>
             <a:ext cx="4160520" cy="777240"/>
           </a:xfrm>
           <a:prstGeom prst="roundRect">
@@ -5754,7 +5669,7 @@
         </p:nvSpPr>
         <p:spPr>
           <a:xfrm>
-            <a:off x="4864608" y="2304288"/>
+            <a:off x="4864610" y="3556233"/>
             <a:ext cx="457200" cy="457200"/>
           </a:xfrm>
           <a:prstGeom prst="ellipse">
@@ -5786,7 +5701,7 @@
         </p:nvSpPr>
         <p:spPr>
           <a:xfrm>
-            <a:off x="4864608" y="2304288"/>
+            <a:off x="4864610" y="3556233"/>
             <a:ext cx="457200" cy="457200"/>
           </a:xfrm>
           <a:prstGeom prst="rect">
@@ -5825,7 +5740,7 @@
         </p:nvSpPr>
         <p:spPr>
           <a:xfrm>
-            <a:off x="5440680" y="2148840"/>
+            <a:off x="5440682" y="3400785"/>
             <a:ext cx="3383280" cy="777240"/>
           </a:xfrm>
           <a:prstGeom prst="rect">
@@ -5856,171 +5771,18 @@
           </a:p>
         </p:txBody>
       </p:sp>
-      <p:sp>
-        <p:nvSpPr>
-          <p:cNvPr id="32" name="Shape 29"/>
-          <p:cNvSpPr/>
-          <p:nvPr/>
-        </p:nvSpPr>
-        <p:spPr>
-          <a:xfrm>
-            <a:off x="4754880" y="3108960"/>
-            <a:ext cx="4160520" cy="777240"/>
-          </a:xfrm>
-          <a:prstGeom prst="roundRect">
-            <a:avLst>
-              <a:gd name="adj" fmla="val 7059"/>
-            </a:avLst>
-          </a:prstGeom>
-          <a:solidFill>
-            <a:schemeClr val="tx1">
-              <a:alpha val="50000"/>
-            </a:schemeClr>
-          </a:solidFill>
-          <a:ln w="6350">
-            <a:solidFill>
-              <a:srgbClr val="4A4A6A"/>
-            </a:solidFill>
-            <a:prstDash val="solid"/>
-          </a:ln>
-          <a:effectLst>
-            <a:outerShdw blurRad="127000" dist="38100" dir="2700000" algn="bl" rotWithShape="0">
-              <a:srgbClr val="000000">
-                <a:alpha val="50000"/>
-              </a:srgbClr>
-            </a:outerShdw>
-          </a:effectLst>
-        </p:spPr>
-        <p:txBody>
-          <a:bodyPr/>
-          <a:lstStyle/>
-          <a:p>
-            <a:endParaRPr lang="de-DE"/>
-          </a:p>
-        </p:txBody>
-      </p:sp>
-      <p:sp>
-        <p:nvSpPr>
-          <p:cNvPr id="33" name="Shape 30"/>
-          <p:cNvSpPr/>
-          <p:nvPr/>
-        </p:nvSpPr>
-        <p:spPr>
-          <a:xfrm>
-            <a:off x="4864608" y="3264408"/>
-            <a:ext cx="457200" cy="457200"/>
-          </a:xfrm>
-          <a:prstGeom prst="ellipse">
-            <a:avLst/>
-          </a:prstGeom>
-          <a:solidFill>
-            <a:srgbClr val="E74C3C"/>
-          </a:solidFill>
-          <a:ln w="12700">
-            <a:solidFill>
-              <a:srgbClr val="8B0000"/>
-            </a:solidFill>
-            <a:prstDash val="solid"/>
-          </a:ln>
-        </p:spPr>
-        <p:txBody>
-          <a:bodyPr/>
-          <a:lstStyle/>
-          <a:p>
-            <a:endParaRPr lang="de-DE"/>
-          </a:p>
-        </p:txBody>
-      </p:sp>
-      <p:sp>
-        <p:nvSpPr>
-          <p:cNvPr id="34" name="Text 31"/>
-          <p:cNvSpPr/>
-          <p:nvPr/>
-        </p:nvSpPr>
-        <p:spPr>
-          <a:xfrm>
-            <a:off x="4864608" y="3264408"/>
-            <a:ext cx="457200" cy="457200"/>
-          </a:xfrm>
-          <a:prstGeom prst="rect">
-            <a:avLst/>
-          </a:prstGeom>
-          <a:noFill/>
-          <a:ln/>
-        </p:spPr>
-        <p:txBody>
-          <a:bodyPr wrap="square" lIns="0" tIns="0" rIns="0" bIns="0" rtlCol="0" anchor="ctr"/>
-          <a:lstStyle/>
-          <a:p>
-            <a:pPr marL="0" indent="0" algn="ctr">
-              <a:buNone/>
-            </a:pPr>
-            <a:r>
-              <a:rPr lang="en-US" sz="1200" b="1" dirty="0">
-                <a:solidFill>
-                  <a:srgbClr val="F0F0F0"/>
-                </a:solidFill>
-                <a:latin typeface="Cambria" pitchFamily="34" charset="0"/>
-                <a:ea typeface="Cambria" pitchFamily="34" charset="-122"/>
-                <a:cs typeface="Cambria" pitchFamily="34" charset="-120"/>
-              </a:rPr>
-              <a:t>07</a:t>
-            </a:r>
-            <a:endParaRPr lang="en-US" sz="1200" dirty="0"/>
-          </a:p>
-        </p:txBody>
-      </p:sp>
-      <p:sp>
-        <p:nvSpPr>
-          <p:cNvPr id="35" name="Text 32"/>
-          <p:cNvSpPr/>
-          <p:nvPr/>
-        </p:nvSpPr>
-        <p:spPr>
-          <a:xfrm>
-            <a:off x="5440680" y="3108960"/>
-            <a:ext cx="3383280" cy="777240"/>
-          </a:xfrm>
-          <a:prstGeom prst="rect">
-            <a:avLst/>
-          </a:prstGeom>
-          <a:noFill/>
-          <a:ln/>
-        </p:spPr>
-        <p:txBody>
-          <a:bodyPr wrap="square" lIns="0" tIns="0" rIns="0" bIns="0" rtlCol="0" anchor="ctr"/>
-          <a:lstStyle/>
-          <a:p>
-            <a:pPr marL="0" indent="0">
-              <a:buNone/>
-            </a:pPr>
-            <a:r>
-              <a:rPr lang="en-US" sz="1300" dirty="0">
-                <a:solidFill>
-                  <a:srgbClr val="DADAED"/>
-                </a:solidFill>
-                <a:latin typeface="Calibri" pitchFamily="34" charset="0"/>
-                <a:ea typeface="Calibri" pitchFamily="34" charset="-122"/>
-                <a:cs typeface="Calibri" pitchFamily="34" charset="-120"/>
-              </a:rPr>
-              <a:t>Kreative Problemlösung bei der Rätselentwicklung</a:t>
-            </a:r>
-            <a:endParaRPr lang="en-US" sz="1300" dirty="0"/>
-          </a:p>
-        </p:txBody>
-      </p:sp>
     </p:spTree>
   </p:cSld>
   <p:clrMapOvr>
     <a:masterClrMapping/>
   </p:clrMapOvr>
-  <mc:AlternateContent xmlns:mc="http://schemas.openxmlformats.org/markup-compatibility/2006">
-    <mc:Choice xmlns:p159="http://schemas.microsoft.com/office/powerpoint/2015/09/main" Requires="p159">
+  <mc:AlternateContent xmlns:mc="http://schemas.openxmlformats.org/markup-compatibility/2006" xmlns:p159="http://schemas.microsoft.com/office/powerpoint/2015/09/main">
+    <mc:Choice Requires="p159">
       <p:transition spd="slow">
         <p159:morph option="byObject"/>
       </p:transition>
     </mc:Choice>
-    <mc:Fallback>
+    <mc:Fallback xmlns="">
       <p:transition spd="slow">
         <p:fade/>
       </p:transition>
@@ -13823,1324 +13585,6 @@
                                         </p:cTn>
                                         <p:tgtEl>
                                           <p:spTgt spid="31"/>
-                                        </p:tgtEl>
-                                        <p:attrNameLst>
-                                          <p:attrName>ppt_y</p:attrName>
-                                        </p:attrNameLst>
-                                      </p:cBhvr>
-                                      <p:tavLst>
-                                        <p:tav tm="0">
-                                          <p:val>
-                                            <p:strVal val="#ppt_y+0.31"/>
-                                          </p:val>
-                                        </p:tav>
-                                        <p:tav tm="5000">
-                                          <p:val>
-                                            <p:strVal val="#ppt_y+0.308"/>
-                                          </p:val>
-                                        </p:tav>
-                                        <p:tav tm="10000">
-                                          <p:val>
-                                            <p:strVal val="#ppt_y+0.3024"/>
-                                          </p:val>
-                                        </p:tav>
-                                        <p:tav tm="15000">
-                                          <p:val>
-                                            <p:strVal val="#ppt_y+0.2931"/>
-                                          </p:val>
-                                        </p:tav>
-                                        <p:tav tm="20000">
-                                          <p:val>
-                                            <p:strVal val="#ppt_y+0.2804"/>
-                                          </p:val>
-                                        </p:tav>
-                                        <p:tav tm="25000">
-                                          <p:val>
-                                            <p:strVal val="#ppt_y+0.2646"/>
-                                          </p:val>
-                                        </p:tav>
-                                        <p:tav tm="30000">
-                                          <p:val>
-                                            <p:strVal val="#ppt_y+0.2461"/>
-                                          </p:val>
-                                        </p:tav>
-                                        <p:tav tm="35000">
-                                          <p:val>
-                                            <p:strVal val="#ppt_y+0.2253"/>
-                                          </p:val>
-                                        </p:tav>
-                                        <p:tav tm="40000">
-                                          <p:val>
-                                            <p:strVal val="#ppt_y+0.2029"/>
-                                          </p:val>
-                                        </p:tav>
-                                        <p:tav tm="45000">
-                                          <p:val>
-                                            <p:strVal val="#ppt_y+0.1792"/>
-                                          </p:val>
-                                        </p:tav>
-                                        <p:tav tm="50000">
-                                          <p:val>
-                                            <p:strVal val="#ppt_y+0.155"/>
-                                          </p:val>
-                                        </p:tav>
-                                        <p:tav tm="55000">
-                                          <p:val>
-                                            <p:strVal val="#ppt_y+0.1307"/>
-                                          </p:val>
-                                        </p:tav>
-                                        <p:tav tm="60000">
-                                          <p:val>
-                                            <p:strVal val="#ppt_y+0.1071"/>
-                                          </p:val>
-                                        </p:tav>
-                                        <p:tav tm="65000">
-                                          <p:val>
-                                            <p:strVal val="#ppt_y+0.0846"/>
-                                          </p:val>
-                                        </p:tav>
-                                        <p:tav tm="70000">
-                                          <p:val>
-                                            <p:strVal val="#ppt_y+0.0639"/>
-                                          </p:val>
-                                        </p:tav>
-                                        <p:tav tm="75000">
-                                          <p:val>
-                                            <p:strVal val="#ppt_y+0.0454"/>
-                                          </p:val>
-                                        </p:tav>
-                                        <p:tav tm="80000">
-                                          <p:val>
-                                            <p:strVal val="#ppt_y+0.0296"/>
-                                          </p:val>
-                                        </p:tav>
-                                        <p:tav tm="85000">
-                                          <p:val>
-                                            <p:strVal val="#ppt_y+0.0169"/>
-                                          </p:val>
-                                        </p:tav>
-                                        <p:tav tm="90000">
-                                          <p:val>
-                                            <p:strVal val="#ppt_y+0.0076"/>
-                                          </p:val>
-                                        </p:tav>
-                                        <p:tav tm="95000">
-                                          <p:val>
-                                            <p:strVal val="#ppt_y+0.0019"/>
-                                          </p:val>
-                                        </p:tav>
-                                        <p:tav tm="100000">
-                                          <p:val>
-                                            <p:strVal val="#ppt_y"/>
-                                          </p:val>
-                                        </p:tav>
-                                      </p:tavLst>
-                                    </p:anim>
-                                  </p:childTnLst>
-                                </p:cTn>
-                              </p:par>
-                            </p:childTnLst>
-                          </p:cTn>
-                        </p:par>
-                      </p:childTnLst>
-                    </p:cTn>
-                  </p:par>
-                  <p:par>
-                    <p:cTn id="183" fill="hold">
-                      <p:stCondLst>
-                        <p:cond delay="indefinite"/>
-                      </p:stCondLst>
-                      <p:childTnLst>
-                        <p:par>
-                          <p:cTn id="184" fill="hold">
-                            <p:stCondLst>
-                              <p:cond delay="0"/>
-                            </p:stCondLst>
-                            <p:childTnLst>
-                              <p:par>
-                                <p:cTn id="185" presetID="43" presetClass="entr" presetSubtype="0" fill="hold" grpId="0" nodeType="clickEffect">
-                                  <p:stCondLst>
-                                    <p:cond delay="0"/>
-                                  </p:stCondLst>
-                                  <p:childTnLst>
-                                    <p:set>
-                                      <p:cBhvr>
-                                        <p:cTn id="186" dur="1" fill="hold">
-                                          <p:stCondLst>
-                                            <p:cond delay="0"/>
-                                          </p:stCondLst>
-                                        </p:cTn>
-                                        <p:tgtEl>
-                                          <p:spTgt spid="32"/>
-                                        </p:tgtEl>
-                                        <p:attrNameLst>
-                                          <p:attrName>style.visibility</p:attrName>
-                                        </p:attrNameLst>
-                                      </p:cBhvr>
-                                      <p:to>
-                                        <p:strVal val="visible"/>
-                                      </p:to>
-                                    </p:set>
-                                    <p:animEffect transition="in" filter="fade">
-                                      <p:cBhvr>
-                                        <p:cTn id="187" dur="50"/>
-                                        <p:tgtEl>
-                                          <p:spTgt spid="32"/>
-                                        </p:tgtEl>
-                                      </p:cBhvr>
-                                    </p:animEffect>
-                                    <p:anim calcmode="lin" valueType="num">
-                                      <p:cBhvr>
-                                        <p:cTn id="188" dur="200" fill="hold"/>
-                                        <p:tgtEl>
-                                          <p:spTgt spid="32"/>
-                                        </p:tgtEl>
-                                        <p:attrNameLst>
-                                          <p:attrName>ppt_x</p:attrName>
-                                        </p:attrNameLst>
-                                      </p:cBhvr>
-                                      <p:tavLst>
-                                        <p:tav tm="0">
-                                          <p:val>
-                                            <p:strVal val="#ppt_x"/>
-                                          </p:val>
-                                        </p:tav>
-                                        <p:tav tm="100000">
-                                          <p:val>
-                                            <p:strVal val="#ppt_x"/>
-                                          </p:val>
-                                        </p:tav>
-                                      </p:tavLst>
-                                    </p:anim>
-                                    <p:anim calcmode="lin" valueType="num">
-                                      <p:cBhvr>
-                                        <p:cTn id="189" dur="200" fill="hold"/>
-                                        <p:tgtEl>
-                                          <p:spTgt spid="32"/>
-                                        </p:tgtEl>
-                                        <p:attrNameLst>
-                                          <p:attrName>ppt_y</p:attrName>
-                                        </p:attrNameLst>
-                                      </p:cBhvr>
-                                      <p:tavLst>
-                                        <p:tav tm="0">
-                                          <p:val>
-                                            <p:strVal val="#ppt_y+0.31"/>
-                                          </p:val>
-                                        </p:tav>
-                                        <p:tav tm="100000">
-                                          <p:val>
-                                            <p:strVal val="#ppt_y+0.31"/>
-                                          </p:val>
-                                        </p:tav>
-                                      </p:tavLst>
-                                    </p:anim>
-                                    <p:anim calcmode="lin" valueType="num">
-                                      <p:cBhvr>
-                                        <p:cTn id="190" dur="300" decel="50000" fill="hold">
-                                          <p:stCondLst>
-                                            <p:cond delay="200"/>
-                                          </p:stCondLst>
-                                        </p:cTn>
-                                        <p:tgtEl>
-                                          <p:spTgt spid="32"/>
-                                        </p:tgtEl>
-                                        <p:attrNameLst>
-                                          <p:attrName>ppt_x</p:attrName>
-                                        </p:attrNameLst>
-                                      </p:cBhvr>
-                                      <p:tavLst>
-                                        <p:tav tm="0">
-                                          <p:val>
-                                            <p:strVal val="#ppt_x"/>
-                                          </p:val>
-                                        </p:tav>
-                                        <p:tav tm="5000">
-                                          <p:val>
-                                            <p:strVal val="#ppt_x+0.0242"/>
-                                          </p:val>
-                                        </p:tav>
-                                        <p:tav tm="10000">
-                                          <p:val>
-                                            <p:strVal val="#ppt_x+0.0479"/>
-                                          </p:val>
-                                        </p:tav>
-                                        <p:tav tm="15000">
-                                          <p:val>
-                                            <p:strVal val="#ppt_x+0.0704"/>
-                                          </p:val>
-                                        </p:tav>
-                                        <p:tav tm="20000">
-                                          <p:val>
-                                            <p:strVal val="#ppt_x+0.0911"/>
-                                          </p:val>
-                                        </p:tav>
-                                        <p:tav tm="25000">
-                                          <p:val>
-                                            <p:strVal val="#ppt_x+0.1096"/>
-                                          </p:val>
-                                        </p:tav>
-                                        <p:tav tm="30000">
-                                          <p:val>
-                                            <p:strVal val="#ppt_x+0.1254"/>
-                                          </p:val>
-                                        </p:tav>
-                                        <p:tav tm="35000">
-                                          <p:val>
-                                            <p:strVal val="#ppt_x+0.1381"/>
-                                          </p:val>
-                                        </p:tav>
-                                        <p:tav tm="40000">
-                                          <p:val>
-                                            <p:strVal val="#ppt_x+0.1474"/>
-                                          </p:val>
-                                        </p:tav>
-                                        <p:tav tm="45000">
-                                          <p:val>
-                                            <p:strVal val="#ppt_x+0.1531"/>
-                                          </p:val>
-                                        </p:tav>
-                                        <p:tav tm="50000">
-                                          <p:val>
-                                            <p:strVal val="#ppt_x+0.1550"/>
-                                          </p:val>
-                                        </p:tav>
-                                        <p:tav tm="55000">
-                                          <p:val>
-                                            <p:strVal val="#ppt_x+0.1531"/>
-                                          </p:val>
-                                        </p:tav>
-                                        <p:tav tm="60000">
-                                          <p:val>
-                                            <p:strVal val="#ppt_x+0.1474"/>
-                                          </p:val>
-                                        </p:tav>
-                                        <p:tav tm="65000">
-                                          <p:val>
-                                            <p:strVal val="#ppt_x+0.1381"/>
-                                          </p:val>
-                                        </p:tav>
-                                        <p:tav tm="70000">
-                                          <p:val>
-                                            <p:strVal val="#ppt_x+0.1254"/>
-                                          </p:val>
-                                        </p:tav>
-                                        <p:tav tm="75000">
-                                          <p:val>
-                                            <p:strVal val="#ppt_x+0.1096"/>
-                                          </p:val>
-                                        </p:tav>
-                                        <p:tav tm="80000">
-                                          <p:val>
-                                            <p:strVal val="#ppt_x+0.0911"/>
-                                          </p:val>
-                                        </p:tav>
-                                        <p:tav tm="85000">
-                                          <p:val>
-                                            <p:strVal val="#ppt_x+0.0704"/>
-                                          </p:val>
-                                        </p:tav>
-                                        <p:tav tm="90000">
-                                          <p:val>
-                                            <p:strVal val="#ppt_x+0.0479"/>
-                                          </p:val>
-                                        </p:tav>
-                                        <p:tav tm="95000">
-                                          <p:val>
-                                            <p:strVal val="#ppt_x+0.0242"/>
-                                          </p:val>
-                                        </p:tav>
-                                        <p:tav tm="100000">
-                                          <p:val>
-                                            <p:strVal val="#ppt_x"/>
-                                          </p:val>
-                                        </p:tav>
-                                      </p:tavLst>
-                                    </p:anim>
-                                    <p:anim calcmode="lin" valueType="num">
-                                      <p:cBhvr>
-                                        <p:cTn id="191" dur="300" decel="50000" fill="hold">
-                                          <p:stCondLst>
-                                            <p:cond delay="200"/>
-                                          </p:stCondLst>
-                                        </p:cTn>
-                                        <p:tgtEl>
-                                          <p:spTgt spid="32"/>
-                                        </p:tgtEl>
-                                        <p:attrNameLst>
-                                          <p:attrName>ppt_y</p:attrName>
-                                        </p:attrNameLst>
-                                      </p:cBhvr>
-                                      <p:tavLst>
-                                        <p:tav tm="0">
-                                          <p:val>
-                                            <p:strVal val="#ppt_y+0.31"/>
-                                          </p:val>
-                                        </p:tav>
-                                        <p:tav tm="5000">
-                                          <p:val>
-                                            <p:strVal val="#ppt_y+0.308"/>
-                                          </p:val>
-                                        </p:tav>
-                                        <p:tav tm="10000">
-                                          <p:val>
-                                            <p:strVal val="#ppt_y+0.3024"/>
-                                          </p:val>
-                                        </p:tav>
-                                        <p:tav tm="15000">
-                                          <p:val>
-                                            <p:strVal val="#ppt_y+0.2931"/>
-                                          </p:val>
-                                        </p:tav>
-                                        <p:tav tm="20000">
-                                          <p:val>
-                                            <p:strVal val="#ppt_y+0.2804"/>
-                                          </p:val>
-                                        </p:tav>
-                                        <p:tav tm="25000">
-                                          <p:val>
-                                            <p:strVal val="#ppt_y+0.2646"/>
-                                          </p:val>
-                                        </p:tav>
-                                        <p:tav tm="30000">
-                                          <p:val>
-                                            <p:strVal val="#ppt_y+0.2461"/>
-                                          </p:val>
-                                        </p:tav>
-                                        <p:tav tm="35000">
-                                          <p:val>
-                                            <p:strVal val="#ppt_y+0.2253"/>
-                                          </p:val>
-                                        </p:tav>
-                                        <p:tav tm="40000">
-                                          <p:val>
-                                            <p:strVal val="#ppt_y+0.2029"/>
-                                          </p:val>
-                                        </p:tav>
-                                        <p:tav tm="45000">
-                                          <p:val>
-                                            <p:strVal val="#ppt_y+0.1792"/>
-                                          </p:val>
-                                        </p:tav>
-                                        <p:tav tm="50000">
-                                          <p:val>
-                                            <p:strVal val="#ppt_y+0.155"/>
-                                          </p:val>
-                                        </p:tav>
-                                        <p:tav tm="55000">
-                                          <p:val>
-                                            <p:strVal val="#ppt_y+0.1307"/>
-                                          </p:val>
-                                        </p:tav>
-                                        <p:tav tm="60000">
-                                          <p:val>
-                                            <p:strVal val="#ppt_y+0.1071"/>
-                                          </p:val>
-                                        </p:tav>
-                                        <p:tav tm="65000">
-                                          <p:val>
-                                            <p:strVal val="#ppt_y+0.0846"/>
-                                          </p:val>
-                                        </p:tav>
-                                        <p:tav tm="70000">
-                                          <p:val>
-                                            <p:strVal val="#ppt_y+0.0639"/>
-                                          </p:val>
-                                        </p:tav>
-                                        <p:tav tm="75000">
-                                          <p:val>
-                                            <p:strVal val="#ppt_y+0.0454"/>
-                                          </p:val>
-                                        </p:tav>
-                                        <p:tav tm="80000">
-                                          <p:val>
-                                            <p:strVal val="#ppt_y+0.0296"/>
-                                          </p:val>
-                                        </p:tav>
-                                        <p:tav tm="85000">
-                                          <p:val>
-                                            <p:strVal val="#ppt_y+0.0169"/>
-                                          </p:val>
-                                        </p:tav>
-                                        <p:tav tm="90000">
-                                          <p:val>
-                                            <p:strVal val="#ppt_y+0.0076"/>
-                                          </p:val>
-                                        </p:tav>
-                                        <p:tav tm="95000">
-                                          <p:val>
-                                            <p:strVal val="#ppt_y+0.0019"/>
-                                          </p:val>
-                                        </p:tav>
-                                        <p:tav tm="100000">
-                                          <p:val>
-                                            <p:strVal val="#ppt_y"/>
-                                          </p:val>
-                                        </p:tav>
-                                      </p:tavLst>
-                                    </p:anim>
-                                  </p:childTnLst>
-                                </p:cTn>
-                              </p:par>
-                              <p:par>
-                                <p:cTn id="192" presetID="43" presetClass="entr" presetSubtype="0" fill="hold" grpId="0" nodeType="withEffect">
-                                  <p:stCondLst>
-                                    <p:cond delay="0"/>
-                                  </p:stCondLst>
-                                  <p:childTnLst>
-                                    <p:set>
-                                      <p:cBhvr>
-                                        <p:cTn id="193" dur="1" fill="hold">
-                                          <p:stCondLst>
-                                            <p:cond delay="0"/>
-                                          </p:stCondLst>
-                                        </p:cTn>
-                                        <p:tgtEl>
-                                          <p:spTgt spid="33"/>
-                                        </p:tgtEl>
-                                        <p:attrNameLst>
-                                          <p:attrName>style.visibility</p:attrName>
-                                        </p:attrNameLst>
-                                      </p:cBhvr>
-                                      <p:to>
-                                        <p:strVal val="visible"/>
-                                      </p:to>
-                                    </p:set>
-                                    <p:animEffect transition="in" filter="fade">
-                                      <p:cBhvr>
-                                        <p:cTn id="194" dur="50"/>
-                                        <p:tgtEl>
-                                          <p:spTgt spid="33"/>
-                                        </p:tgtEl>
-                                      </p:cBhvr>
-                                    </p:animEffect>
-                                    <p:anim calcmode="lin" valueType="num">
-                                      <p:cBhvr>
-                                        <p:cTn id="195" dur="200" fill="hold"/>
-                                        <p:tgtEl>
-                                          <p:spTgt spid="33"/>
-                                        </p:tgtEl>
-                                        <p:attrNameLst>
-                                          <p:attrName>ppt_x</p:attrName>
-                                        </p:attrNameLst>
-                                      </p:cBhvr>
-                                      <p:tavLst>
-                                        <p:tav tm="0">
-                                          <p:val>
-                                            <p:strVal val="#ppt_x"/>
-                                          </p:val>
-                                        </p:tav>
-                                        <p:tav tm="100000">
-                                          <p:val>
-                                            <p:strVal val="#ppt_x"/>
-                                          </p:val>
-                                        </p:tav>
-                                      </p:tavLst>
-                                    </p:anim>
-                                    <p:anim calcmode="lin" valueType="num">
-                                      <p:cBhvr>
-                                        <p:cTn id="196" dur="200" fill="hold"/>
-                                        <p:tgtEl>
-                                          <p:spTgt spid="33"/>
-                                        </p:tgtEl>
-                                        <p:attrNameLst>
-                                          <p:attrName>ppt_y</p:attrName>
-                                        </p:attrNameLst>
-                                      </p:cBhvr>
-                                      <p:tavLst>
-                                        <p:tav tm="0">
-                                          <p:val>
-                                            <p:strVal val="#ppt_y+0.31"/>
-                                          </p:val>
-                                        </p:tav>
-                                        <p:tav tm="100000">
-                                          <p:val>
-                                            <p:strVal val="#ppt_y+0.31"/>
-                                          </p:val>
-                                        </p:tav>
-                                      </p:tavLst>
-                                    </p:anim>
-                                    <p:anim calcmode="lin" valueType="num">
-                                      <p:cBhvr>
-                                        <p:cTn id="197" dur="300" decel="50000" fill="hold">
-                                          <p:stCondLst>
-                                            <p:cond delay="200"/>
-                                          </p:stCondLst>
-                                        </p:cTn>
-                                        <p:tgtEl>
-                                          <p:spTgt spid="33"/>
-                                        </p:tgtEl>
-                                        <p:attrNameLst>
-                                          <p:attrName>ppt_x</p:attrName>
-                                        </p:attrNameLst>
-                                      </p:cBhvr>
-                                      <p:tavLst>
-                                        <p:tav tm="0">
-                                          <p:val>
-                                            <p:strVal val="#ppt_x"/>
-                                          </p:val>
-                                        </p:tav>
-                                        <p:tav tm="5000">
-                                          <p:val>
-                                            <p:strVal val="#ppt_x+0.0242"/>
-                                          </p:val>
-                                        </p:tav>
-                                        <p:tav tm="10000">
-                                          <p:val>
-                                            <p:strVal val="#ppt_x+0.0479"/>
-                                          </p:val>
-                                        </p:tav>
-                                        <p:tav tm="15000">
-                                          <p:val>
-                                            <p:strVal val="#ppt_x+0.0704"/>
-                                          </p:val>
-                                        </p:tav>
-                                        <p:tav tm="20000">
-                                          <p:val>
-                                            <p:strVal val="#ppt_x+0.0911"/>
-                                          </p:val>
-                                        </p:tav>
-                                        <p:tav tm="25000">
-                                          <p:val>
-                                            <p:strVal val="#ppt_x+0.1096"/>
-                                          </p:val>
-                                        </p:tav>
-                                        <p:tav tm="30000">
-                                          <p:val>
-                                            <p:strVal val="#ppt_x+0.1254"/>
-                                          </p:val>
-                                        </p:tav>
-                                        <p:tav tm="35000">
-                                          <p:val>
-                                            <p:strVal val="#ppt_x+0.1381"/>
-                                          </p:val>
-                                        </p:tav>
-                                        <p:tav tm="40000">
-                                          <p:val>
-                                            <p:strVal val="#ppt_x+0.1474"/>
-                                          </p:val>
-                                        </p:tav>
-                                        <p:tav tm="45000">
-                                          <p:val>
-                                            <p:strVal val="#ppt_x+0.1531"/>
-                                          </p:val>
-                                        </p:tav>
-                                        <p:tav tm="50000">
-                                          <p:val>
-                                            <p:strVal val="#ppt_x+0.1550"/>
-                                          </p:val>
-                                        </p:tav>
-                                        <p:tav tm="55000">
-                                          <p:val>
-                                            <p:strVal val="#ppt_x+0.1531"/>
-                                          </p:val>
-                                        </p:tav>
-                                        <p:tav tm="60000">
-                                          <p:val>
-                                            <p:strVal val="#ppt_x+0.1474"/>
-                                          </p:val>
-                                        </p:tav>
-                                        <p:tav tm="65000">
-                                          <p:val>
-                                            <p:strVal val="#ppt_x+0.1381"/>
-                                          </p:val>
-                                        </p:tav>
-                                        <p:tav tm="70000">
-                                          <p:val>
-                                            <p:strVal val="#ppt_x+0.1254"/>
-                                          </p:val>
-                                        </p:tav>
-                                        <p:tav tm="75000">
-                                          <p:val>
-                                            <p:strVal val="#ppt_x+0.1096"/>
-                                          </p:val>
-                                        </p:tav>
-                                        <p:tav tm="80000">
-                                          <p:val>
-                                            <p:strVal val="#ppt_x+0.0911"/>
-                                          </p:val>
-                                        </p:tav>
-                                        <p:tav tm="85000">
-                                          <p:val>
-                                            <p:strVal val="#ppt_x+0.0704"/>
-                                          </p:val>
-                                        </p:tav>
-                                        <p:tav tm="90000">
-                                          <p:val>
-                                            <p:strVal val="#ppt_x+0.0479"/>
-                                          </p:val>
-                                        </p:tav>
-                                        <p:tav tm="95000">
-                                          <p:val>
-                                            <p:strVal val="#ppt_x+0.0242"/>
-                                          </p:val>
-                                        </p:tav>
-                                        <p:tav tm="100000">
-                                          <p:val>
-                                            <p:strVal val="#ppt_x"/>
-                                          </p:val>
-                                        </p:tav>
-                                      </p:tavLst>
-                                    </p:anim>
-                                    <p:anim calcmode="lin" valueType="num">
-                                      <p:cBhvr>
-                                        <p:cTn id="198" dur="300" decel="50000" fill="hold">
-                                          <p:stCondLst>
-                                            <p:cond delay="200"/>
-                                          </p:stCondLst>
-                                        </p:cTn>
-                                        <p:tgtEl>
-                                          <p:spTgt spid="33"/>
-                                        </p:tgtEl>
-                                        <p:attrNameLst>
-                                          <p:attrName>ppt_y</p:attrName>
-                                        </p:attrNameLst>
-                                      </p:cBhvr>
-                                      <p:tavLst>
-                                        <p:tav tm="0">
-                                          <p:val>
-                                            <p:strVal val="#ppt_y+0.31"/>
-                                          </p:val>
-                                        </p:tav>
-                                        <p:tav tm="5000">
-                                          <p:val>
-                                            <p:strVal val="#ppt_y+0.308"/>
-                                          </p:val>
-                                        </p:tav>
-                                        <p:tav tm="10000">
-                                          <p:val>
-                                            <p:strVal val="#ppt_y+0.3024"/>
-                                          </p:val>
-                                        </p:tav>
-                                        <p:tav tm="15000">
-                                          <p:val>
-                                            <p:strVal val="#ppt_y+0.2931"/>
-                                          </p:val>
-                                        </p:tav>
-                                        <p:tav tm="20000">
-                                          <p:val>
-                                            <p:strVal val="#ppt_y+0.2804"/>
-                                          </p:val>
-                                        </p:tav>
-                                        <p:tav tm="25000">
-                                          <p:val>
-                                            <p:strVal val="#ppt_y+0.2646"/>
-                                          </p:val>
-                                        </p:tav>
-                                        <p:tav tm="30000">
-                                          <p:val>
-                                            <p:strVal val="#ppt_y+0.2461"/>
-                                          </p:val>
-                                        </p:tav>
-                                        <p:tav tm="35000">
-                                          <p:val>
-                                            <p:strVal val="#ppt_y+0.2253"/>
-                                          </p:val>
-                                        </p:tav>
-                                        <p:tav tm="40000">
-                                          <p:val>
-                                            <p:strVal val="#ppt_y+0.2029"/>
-                                          </p:val>
-                                        </p:tav>
-                                        <p:tav tm="45000">
-                                          <p:val>
-                                            <p:strVal val="#ppt_y+0.1792"/>
-                                          </p:val>
-                                        </p:tav>
-                                        <p:tav tm="50000">
-                                          <p:val>
-                                            <p:strVal val="#ppt_y+0.155"/>
-                                          </p:val>
-                                        </p:tav>
-                                        <p:tav tm="55000">
-                                          <p:val>
-                                            <p:strVal val="#ppt_y+0.1307"/>
-                                          </p:val>
-                                        </p:tav>
-                                        <p:tav tm="60000">
-                                          <p:val>
-                                            <p:strVal val="#ppt_y+0.1071"/>
-                                          </p:val>
-                                        </p:tav>
-                                        <p:tav tm="65000">
-                                          <p:val>
-                                            <p:strVal val="#ppt_y+0.0846"/>
-                                          </p:val>
-                                        </p:tav>
-                                        <p:tav tm="70000">
-                                          <p:val>
-                                            <p:strVal val="#ppt_y+0.0639"/>
-                                          </p:val>
-                                        </p:tav>
-                                        <p:tav tm="75000">
-                                          <p:val>
-                                            <p:strVal val="#ppt_y+0.0454"/>
-                                          </p:val>
-                                        </p:tav>
-                                        <p:tav tm="80000">
-                                          <p:val>
-                                            <p:strVal val="#ppt_y+0.0296"/>
-                                          </p:val>
-                                        </p:tav>
-                                        <p:tav tm="85000">
-                                          <p:val>
-                                            <p:strVal val="#ppt_y+0.0169"/>
-                                          </p:val>
-                                        </p:tav>
-                                        <p:tav tm="90000">
-                                          <p:val>
-                                            <p:strVal val="#ppt_y+0.0076"/>
-                                          </p:val>
-                                        </p:tav>
-                                        <p:tav tm="95000">
-                                          <p:val>
-                                            <p:strVal val="#ppt_y+0.0019"/>
-                                          </p:val>
-                                        </p:tav>
-                                        <p:tav tm="100000">
-                                          <p:val>
-                                            <p:strVal val="#ppt_y"/>
-                                          </p:val>
-                                        </p:tav>
-                                      </p:tavLst>
-                                    </p:anim>
-                                  </p:childTnLst>
-                                </p:cTn>
-                              </p:par>
-                              <p:par>
-                                <p:cTn id="199" presetID="43" presetClass="entr" presetSubtype="0" fill="hold" grpId="0" nodeType="withEffect">
-                                  <p:stCondLst>
-                                    <p:cond delay="0"/>
-                                  </p:stCondLst>
-                                  <p:childTnLst>
-                                    <p:set>
-                                      <p:cBhvr>
-                                        <p:cTn id="200" dur="1" fill="hold">
-                                          <p:stCondLst>
-                                            <p:cond delay="0"/>
-                                          </p:stCondLst>
-                                        </p:cTn>
-                                        <p:tgtEl>
-                                          <p:spTgt spid="34"/>
-                                        </p:tgtEl>
-                                        <p:attrNameLst>
-                                          <p:attrName>style.visibility</p:attrName>
-                                        </p:attrNameLst>
-                                      </p:cBhvr>
-                                      <p:to>
-                                        <p:strVal val="visible"/>
-                                      </p:to>
-                                    </p:set>
-                                    <p:animEffect transition="in" filter="fade">
-                                      <p:cBhvr>
-                                        <p:cTn id="201" dur="50"/>
-                                        <p:tgtEl>
-                                          <p:spTgt spid="34"/>
-                                        </p:tgtEl>
-                                      </p:cBhvr>
-                                    </p:animEffect>
-                                    <p:anim calcmode="lin" valueType="num">
-                                      <p:cBhvr>
-                                        <p:cTn id="202" dur="200" fill="hold"/>
-                                        <p:tgtEl>
-                                          <p:spTgt spid="34"/>
-                                        </p:tgtEl>
-                                        <p:attrNameLst>
-                                          <p:attrName>ppt_x</p:attrName>
-                                        </p:attrNameLst>
-                                      </p:cBhvr>
-                                      <p:tavLst>
-                                        <p:tav tm="0">
-                                          <p:val>
-                                            <p:strVal val="#ppt_x"/>
-                                          </p:val>
-                                        </p:tav>
-                                        <p:tav tm="100000">
-                                          <p:val>
-                                            <p:strVal val="#ppt_x"/>
-                                          </p:val>
-                                        </p:tav>
-                                      </p:tavLst>
-                                    </p:anim>
-                                    <p:anim calcmode="lin" valueType="num">
-                                      <p:cBhvr>
-                                        <p:cTn id="203" dur="200" fill="hold"/>
-                                        <p:tgtEl>
-                                          <p:spTgt spid="34"/>
-                                        </p:tgtEl>
-                                        <p:attrNameLst>
-                                          <p:attrName>ppt_y</p:attrName>
-                                        </p:attrNameLst>
-                                      </p:cBhvr>
-                                      <p:tavLst>
-                                        <p:tav tm="0">
-                                          <p:val>
-                                            <p:strVal val="#ppt_y+0.31"/>
-                                          </p:val>
-                                        </p:tav>
-                                        <p:tav tm="100000">
-                                          <p:val>
-                                            <p:strVal val="#ppt_y+0.31"/>
-                                          </p:val>
-                                        </p:tav>
-                                      </p:tavLst>
-                                    </p:anim>
-                                    <p:anim calcmode="lin" valueType="num">
-                                      <p:cBhvr>
-                                        <p:cTn id="204" dur="300" decel="50000" fill="hold">
-                                          <p:stCondLst>
-                                            <p:cond delay="200"/>
-                                          </p:stCondLst>
-                                        </p:cTn>
-                                        <p:tgtEl>
-                                          <p:spTgt spid="34"/>
-                                        </p:tgtEl>
-                                        <p:attrNameLst>
-                                          <p:attrName>ppt_x</p:attrName>
-                                        </p:attrNameLst>
-                                      </p:cBhvr>
-                                      <p:tavLst>
-                                        <p:tav tm="0">
-                                          <p:val>
-                                            <p:strVal val="#ppt_x"/>
-                                          </p:val>
-                                        </p:tav>
-                                        <p:tav tm="5000">
-                                          <p:val>
-                                            <p:strVal val="#ppt_x+0.0242"/>
-                                          </p:val>
-                                        </p:tav>
-                                        <p:tav tm="10000">
-                                          <p:val>
-                                            <p:strVal val="#ppt_x+0.0479"/>
-                                          </p:val>
-                                        </p:tav>
-                                        <p:tav tm="15000">
-                                          <p:val>
-                                            <p:strVal val="#ppt_x+0.0704"/>
-                                          </p:val>
-                                        </p:tav>
-                                        <p:tav tm="20000">
-                                          <p:val>
-                                            <p:strVal val="#ppt_x+0.0911"/>
-                                          </p:val>
-                                        </p:tav>
-                                        <p:tav tm="25000">
-                                          <p:val>
-                                            <p:strVal val="#ppt_x+0.1096"/>
-                                          </p:val>
-                                        </p:tav>
-                                        <p:tav tm="30000">
-                                          <p:val>
-                                            <p:strVal val="#ppt_x+0.1254"/>
-                                          </p:val>
-                                        </p:tav>
-                                        <p:tav tm="35000">
-                                          <p:val>
-                                            <p:strVal val="#ppt_x+0.1381"/>
-                                          </p:val>
-                                        </p:tav>
-                                        <p:tav tm="40000">
-                                          <p:val>
-                                            <p:strVal val="#ppt_x+0.1474"/>
-                                          </p:val>
-                                        </p:tav>
-                                        <p:tav tm="45000">
-                                          <p:val>
-                                            <p:strVal val="#ppt_x+0.1531"/>
-                                          </p:val>
-                                        </p:tav>
-                                        <p:tav tm="50000">
-                                          <p:val>
-                                            <p:strVal val="#ppt_x+0.1550"/>
-                                          </p:val>
-                                        </p:tav>
-                                        <p:tav tm="55000">
-                                          <p:val>
-                                            <p:strVal val="#ppt_x+0.1531"/>
-                                          </p:val>
-                                        </p:tav>
-                                        <p:tav tm="60000">
-                                          <p:val>
-                                            <p:strVal val="#ppt_x+0.1474"/>
-                                          </p:val>
-                                        </p:tav>
-                                        <p:tav tm="65000">
-                                          <p:val>
-                                            <p:strVal val="#ppt_x+0.1381"/>
-                                          </p:val>
-                                        </p:tav>
-                                        <p:tav tm="70000">
-                                          <p:val>
-                                            <p:strVal val="#ppt_x+0.1254"/>
-                                          </p:val>
-                                        </p:tav>
-                                        <p:tav tm="75000">
-                                          <p:val>
-                                            <p:strVal val="#ppt_x+0.1096"/>
-                                          </p:val>
-                                        </p:tav>
-                                        <p:tav tm="80000">
-                                          <p:val>
-                                            <p:strVal val="#ppt_x+0.0911"/>
-                                          </p:val>
-                                        </p:tav>
-                                        <p:tav tm="85000">
-                                          <p:val>
-                                            <p:strVal val="#ppt_x+0.0704"/>
-                                          </p:val>
-                                        </p:tav>
-                                        <p:tav tm="90000">
-                                          <p:val>
-                                            <p:strVal val="#ppt_x+0.0479"/>
-                                          </p:val>
-                                        </p:tav>
-                                        <p:tav tm="95000">
-                                          <p:val>
-                                            <p:strVal val="#ppt_x+0.0242"/>
-                                          </p:val>
-                                        </p:tav>
-                                        <p:tav tm="100000">
-                                          <p:val>
-                                            <p:strVal val="#ppt_x"/>
-                                          </p:val>
-                                        </p:tav>
-                                      </p:tavLst>
-                                    </p:anim>
-                                    <p:anim calcmode="lin" valueType="num">
-                                      <p:cBhvr>
-                                        <p:cTn id="205" dur="300" decel="50000" fill="hold">
-                                          <p:stCondLst>
-                                            <p:cond delay="200"/>
-                                          </p:stCondLst>
-                                        </p:cTn>
-                                        <p:tgtEl>
-                                          <p:spTgt spid="34"/>
-                                        </p:tgtEl>
-                                        <p:attrNameLst>
-                                          <p:attrName>ppt_y</p:attrName>
-                                        </p:attrNameLst>
-                                      </p:cBhvr>
-                                      <p:tavLst>
-                                        <p:tav tm="0">
-                                          <p:val>
-                                            <p:strVal val="#ppt_y+0.31"/>
-                                          </p:val>
-                                        </p:tav>
-                                        <p:tav tm="5000">
-                                          <p:val>
-                                            <p:strVal val="#ppt_y+0.308"/>
-                                          </p:val>
-                                        </p:tav>
-                                        <p:tav tm="10000">
-                                          <p:val>
-                                            <p:strVal val="#ppt_y+0.3024"/>
-                                          </p:val>
-                                        </p:tav>
-                                        <p:tav tm="15000">
-                                          <p:val>
-                                            <p:strVal val="#ppt_y+0.2931"/>
-                                          </p:val>
-                                        </p:tav>
-                                        <p:tav tm="20000">
-                                          <p:val>
-                                            <p:strVal val="#ppt_y+0.2804"/>
-                                          </p:val>
-                                        </p:tav>
-                                        <p:tav tm="25000">
-                                          <p:val>
-                                            <p:strVal val="#ppt_y+0.2646"/>
-                                          </p:val>
-                                        </p:tav>
-                                        <p:tav tm="30000">
-                                          <p:val>
-                                            <p:strVal val="#ppt_y+0.2461"/>
-                                          </p:val>
-                                        </p:tav>
-                                        <p:tav tm="35000">
-                                          <p:val>
-                                            <p:strVal val="#ppt_y+0.2253"/>
-                                          </p:val>
-                                        </p:tav>
-                                        <p:tav tm="40000">
-                                          <p:val>
-                                            <p:strVal val="#ppt_y+0.2029"/>
-                                          </p:val>
-                                        </p:tav>
-                                        <p:tav tm="45000">
-                                          <p:val>
-                                            <p:strVal val="#ppt_y+0.1792"/>
-                                          </p:val>
-                                        </p:tav>
-                                        <p:tav tm="50000">
-                                          <p:val>
-                                            <p:strVal val="#ppt_y+0.155"/>
-                                          </p:val>
-                                        </p:tav>
-                                        <p:tav tm="55000">
-                                          <p:val>
-                                            <p:strVal val="#ppt_y+0.1307"/>
-                                          </p:val>
-                                        </p:tav>
-                                        <p:tav tm="60000">
-                                          <p:val>
-                                            <p:strVal val="#ppt_y+0.1071"/>
-                                          </p:val>
-                                        </p:tav>
-                                        <p:tav tm="65000">
-                                          <p:val>
-                                            <p:strVal val="#ppt_y+0.0846"/>
-                                          </p:val>
-                                        </p:tav>
-                                        <p:tav tm="70000">
-                                          <p:val>
-                                            <p:strVal val="#ppt_y+0.0639"/>
-                                          </p:val>
-                                        </p:tav>
-                                        <p:tav tm="75000">
-                                          <p:val>
-                                            <p:strVal val="#ppt_y+0.0454"/>
-                                          </p:val>
-                                        </p:tav>
-                                        <p:tav tm="80000">
-                                          <p:val>
-                                            <p:strVal val="#ppt_y+0.0296"/>
-                                          </p:val>
-                                        </p:tav>
-                                        <p:tav tm="85000">
-                                          <p:val>
-                                            <p:strVal val="#ppt_y+0.0169"/>
-                                          </p:val>
-                                        </p:tav>
-                                        <p:tav tm="90000">
-                                          <p:val>
-                                            <p:strVal val="#ppt_y+0.0076"/>
-                                          </p:val>
-                                        </p:tav>
-                                        <p:tav tm="95000">
-                                          <p:val>
-                                            <p:strVal val="#ppt_y+0.0019"/>
-                                          </p:val>
-                                        </p:tav>
-                                        <p:tav tm="100000">
-                                          <p:val>
-                                            <p:strVal val="#ppt_y"/>
-                                          </p:val>
-                                        </p:tav>
-                                      </p:tavLst>
-                                    </p:anim>
-                                  </p:childTnLst>
-                                </p:cTn>
-                              </p:par>
-                              <p:par>
-                                <p:cTn id="206" presetID="43" presetClass="entr" presetSubtype="0" fill="hold" grpId="0" nodeType="withEffect">
-                                  <p:stCondLst>
-                                    <p:cond delay="0"/>
-                                  </p:stCondLst>
-                                  <p:childTnLst>
-                                    <p:set>
-                                      <p:cBhvr>
-                                        <p:cTn id="207" dur="1" fill="hold">
-                                          <p:stCondLst>
-                                            <p:cond delay="0"/>
-                                          </p:stCondLst>
-                                        </p:cTn>
-                                        <p:tgtEl>
-                                          <p:spTgt spid="35"/>
-                                        </p:tgtEl>
-                                        <p:attrNameLst>
-                                          <p:attrName>style.visibility</p:attrName>
-                                        </p:attrNameLst>
-                                      </p:cBhvr>
-                                      <p:to>
-                                        <p:strVal val="visible"/>
-                                      </p:to>
-                                    </p:set>
-                                    <p:animEffect transition="in" filter="fade">
-                                      <p:cBhvr>
-                                        <p:cTn id="208" dur="50"/>
-                                        <p:tgtEl>
-                                          <p:spTgt spid="35"/>
-                                        </p:tgtEl>
-                                      </p:cBhvr>
-                                    </p:animEffect>
-                                    <p:anim calcmode="lin" valueType="num">
-                                      <p:cBhvr>
-                                        <p:cTn id="209" dur="200" fill="hold"/>
-                                        <p:tgtEl>
-                                          <p:spTgt spid="35"/>
-                                        </p:tgtEl>
-                                        <p:attrNameLst>
-                                          <p:attrName>ppt_x</p:attrName>
-                                        </p:attrNameLst>
-                                      </p:cBhvr>
-                                      <p:tavLst>
-                                        <p:tav tm="0">
-                                          <p:val>
-                                            <p:strVal val="#ppt_x"/>
-                                          </p:val>
-                                        </p:tav>
-                                        <p:tav tm="100000">
-                                          <p:val>
-                                            <p:strVal val="#ppt_x"/>
-                                          </p:val>
-                                        </p:tav>
-                                      </p:tavLst>
-                                    </p:anim>
-                                    <p:anim calcmode="lin" valueType="num">
-                                      <p:cBhvr>
-                                        <p:cTn id="210" dur="200" fill="hold"/>
-                                        <p:tgtEl>
-                                          <p:spTgt spid="35"/>
-                                        </p:tgtEl>
-                                        <p:attrNameLst>
-                                          <p:attrName>ppt_y</p:attrName>
-                                        </p:attrNameLst>
-                                      </p:cBhvr>
-                                      <p:tavLst>
-                                        <p:tav tm="0">
-                                          <p:val>
-                                            <p:strVal val="#ppt_y+0.31"/>
-                                          </p:val>
-                                        </p:tav>
-                                        <p:tav tm="100000">
-                                          <p:val>
-                                            <p:strVal val="#ppt_y+0.31"/>
-                                          </p:val>
-                                        </p:tav>
-                                      </p:tavLst>
-                                    </p:anim>
-                                    <p:anim calcmode="lin" valueType="num">
-                                      <p:cBhvr>
-                                        <p:cTn id="211" dur="300" decel="50000" fill="hold">
-                                          <p:stCondLst>
-                                            <p:cond delay="200"/>
-                                          </p:stCondLst>
-                                        </p:cTn>
-                                        <p:tgtEl>
-                                          <p:spTgt spid="35"/>
-                                        </p:tgtEl>
-                                        <p:attrNameLst>
-                                          <p:attrName>ppt_x</p:attrName>
-                                        </p:attrNameLst>
-                                      </p:cBhvr>
-                                      <p:tavLst>
-                                        <p:tav tm="0">
-                                          <p:val>
-                                            <p:strVal val="#ppt_x"/>
-                                          </p:val>
-                                        </p:tav>
-                                        <p:tav tm="5000">
-                                          <p:val>
-                                            <p:strVal val="#ppt_x+0.0242"/>
-                                          </p:val>
-                                        </p:tav>
-                                        <p:tav tm="10000">
-                                          <p:val>
-                                            <p:strVal val="#ppt_x+0.0479"/>
-                                          </p:val>
-                                        </p:tav>
-                                        <p:tav tm="15000">
-                                          <p:val>
-                                            <p:strVal val="#ppt_x+0.0704"/>
-                                          </p:val>
-                                        </p:tav>
-                                        <p:tav tm="20000">
-                                          <p:val>
-                                            <p:strVal val="#ppt_x+0.0911"/>
-                                          </p:val>
-                                        </p:tav>
-                                        <p:tav tm="25000">
-                                          <p:val>
-                                            <p:strVal val="#ppt_x+0.1096"/>
-                                          </p:val>
-                                        </p:tav>
-                                        <p:tav tm="30000">
-                                          <p:val>
-                                            <p:strVal val="#ppt_x+0.1254"/>
-                                          </p:val>
-                                        </p:tav>
-                                        <p:tav tm="35000">
-                                          <p:val>
-                                            <p:strVal val="#ppt_x+0.1381"/>
-                                          </p:val>
-                                        </p:tav>
-                                        <p:tav tm="40000">
-                                          <p:val>
-                                            <p:strVal val="#ppt_x+0.1474"/>
-                                          </p:val>
-                                        </p:tav>
-                                        <p:tav tm="45000">
-                                          <p:val>
-                                            <p:strVal val="#ppt_x+0.1531"/>
-                                          </p:val>
-                                        </p:tav>
-                                        <p:tav tm="50000">
-                                          <p:val>
-                                            <p:strVal val="#ppt_x+0.1550"/>
-                                          </p:val>
-                                        </p:tav>
-                                        <p:tav tm="55000">
-                                          <p:val>
-                                            <p:strVal val="#ppt_x+0.1531"/>
-                                          </p:val>
-                                        </p:tav>
-                                        <p:tav tm="60000">
-                                          <p:val>
-                                            <p:strVal val="#ppt_x+0.1474"/>
-                                          </p:val>
-                                        </p:tav>
-                                        <p:tav tm="65000">
-                                          <p:val>
-                                            <p:strVal val="#ppt_x+0.1381"/>
-                                          </p:val>
-                                        </p:tav>
-                                        <p:tav tm="70000">
-                                          <p:val>
-                                            <p:strVal val="#ppt_x+0.1254"/>
-                                          </p:val>
-                                        </p:tav>
-                                        <p:tav tm="75000">
-                                          <p:val>
-                                            <p:strVal val="#ppt_x+0.1096"/>
-                                          </p:val>
-                                        </p:tav>
-                                        <p:tav tm="80000">
-                                          <p:val>
-                                            <p:strVal val="#ppt_x+0.0911"/>
-                                          </p:val>
-                                        </p:tav>
-                                        <p:tav tm="85000">
-                                          <p:val>
-                                            <p:strVal val="#ppt_x+0.0704"/>
-                                          </p:val>
-                                        </p:tav>
-                                        <p:tav tm="90000">
-                                          <p:val>
-                                            <p:strVal val="#ppt_x+0.0479"/>
-                                          </p:val>
-                                        </p:tav>
-                                        <p:tav tm="95000">
-                                          <p:val>
-                                            <p:strVal val="#ppt_x+0.0242"/>
-                                          </p:val>
-                                        </p:tav>
-                                        <p:tav tm="100000">
-                                          <p:val>
-                                            <p:strVal val="#ppt_x"/>
-                                          </p:val>
-                                        </p:tav>
-                                      </p:tavLst>
-                                    </p:anim>
-                                    <p:anim calcmode="lin" valueType="num">
-                                      <p:cBhvr>
-                                        <p:cTn id="212" dur="300" decel="50000" fill="hold">
-                                          <p:stCondLst>
-                                            <p:cond delay="200"/>
-                                          </p:stCondLst>
-                                        </p:cTn>
-                                        <p:tgtEl>
-                                          <p:spTgt spid="35"/>
                                         </p:tgtEl>
                                         <p:attrNameLst>
                                           <p:attrName>ppt_y</p:attrName>
@@ -15309,10 +13753,6 @@
       <p:bldP spid="29" grpId="0" animBg="1"/>
       <p:bldP spid="30" grpId="0" animBg="1"/>
       <p:bldP spid="31" grpId="0" animBg="1"/>
-      <p:bldP spid="32" grpId="0" animBg="1"/>
-      <p:bldP spid="33" grpId="0" animBg="1"/>
-      <p:bldP spid="34" grpId="0" animBg="1"/>
-      <p:bldP spid="35" grpId="0" animBg="1"/>
     </p:bldLst>
   </p:timing>
 </p:sld>
@@ -15766,67 +14206,18 @@
           </a:p>
         </p:txBody>
       </p:sp>
-      <p:sp>
-        <p:nvSpPr>
-          <p:cNvPr id="15" name="Text 2">
-            <a:extLst>
-              <a:ext uri="{FF2B5EF4-FFF2-40B4-BE49-F238E27FC236}">
-                <a16:creationId xmlns:a16="http://schemas.microsoft.com/office/drawing/2014/main" id="{DECE5A9D-627B-F658-056E-57E72C367EB4}"/>
-              </a:ext>
-            </a:extLst>
-          </p:cNvPr>
-          <p:cNvSpPr/>
-          <p:nvPr/>
-        </p:nvSpPr>
-        <p:spPr>
-          <a:xfrm>
-            <a:off x="914400" y="5230302"/>
-            <a:ext cx="7315200" cy="640080"/>
-          </a:xfrm>
-          <a:prstGeom prst="rect">
-            <a:avLst/>
-          </a:prstGeom>
-          <a:noFill/>
-          <a:ln/>
-        </p:spPr>
-        <p:txBody>
-          <a:bodyPr wrap="square" lIns="0" tIns="0" rIns="0" bIns="0" rtlCol="0" anchor="ctr"/>
-          <a:lstStyle/>
-          <a:p>
-            <a:pPr marL="0" indent="0" algn="ctr">
-              <a:buNone/>
-            </a:pPr>
-            <a:r>
-              <a:rPr lang="en-US" sz="4400" b="1" kern="0" spc="1000" dirty="0">
-                <a:solidFill>
-                  <a:schemeClr val="bg1"/>
-                </a:solidFill>
-                <a:latin typeface="Cambria" pitchFamily="34" charset="0"/>
-                <a:ea typeface="Cambria" pitchFamily="34" charset="-122"/>
-                <a:cs typeface="Cambria" pitchFamily="34" charset="-120"/>
-              </a:rPr>
-              <a:t>Life Demo</a:t>
-            </a:r>
-            <a:endParaRPr lang="en-US" sz="4400" dirty="0">
-              <a:solidFill>
-                <a:schemeClr val="bg1"/>
-              </a:solidFill>
-            </a:endParaRPr>
-          </a:p>
-        </p:txBody>
-      </p:sp>
     </p:spTree>
   </p:cSld>
   <p:clrMapOvr>
     <a:masterClrMapping/>
   </p:clrMapOvr>
-  <mc:AlternateContent xmlns:mc="http://schemas.openxmlformats.org/markup-compatibility/2006">
-    <mc:Choice xmlns:p159="http://schemas.microsoft.com/office/powerpoint/2015/09/main" Requires="p159">
+  <mc:AlternateContent xmlns:mc="http://schemas.openxmlformats.org/markup-compatibility/2006" xmlns:p159="http://schemas.microsoft.com/office/powerpoint/2015/09/main">
+    <mc:Choice Requires="p159">
       <p:transition spd="slow">
         <p159:morph option="byObject"/>
       </p:transition>
     </mc:Choice>
-    <mc:Fallback>
+    <mc:Fallback xmlns="">
       <p:transition spd="slow">
         <p:fade/>
       </p:transition>
@@ -16606,133 +14997,6 @@
         <p:cNvPr id="1" name="">
           <a:extLst>
             <a:ext uri="{FF2B5EF4-FFF2-40B4-BE49-F238E27FC236}">
-              <a16:creationId xmlns:a16="http://schemas.microsoft.com/office/drawing/2014/main" id="{7B7CD4EF-ACC1-17A7-753B-F9B826FE80DE}"/>
-            </a:ext>
-          </a:extLst>
-        </p:cNvPr>
-        <p:cNvGrpSpPr/>
-        <p:nvPr/>
-      </p:nvGrpSpPr>
-      <p:grpSpPr>
-        <a:xfrm>
-          <a:off x="0" y="0"/>
-          <a:ext cx="0" cy="0"/>
-          <a:chOff x="0" y="0"/>
-          <a:chExt cx="0" cy="0"/>
-        </a:xfrm>
-      </p:grpSpPr>
-      <p:pic>
-        <p:nvPicPr>
-          <p:cNvPr id="14" name="Inhaltsplatzhalter 4" descr="Ein Bild, das Himmel, Nebel, Mond, draußen enthält.&#10;&#10;KI-generierte Inhalte können fehlerhaft sein.">
-            <a:extLst>
-              <a:ext uri="{FF2B5EF4-FFF2-40B4-BE49-F238E27FC236}">
-                <a16:creationId xmlns:a16="http://schemas.microsoft.com/office/drawing/2014/main" id="{EEA56D78-0686-0C39-FCBB-ACBF9C251EBC}"/>
-              </a:ext>
-            </a:extLst>
-          </p:cNvPr>
-          <p:cNvPicPr>
-            <a:picLocks noChangeAspect="1"/>
-          </p:cNvPicPr>
-          <p:nvPr/>
-        </p:nvPicPr>
-        <p:blipFill>
-          <a:blip r:embed="rId3"/>
-          <a:stretch>
-            <a:fillRect/>
-          </a:stretch>
-        </p:blipFill>
-        <p:spPr>
-          <a:xfrm>
-            <a:off x="0" y="-5022"/>
-            <a:ext cx="9144000" cy="6096000"/>
-          </a:xfrm>
-          <a:prstGeom prst="rect">
-            <a:avLst/>
-          </a:prstGeom>
-        </p:spPr>
-      </p:pic>
-      <p:sp>
-        <p:nvSpPr>
-          <p:cNvPr id="4" name="Text 2">
-            <a:extLst>
-              <a:ext uri="{FF2B5EF4-FFF2-40B4-BE49-F238E27FC236}">
-                <a16:creationId xmlns:a16="http://schemas.microsoft.com/office/drawing/2014/main" id="{A048D539-79A7-1F40-B63C-A6115318797D}"/>
-              </a:ext>
-            </a:extLst>
-          </p:cNvPr>
-          <p:cNvSpPr/>
-          <p:nvPr/>
-        </p:nvSpPr>
-        <p:spPr>
-          <a:xfrm>
-            <a:off x="914400" y="2251710"/>
-            <a:ext cx="7315200" cy="640080"/>
-          </a:xfrm>
-          <a:prstGeom prst="rect">
-            <a:avLst/>
-          </a:prstGeom>
-          <a:noFill/>
-          <a:ln/>
-        </p:spPr>
-        <p:txBody>
-          <a:bodyPr wrap="square" lIns="0" tIns="0" rIns="0" bIns="0" rtlCol="0" anchor="ctr"/>
-          <a:lstStyle/>
-          <a:p>
-            <a:pPr marL="0" indent="0" algn="ctr">
-              <a:buNone/>
-            </a:pPr>
-            <a:r>
-              <a:rPr lang="en-US" sz="4400" b="1" kern="0" spc="1000" dirty="0">
-                <a:solidFill>
-                  <a:schemeClr val="bg1"/>
-                </a:solidFill>
-                <a:latin typeface="Cambria" pitchFamily="34" charset="0"/>
-                <a:ea typeface="Cambria" pitchFamily="34" charset="-122"/>
-                <a:cs typeface="Cambria" pitchFamily="34" charset="-120"/>
-              </a:rPr>
-              <a:t>Life Demo</a:t>
-            </a:r>
-            <a:endParaRPr lang="en-US" sz="4400" dirty="0">
-              <a:solidFill>
-                <a:schemeClr val="bg1"/>
-              </a:solidFill>
-            </a:endParaRPr>
-          </a:p>
-        </p:txBody>
-      </p:sp>
-    </p:spTree>
-    <p:extLst>
-      <p:ext uri="{BB962C8B-B14F-4D97-AF65-F5344CB8AC3E}">
-        <p14:creationId xmlns:p14="http://schemas.microsoft.com/office/powerpoint/2010/main" val="1381083898"/>
-      </p:ext>
-    </p:extLst>
-  </p:cSld>
-  <p:clrMapOvr>
-    <a:masterClrMapping/>
-  </p:clrMapOvr>
-  <mc:AlternateContent xmlns:mc="http://schemas.openxmlformats.org/markup-compatibility/2006">
-    <mc:Choice xmlns:p159="http://schemas.microsoft.com/office/powerpoint/2015/09/main" Requires="p159">
-      <p:transition spd="slow">
-        <p159:morph option="byObject"/>
-      </p:transition>
-    </mc:Choice>
-    <mc:Fallback>
-      <p:transition spd="slow">
-        <p:fade/>
-      </p:transition>
-    </mc:Fallback>
-  </mc:AlternateContent>
-</p:sld>
-</file>
-
-<file path=ppt/slides/slide15.xml><?xml version="1.0" encoding="utf-8"?>
-<p:sld xmlns:a="http://schemas.openxmlformats.org/drawingml/2006/main" xmlns:r="http://schemas.openxmlformats.org/officeDocument/2006/relationships" xmlns:p="http://schemas.openxmlformats.org/presentationml/2006/main">
-  <p:cSld>
-    <p:spTree>
-      <p:nvGrpSpPr>
-        <p:cNvPr id="1" name="">
-          <a:extLst>
-            <a:ext uri="{FF2B5EF4-FFF2-40B4-BE49-F238E27FC236}">
               <a16:creationId xmlns:a16="http://schemas.microsoft.com/office/drawing/2014/main" id="{21C08313-45BE-9AB1-0BBB-A1FBEE87ED0C}"/>
             </a:ext>
           </a:extLst>
@@ -16771,7 +15035,7 @@
         <p:spPr>
           <a:xfrm>
             <a:off x="-9053" y="-50287"/>
-            <a:ext cx="9243588" cy="6096000"/>
+            <a:ext cx="9153053" cy="6096000"/>
           </a:xfrm>
           <a:prstGeom prst="rect">
             <a:avLst/>
@@ -16841,7 +15105,7 @@
         </p:nvSpPr>
         <p:spPr>
           <a:xfrm>
-            <a:off x="-181070" y="-334413"/>
+            <a:off x="-212757" y="-192350"/>
             <a:ext cx="9560459" cy="6380126"/>
           </a:xfrm>
           <a:prstGeom prst="rect">
@@ -16918,13 +15182,13 @@
   <p:clrMapOvr>
     <a:masterClrMapping/>
   </p:clrMapOvr>
-  <mc:AlternateContent xmlns:mc="http://schemas.openxmlformats.org/markup-compatibility/2006">
-    <mc:Choice xmlns:p159="http://schemas.microsoft.com/office/powerpoint/2015/09/main" Requires="p159">
+  <mc:AlternateContent xmlns:mc="http://schemas.openxmlformats.org/markup-compatibility/2006" xmlns:p159="http://schemas.microsoft.com/office/powerpoint/2015/09/main">
+    <mc:Choice Requires="p159">
       <p:transition spd="slow">
         <p159:morph option="byObject"/>
       </p:transition>
     </mc:Choice>
-    <mc:Fallback>
+    <mc:Fallback xmlns="">
       <p:transition spd="slow">
         <p:fade/>
       </p:transition>
@@ -17442,13 +15706,13 @@
   <p:clrMapOvr>
     <a:masterClrMapping/>
   </p:clrMapOvr>
-  <mc:AlternateContent xmlns:mc="http://schemas.openxmlformats.org/markup-compatibility/2006">
-    <mc:Choice xmlns:p159="http://schemas.microsoft.com/office/powerpoint/2015/09/main" Requires="p159">
+  <mc:AlternateContent xmlns:mc="http://schemas.openxmlformats.org/markup-compatibility/2006" xmlns:p159="http://schemas.microsoft.com/office/powerpoint/2015/09/main">
+    <mc:Choice Requires="p159">
       <p:transition spd="slow">
         <p159:morph option="byObject"/>
       </p:transition>
     </mc:Choice>
-    <mc:Fallback>
+    <mc:Fallback xmlns="">
       <p:transition spd="slow">
         <p:fade/>
       </p:transition>
@@ -18285,374 +16549,6 @@
                       </p:childTnLst>
                     </p:cTn>
                   </p:par>
-                  <p:par>
-                    <p:cTn id="53" fill="hold">
-                      <p:stCondLst>
-                        <p:cond delay="indefinite"/>
-                      </p:stCondLst>
-                      <p:childTnLst>
-                        <p:par>
-                          <p:cTn id="54" fill="hold">
-                            <p:stCondLst>
-                              <p:cond delay="0"/>
-                            </p:stCondLst>
-                            <p:childTnLst>
-                              <p:par>
-                                <p:cTn id="55" presetID="22" presetClass="exit" presetSubtype="4" fill="hold" grpId="1" nodeType="clickEffect">
-                                  <p:stCondLst>
-                                    <p:cond delay="0"/>
-                                  </p:stCondLst>
-                                  <p:childTnLst>
-                                    <p:animEffect transition="out" filter="wipe(down)">
-                                      <p:cBhvr>
-                                        <p:cTn id="56" dur="500"/>
-                                        <p:tgtEl>
-                                          <p:spTgt spid="8"/>
-                                        </p:tgtEl>
-                                      </p:cBhvr>
-                                    </p:animEffect>
-                                    <p:set>
-                                      <p:cBhvr>
-                                        <p:cTn id="57" dur="1" fill="hold">
-                                          <p:stCondLst>
-                                            <p:cond delay="499"/>
-                                          </p:stCondLst>
-                                        </p:cTn>
-                                        <p:tgtEl>
-                                          <p:spTgt spid="8"/>
-                                        </p:tgtEl>
-                                        <p:attrNameLst>
-                                          <p:attrName>style.visibility</p:attrName>
-                                        </p:attrNameLst>
-                                      </p:cBhvr>
-                                      <p:to>
-                                        <p:strVal val="hidden"/>
-                                      </p:to>
-                                    </p:set>
-                                  </p:childTnLst>
-                                </p:cTn>
-                              </p:par>
-                              <p:par>
-                                <p:cTn id="58" presetID="22" presetClass="exit" presetSubtype="4" fill="hold" grpId="1" nodeType="withEffect">
-                                  <p:stCondLst>
-                                    <p:cond delay="0"/>
-                                  </p:stCondLst>
-                                  <p:childTnLst>
-                                    <p:animEffect transition="out" filter="wipe(down)">
-                                      <p:cBhvr>
-                                        <p:cTn id="59" dur="500"/>
-                                        <p:tgtEl>
-                                          <p:spTgt spid="9"/>
-                                        </p:tgtEl>
-                                      </p:cBhvr>
-                                    </p:animEffect>
-                                    <p:set>
-                                      <p:cBhvr>
-                                        <p:cTn id="60" dur="1" fill="hold">
-                                          <p:stCondLst>
-                                            <p:cond delay="499"/>
-                                          </p:stCondLst>
-                                        </p:cTn>
-                                        <p:tgtEl>
-                                          <p:spTgt spid="9"/>
-                                        </p:tgtEl>
-                                        <p:attrNameLst>
-                                          <p:attrName>style.visibility</p:attrName>
-                                        </p:attrNameLst>
-                                      </p:cBhvr>
-                                      <p:to>
-                                        <p:strVal val="hidden"/>
-                                      </p:to>
-                                    </p:set>
-                                  </p:childTnLst>
-                                </p:cTn>
-                              </p:par>
-                              <p:par>
-                                <p:cTn id="61" presetID="22" presetClass="exit" presetSubtype="4" fill="hold" grpId="1" nodeType="withEffect">
-                                  <p:stCondLst>
-                                    <p:cond delay="0"/>
-                                  </p:stCondLst>
-                                  <p:childTnLst>
-                                    <p:animEffect transition="out" filter="wipe(down)">
-                                      <p:cBhvr>
-                                        <p:cTn id="62" dur="500"/>
-                                        <p:tgtEl>
-                                          <p:spTgt spid="10"/>
-                                        </p:tgtEl>
-                                      </p:cBhvr>
-                                    </p:animEffect>
-                                    <p:set>
-                                      <p:cBhvr>
-                                        <p:cTn id="63" dur="1" fill="hold">
-                                          <p:stCondLst>
-                                            <p:cond delay="499"/>
-                                          </p:stCondLst>
-                                        </p:cTn>
-                                        <p:tgtEl>
-                                          <p:spTgt spid="10"/>
-                                        </p:tgtEl>
-                                        <p:attrNameLst>
-                                          <p:attrName>style.visibility</p:attrName>
-                                        </p:attrNameLst>
-                                      </p:cBhvr>
-                                      <p:to>
-                                        <p:strVal val="hidden"/>
-                                      </p:to>
-                                    </p:set>
-                                  </p:childTnLst>
-                                </p:cTn>
-                              </p:par>
-                              <p:par>
-                                <p:cTn id="64" presetID="22" presetClass="exit" presetSubtype="4" fill="hold" grpId="1" nodeType="withEffect">
-                                  <p:stCondLst>
-                                    <p:cond delay="0"/>
-                                  </p:stCondLst>
-                                  <p:childTnLst>
-                                    <p:animEffect transition="out" filter="wipe(down)">
-                                      <p:cBhvr>
-                                        <p:cTn id="65" dur="500"/>
-                                        <p:tgtEl>
-                                          <p:spTgt spid="11"/>
-                                        </p:tgtEl>
-                                      </p:cBhvr>
-                                    </p:animEffect>
-                                    <p:set>
-                                      <p:cBhvr>
-                                        <p:cTn id="66" dur="1" fill="hold">
-                                          <p:stCondLst>
-                                            <p:cond delay="499"/>
-                                          </p:stCondLst>
-                                        </p:cTn>
-                                        <p:tgtEl>
-                                          <p:spTgt spid="11"/>
-                                        </p:tgtEl>
-                                        <p:attrNameLst>
-                                          <p:attrName>style.visibility</p:attrName>
-                                        </p:attrNameLst>
-                                      </p:cBhvr>
-                                      <p:to>
-                                        <p:strVal val="hidden"/>
-                                      </p:to>
-                                    </p:set>
-                                  </p:childTnLst>
-                                </p:cTn>
-                              </p:par>
-                              <p:par>
-                                <p:cTn id="67" presetID="22" presetClass="exit" presetSubtype="4" fill="hold" grpId="1" nodeType="withEffect">
-                                  <p:stCondLst>
-                                    <p:cond delay="0"/>
-                                  </p:stCondLst>
-                                  <p:childTnLst>
-                                    <p:animEffect transition="out" filter="wipe(down)">
-                                      <p:cBhvr>
-                                        <p:cTn id="68" dur="500"/>
-                                        <p:tgtEl>
-                                          <p:spTgt spid="12"/>
-                                        </p:tgtEl>
-                                      </p:cBhvr>
-                                    </p:animEffect>
-                                    <p:set>
-                                      <p:cBhvr>
-                                        <p:cTn id="69" dur="1" fill="hold">
-                                          <p:stCondLst>
-                                            <p:cond delay="499"/>
-                                          </p:stCondLst>
-                                        </p:cTn>
-                                        <p:tgtEl>
-                                          <p:spTgt spid="12"/>
-                                        </p:tgtEl>
-                                        <p:attrNameLst>
-                                          <p:attrName>style.visibility</p:attrName>
-                                        </p:attrNameLst>
-                                      </p:cBhvr>
-                                      <p:to>
-                                        <p:strVal val="hidden"/>
-                                      </p:to>
-                                    </p:set>
-                                  </p:childTnLst>
-                                </p:cTn>
-                              </p:par>
-                              <p:par>
-                                <p:cTn id="70" presetID="22" presetClass="exit" presetSubtype="4" fill="hold" grpId="1" nodeType="withEffect">
-                                  <p:stCondLst>
-                                    <p:cond delay="0"/>
-                                  </p:stCondLst>
-                                  <p:childTnLst>
-                                    <p:animEffect transition="out" filter="wipe(down)">
-                                      <p:cBhvr>
-                                        <p:cTn id="71" dur="500"/>
-                                        <p:tgtEl>
-                                          <p:spTgt spid="13"/>
-                                        </p:tgtEl>
-                                      </p:cBhvr>
-                                    </p:animEffect>
-                                    <p:set>
-                                      <p:cBhvr>
-                                        <p:cTn id="72" dur="1" fill="hold">
-                                          <p:stCondLst>
-                                            <p:cond delay="499"/>
-                                          </p:stCondLst>
-                                        </p:cTn>
-                                        <p:tgtEl>
-                                          <p:spTgt spid="13"/>
-                                        </p:tgtEl>
-                                        <p:attrNameLst>
-                                          <p:attrName>style.visibility</p:attrName>
-                                        </p:attrNameLst>
-                                      </p:cBhvr>
-                                      <p:to>
-                                        <p:strVal val="hidden"/>
-                                      </p:to>
-                                    </p:set>
-                                  </p:childTnLst>
-                                </p:cTn>
-                              </p:par>
-                              <p:par>
-                                <p:cTn id="73" presetID="22" presetClass="exit" presetSubtype="4" fill="hold" grpId="1" nodeType="withEffect">
-                                  <p:stCondLst>
-                                    <p:cond delay="0"/>
-                                  </p:stCondLst>
-                                  <p:childTnLst>
-                                    <p:animEffect transition="out" filter="wipe(down)">
-                                      <p:cBhvr>
-                                        <p:cTn id="74" dur="500"/>
-                                        <p:tgtEl>
-                                          <p:spTgt spid="14"/>
-                                        </p:tgtEl>
-                                      </p:cBhvr>
-                                    </p:animEffect>
-                                    <p:set>
-                                      <p:cBhvr>
-                                        <p:cTn id="75" dur="1" fill="hold">
-                                          <p:stCondLst>
-                                            <p:cond delay="499"/>
-                                          </p:stCondLst>
-                                        </p:cTn>
-                                        <p:tgtEl>
-                                          <p:spTgt spid="14"/>
-                                        </p:tgtEl>
-                                        <p:attrNameLst>
-                                          <p:attrName>style.visibility</p:attrName>
-                                        </p:attrNameLst>
-                                      </p:cBhvr>
-                                      <p:to>
-                                        <p:strVal val="hidden"/>
-                                      </p:to>
-                                    </p:set>
-                                  </p:childTnLst>
-                                </p:cTn>
-                              </p:par>
-                              <p:par>
-                                <p:cTn id="76" presetID="22" presetClass="exit" presetSubtype="4" fill="hold" grpId="1" nodeType="withEffect">
-                                  <p:stCondLst>
-                                    <p:cond delay="0"/>
-                                  </p:stCondLst>
-                                  <p:childTnLst>
-                                    <p:animEffect transition="out" filter="wipe(down)">
-                                      <p:cBhvr>
-                                        <p:cTn id="77" dur="500"/>
-                                        <p:tgtEl>
-                                          <p:spTgt spid="15"/>
-                                        </p:tgtEl>
-                                      </p:cBhvr>
-                                    </p:animEffect>
-                                    <p:set>
-                                      <p:cBhvr>
-                                        <p:cTn id="78" dur="1" fill="hold">
-                                          <p:stCondLst>
-                                            <p:cond delay="499"/>
-                                          </p:stCondLst>
-                                        </p:cTn>
-                                        <p:tgtEl>
-                                          <p:spTgt spid="15"/>
-                                        </p:tgtEl>
-                                        <p:attrNameLst>
-                                          <p:attrName>style.visibility</p:attrName>
-                                        </p:attrNameLst>
-                                      </p:cBhvr>
-                                      <p:to>
-                                        <p:strVal val="hidden"/>
-                                      </p:to>
-                                    </p:set>
-                                  </p:childTnLst>
-                                </p:cTn>
-                              </p:par>
-                              <p:par>
-                                <p:cTn id="79" presetID="22" presetClass="exit" presetSubtype="4" fill="hold" grpId="1" nodeType="withEffect">
-                                  <p:stCondLst>
-                                    <p:cond delay="0"/>
-                                  </p:stCondLst>
-                                  <p:childTnLst>
-                                    <p:animEffect transition="out" filter="wipe(down)">
-                                      <p:cBhvr>
-                                        <p:cTn id="80" dur="500"/>
-                                        <p:tgtEl>
-                                          <p:spTgt spid="16"/>
-                                        </p:tgtEl>
-                                      </p:cBhvr>
-                                    </p:animEffect>
-                                    <p:set>
-                                      <p:cBhvr>
-                                        <p:cTn id="81" dur="1" fill="hold">
-                                          <p:stCondLst>
-                                            <p:cond delay="499"/>
-                                          </p:stCondLst>
-                                        </p:cTn>
-                                        <p:tgtEl>
-                                          <p:spTgt spid="16"/>
-                                        </p:tgtEl>
-                                        <p:attrNameLst>
-                                          <p:attrName>style.visibility</p:attrName>
-                                        </p:attrNameLst>
-                                      </p:cBhvr>
-                                      <p:to>
-                                        <p:strVal val="hidden"/>
-                                      </p:to>
-                                    </p:set>
-                                  </p:childTnLst>
-                                </p:cTn>
-                              </p:par>
-                              <p:par>
-                                <p:cTn id="82" presetID="22" presetClass="exit" presetSubtype="4" fill="hold" grpId="1" nodeType="withEffect">
-                                  <p:stCondLst>
-                                    <p:cond delay="0"/>
-                                  </p:stCondLst>
-                                  <p:childTnLst>
-                                    <p:animEffect transition="out" filter="wipe(down)">
-                                      <p:cBhvr>
-                                        <p:cTn id="83" dur="500"/>
-                                        <p:tgtEl>
-                                          <p:spTgt spid="17"/>
-                                        </p:tgtEl>
-                                      </p:cBhvr>
-                                    </p:animEffect>
-                                    <p:set>
-                                      <p:cBhvr>
-                                        <p:cTn id="84" dur="1" fill="hold">
-                                          <p:stCondLst>
-                                            <p:cond delay="499"/>
-                                          </p:stCondLst>
-                                        </p:cTn>
-                                        <p:tgtEl>
-                                          <p:spTgt spid="17"/>
-                                        </p:tgtEl>
-                                        <p:attrNameLst>
-                                          <p:attrName>style.visibility</p:attrName>
-                                        </p:attrNameLst>
-                                      </p:cBhvr>
-                                      <p:to>
-                                        <p:strVal val="hidden"/>
-                                      </p:to>
-                                    </p:set>
-                                  </p:childTnLst>
-                                </p:cTn>
-                              </p:par>
-                            </p:childTnLst>
-                          </p:cTn>
-                        </p:par>
-                      </p:childTnLst>
-                    </p:cTn>
-                  </p:par>
                 </p:childTnLst>
               </p:cTn>
               <p:prevCondLst>
@@ -18676,1335 +16572,21 @@
     </p:tnLst>
     <p:bldLst>
       <p:bldP spid="8" grpId="0" animBg="1"/>
-      <p:bldP spid="8" grpId="1" animBg="1"/>
       <p:bldP spid="9" grpId="0" animBg="1"/>
-      <p:bldP spid="9" grpId="1" animBg="1"/>
       <p:bldP spid="10" grpId="0" animBg="1"/>
-      <p:bldP spid="10" grpId="1" animBg="1"/>
       <p:bldP spid="11" grpId="0" animBg="1"/>
-      <p:bldP spid="11" grpId="1" animBg="1"/>
       <p:bldP spid="12" grpId="0" animBg="1"/>
-      <p:bldP spid="12" grpId="1" animBg="1"/>
       <p:bldP spid="13" grpId="0" animBg="1"/>
-      <p:bldP spid="13" grpId="1" animBg="1"/>
       <p:bldP spid="14" grpId="0" animBg="1"/>
-      <p:bldP spid="14" grpId="1" animBg="1"/>
       <p:bldP spid="15" grpId="0" animBg="1"/>
-      <p:bldP spid="15" grpId="1" animBg="1"/>
       <p:bldP spid="16" grpId="0" animBg="1"/>
-      <p:bldP spid="16" grpId="1" animBg="1"/>
       <p:bldP spid="17" grpId="0" animBg="1"/>
-      <p:bldP spid="17" grpId="1" animBg="1"/>
     </p:bldLst>
   </p:timing>
 </p:sld>
 </file>
 
 <file path=ppt/slides/slide3.xml><?xml version="1.0" encoding="utf-8"?>
-<p:sld xmlns:a="http://schemas.openxmlformats.org/drawingml/2006/main" xmlns:r="http://schemas.openxmlformats.org/officeDocument/2006/relationships" xmlns:p="http://schemas.openxmlformats.org/presentationml/2006/main">
-  <p:cSld name="Slide 3">
-    <p:bg>
-      <p:bgPr>
-        <a:solidFill>
-          <a:srgbClr val="12121A"/>
-        </a:solidFill>
-        <a:effectLst/>
-      </p:bgPr>
-    </p:bg>
-    <p:spTree>
-      <p:nvGrpSpPr>
-        <p:cNvPr id="1" name=""/>
-        <p:cNvGrpSpPr/>
-        <p:nvPr/>
-      </p:nvGrpSpPr>
-      <p:grpSpPr>
-        <a:xfrm>
-          <a:off x="0" y="0"/>
-          <a:ext cx="0" cy="0"/>
-          <a:chOff x="0" y="0"/>
-          <a:chExt cx="0" cy="0"/>
-        </a:xfrm>
-      </p:grpSpPr>
-      <p:pic>
-        <p:nvPicPr>
-          <p:cNvPr id="25" name="Inhaltsplatzhalter 4" descr="Ein Bild, das Himmel, Nebel, Mond, draußen enthält.&#10;&#10;KI-generierte Inhalte können fehlerhaft sein.">
-            <a:extLst>
-              <a:ext uri="{FF2B5EF4-FFF2-40B4-BE49-F238E27FC236}">
-                <a16:creationId xmlns:a16="http://schemas.microsoft.com/office/drawing/2014/main" id="{059F3955-43B4-6A52-1CE9-BFC111C8F237}"/>
-              </a:ext>
-            </a:extLst>
-          </p:cNvPr>
-          <p:cNvPicPr>
-            <a:picLocks noChangeAspect="1"/>
-          </p:cNvPicPr>
-          <p:nvPr/>
-        </p:nvPicPr>
-        <p:blipFill>
-          <a:blip r:embed="rId3"/>
-          <a:stretch>
-            <a:fillRect/>
-          </a:stretch>
-        </p:blipFill>
-        <p:spPr>
-          <a:xfrm>
-            <a:off x="0" y="-5022"/>
-            <a:ext cx="9144000" cy="6096000"/>
-          </a:xfrm>
-          <a:prstGeom prst="rect">
-            <a:avLst/>
-          </a:prstGeom>
-        </p:spPr>
-      </p:pic>
-      <p:sp>
-        <p:nvSpPr>
-          <p:cNvPr id="4" name="Text 2"/>
-          <p:cNvSpPr/>
-          <p:nvPr/>
-        </p:nvSpPr>
-        <p:spPr>
-          <a:xfrm>
-            <a:off x="320040" y="296168"/>
-            <a:ext cx="8503920" cy="594360"/>
-          </a:xfrm>
-          <a:prstGeom prst="rect">
-            <a:avLst/>
-          </a:prstGeom>
-          <a:noFill/>
-          <a:ln/>
-        </p:spPr>
-        <p:txBody>
-          <a:bodyPr wrap="square" lIns="0" tIns="0" rIns="0" bIns="0" rtlCol="0" anchor="ctr"/>
-          <a:lstStyle/>
-          <a:p>
-            <a:pPr marL="0" indent="0">
-              <a:buNone/>
-            </a:pPr>
-            <a:r>
-              <a:rPr lang="en-US" sz="3000" b="1" kern="0" spc="200" dirty="0">
-                <a:solidFill>
-                  <a:srgbClr val="F0F0F0"/>
-                </a:solidFill>
-                <a:latin typeface="Cambria" pitchFamily="34" charset="0"/>
-                <a:ea typeface="Cambria" pitchFamily="34" charset="-122"/>
-                <a:cs typeface="Cambria" pitchFamily="34" charset="-120"/>
-              </a:rPr>
-              <a:t>ZIELE DES PROJEKTS</a:t>
-            </a:r>
-            <a:endParaRPr lang="en-US" sz="3000" dirty="0"/>
-          </a:p>
-        </p:txBody>
-      </p:sp>
-      <p:sp>
-        <p:nvSpPr>
-          <p:cNvPr id="8" name="Shape 5"/>
-          <p:cNvSpPr/>
-          <p:nvPr/>
-        </p:nvSpPr>
-        <p:spPr>
-          <a:xfrm>
-            <a:off x="320040" y="1188720"/>
-            <a:ext cx="8503920" cy="594360"/>
-          </a:xfrm>
-          <a:prstGeom prst="roundRect">
-            <a:avLst>
-              <a:gd name="adj" fmla="val 12308"/>
-            </a:avLst>
-          </a:prstGeom>
-          <a:solidFill>
-            <a:schemeClr val="tx1">
-              <a:alpha val="50000"/>
-            </a:schemeClr>
-          </a:solidFill>
-          <a:ln w="6350">
-            <a:solidFill>
-              <a:srgbClr val="4A4A6A"/>
-            </a:solidFill>
-            <a:prstDash val="solid"/>
-          </a:ln>
-          <a:effectLst>
-            <a:outerShdw blurRad="127000" dist="38100" dir="2700000" algn="bl" rotWithShape="0">
-              <a:srgbClr val="000000">
-                <a:alpha val="50000"/>
-              </a:srgbClr>
-            </a:outerShdw>
-          </a:effectLst>
-        </p:spPr>
-        <p:txBody>
-          <a:bodyPr/>
-          <a:lstStyle/>
-          <a:p>
-            <a:endParaRPr lang="de-DE"/>
-          </a:p>
-        </p:txBody>
-      </p:sp>
-      <p:pic>
-        <p:nvPicPr>
-          <p:cNvPr id="9" name="Image 1" descr="preencoded.png"/>
-          <p:cNvPicPr>
-            <a:picLocks noChangeAspect="1"/>
-          </p:cNvPicPr>
-          <p:nvPr/>
-        </p:nvPicPr>
-        <p:blipFill>
-          <a:blip r:embed="rId4"/>
-          <a:stretch>
-            <a:fillRect/>
-          </a:stretch>
-        </p:blipFill>
-        <p:spPr>
-          <a:xfrm>
-            <a:off x="502920" y="1298448"/>
-            <a:ext cx="365760" cy="365760"/>
-          </a:xfrm>
-          <a:prstGeom prst="rect">
-            <a:avLst/>
-          </a:prstGeom>
-        </p:spPr>
-      </p:pic>
-      <p:sp>
-        <p:nvSpPr>
-          <p:cNvPr id="10" name="Text 6"/>
-          <p:cNvSpPr/>
-          <p:nvPr/>
-        </p:nvSpPr>
-        <p:spPr>
-          <a:xfrm>
-            <a:off x="1005840" y="1261872"/>
-            <a:ext cx="7680960" cy="457200"/>
-          </a:xfrm>
-          <a:prstGeom prst="rect">
-            <a:avLst/>
-          </a:prstGeom>
-          <a:noFill/>
-          <a:ln/>
-        </p:spPr>
-        <p:txBody>
-          <a:bodyPr wrap="square" lIns="0" tIns="0" rIns="0" bIns="0" rtlCol="0" anchor="ctr"/>
-          <a:lstStyle/>
-          <a:p>
-            <a:pPr marL="0" indent="0">
-              <a:buNone/>
-            </a:pPr>
-            <a:r>
-              <a:rPr lang="en-US" sz="1600" dirty="0">
-                <a:solidFill>
-                  <a:srgbClr val="DADAED"/>
-                </a:solidFill>
-                <a:latin typeface="Calibri" pitchFamily="34" charset="0"/>
-                <a:ea typeface="Calibri" pitchFamily="34" charset="-122"/>
-                <a:cs typeface="Calibri" pitchFamily="34" charset="-120"/>
-              </a:rPr>
-              <a:t>HTML, CSS &amp; JavaScript anwenden</a:t>
-            </a:r>
-            <a:endParaRPr lang="en-US" sz="1600" dirty="0"/>
-          </a:p>
-        </p:txBody>
-      </p:sp>
-      <p:sp>
-        <p:nvSpPr>
-          <p:cNvPr id="11" name="Shape 7"/>
-          <p:cNvSpPr/>
-          <p:nvPr/>
-        </p:nvSpPr>
-        <p:spPr>
-          <a:xfrm>
-            <a:off x="320040" y="1920240"/>
-            <a:ext cx="8503920" cy="594360"/>
-          </a:xfrm>
-          <a:prstGeom prst="roundRect">
-            <a:avLst>
-              <a:gd name="adj" fmla="val 12308"/>
-            </a:avLst>
-          </a:prstGeom>
-          <a:solidFill>
-            <a:schemeClr val="tx1">
-              <a:alpha val="50000"/>
-            </a:schemeClr>
-          </a:solidFill>
-          <a:ln w="6350">
-            <a:solidFill>
-              <a:srgbClr val="4A4A6A"/>
-            </a:solidFill>
-            <a:prstDash val="solid"/>
-          </a:ln>
-          <a:effectLst>
-            <a:outerShdw blurRad="127000" dist="38100" dir="2700000" algn="bl" rotWithShape="0">
-              <a:srgbClr val="000000">
-                <a:alpha val="50000"/>
-              </a:srgbClr>
-            </a:outerShdw>
-          </a:effectLst>
-        </p:spPr>
-        <p:txBody>
-          <a:bodyPr/>
-          <a:lstStyle/>
-          <a:p>
-            <a:endParaRPr lang="de-DE"/>
-          </a:p>
-        </p:txBody>
-      </p:sp>
-      <p:pic>
-        <p:nvPicPr>
-          <p:cNvPr id="12" name="Image 2" descr="preencoded.png"/>
-          <p:cNvPicPr>
-            <a:picLocks noChangeAspect="1"/>
-          </p:cNvPicPr>
-          <p:nvPr/>
-        </p:nvPicPr>
-        <p:blipFill>
-          <a:blip r:embed="rId5"/>
-          <a:stretch>
-            <a:fillRect/>
-          </a:stretch>
-        </p:blipFill>
-        <p:spPr>
-          <a:xfrm>
-            <a:off x="502920" y="2029968"/>
-            <a:ext cx="365760" cy="365760"/>
-          </a:xfrm>
-          <a:prstGeom prst="rect">
-            <a:avLst/>
-          </a:prstGeom>
-        </p:spPr>
-      </p:pic>
-      <p:sp>
-        <p:nvSpPr>
-          <p:cNvPr id="13" name="Text 8"/>
-          <p:cNvSpPr/>
-          <p:nvPr/>
-        </p:nvSpPr>
-        <p:spPr>
-          <a:xfrm>
-            <a:off x="1005840" y="1993392"/>
-            <a:ext cx="7680960" cy="457200"/>
-          </a:xfrm>
-          <a:prstGeom prst="rect">
-            <a:avLst/>
-          </a:prstGeom>
-          <a:noFill/>
-          <a:ln/>
-        </p:spPr>
-        <p:txBody>
-          <a:bodyPr wrap="square" lIns="0" tIns="0" rIns="0" bIns="0" rtlCol="0" anchor="ctr"/>
-          <a:lstStyle/>
-          <a:p>
-            <a:pPr marL="0" indent="0">
-              <a:buNone/>
-            </a:pPr>
-            <a:r>
-              <a:rPr lang="en-US" sz="1600" dirty="0">
-                <a:solidFill>
-                  <a:srgbClr val="DADAED"/>
-                </a:solidFill>
-                <a:latin typeface="Calibri" pitchFamily="34" charset="0"/>
-                <a:ea typeface="Calibri" pitchFamily="34" charset="-122"/>
-                <a:cs typeface="Calibri" pitchFamily="34" charset="-120"/>
-              </a:rPr>
-              <a:t>Komplexeres Spiel entwickeln</a:t>
-            </a:r>
-            <a:endParaRPr lang="en-US" sz="1600" dirty="0"/>
-          </a:p>
-        </p:txBody>
-      </p:sp>
-      <p:sp>
-        <p:nvSpPr>
-          <p:cNvPr id="14" name="Shape 9"/>
-          <p:cNvSpPr/>
-          <p:nvPr/>
-        </p:nvSpPr>
-        <p:spPr>
-          <a:xfrm>
-            <a:off x="320040" y="2651760"/>
-            <a:ext cx="8503920" cy="594360"/>
-          </a:xfrm>
-          <a:prstGeom prst="roundRect">
-            <a:avLst>
-              <a:gd name="adj" fmla="val 12308"/>
-            </a:avLst>
-          </a:prstGeom>
-          <a:solidFill>
-            <a:schemeClr val="tx1">
-              <a:alpha val="50000"/>
-            </a:schemeClr>
-          </a:solidFill>
-          <a:ln w="6350">
-            <a:solidFill>
-              <a:srgbClr val="4A4A6A"/>
-            </a:solidFill>
-            <a:prstDash val="solid"/>
-          </a:ln>
-          <a:effectLst>
-            <a:outerShdw blurRad="127000" dist="38100" dir="2700000" algn="bl" rotWithShape="0">
-              <a:srgbClr val="000000">
-                <a:alpha val="50000"/>
-              </a:srgbClr>
-            </a:outerShdw>
-          </a:effectLst>
-        </p:spPr>
-        <p:txBody>
-          <a:bodyPr/>
-          <a:lstStyle/>
-          <a:p>
-            <a:endParaRPr lang="de-DE"/>
-          </a:p>
-        </p:txBody>
-      </p:sp>
-      <p:pic>
-        <p:nvPicPr>
-          <p:cNvPr id="15" name="Image 3" descr="preencoded.png"/>
-          <p:cNvPicPr>
-            <a:picLocks noChangeAspect="1"/>
-          </p:cNvPicPr>
-          <p:nvPr/>
-        </p:nvPicPr>
-        <p:blipFill>
-          <a:blip r:embed="rId6"/>
-          <a:stretch>
-            <a:fillRect/>
-          </a:stretch>
-        </p:blipFill>
-        <p:spPr>
-          <a:xfrm>
-            <a:off x="502920" y="2761488"/>
-            <a:ext cx="365760" cy="365760"/>
-          </a:xfrm>
-          <a:prstGeom prst="rect">
-            <a:avLst/>
-          </a:prstGeom>
-        </p:spPr>
-      </p:pic>
-      <p:sp>
-        <p:nvSpPr>
-          <p:cNvPr id="16" name="Text 10"/>
-          <p:cNvSpPr/>
-          <p:nvPr/>
-        </p:nvSpPr>
-        <p:spPr>
-          <a:xfrm>
-            <a:off x="1005840" y="2724912"/>
-            <a:ext cx="7680960" cy="457200"/>
-          </a:xfrm>
-          <a:prstGeom prst="rect">
-            <a:avLst/>
-          </a:prstGeom>
-          <a:noFill/>
-          <a:ln/>
-        </p:spPr>
-        <p:txBody>
-          <a:bodyPr wrap="square" lIns="0" tIns="0" rIns="0" bIns="0" rtlCol="0" anchor="ctr"/>
-          <a:lstStyle/>
-          <a:p>
-            <a:pPr marL="0" indent="0">
-              <a:buNone/>
-            </a:pPr>
-            <a:r>
-              <a:rPr lang="en-US" sz="1600" dirty="0">
-                <a:solidFill>
-                  <a:srgbClr val="DADAED"/>
-                </a:solidFill>
-                <a:latin typeface="Calibri" pitchFamily="34" charset="0"/>
-                <a:ea typeface="Calibri" pitchFamily="34" charset="-122"/>
-                <a:cs typeface="Calibri" pitchFamily="34" charset="-120"/>
-              </a:rPr>
-              <a:t>Programmierkenntnisse vertiefen</a:t>
-            </a:r>
-            <a:endParaRPr lang="en-US" sz="1600" dirty="0"/>
-          </a:p>
-        </p:txBody>
-      </p:sp>
-      <p:sp>
-        <p:nvSpPr>
-          <p:cNvPr id="17" name="Shape 11"/>
-          <p:cNvSpPr/>
-          <p:nvPr/>
-        </p:nvSpPr>
-        <p:spPr>
-          <a:xfrm>
-            <a:off x="320040" y="3383280"/>
-            <a:ext cx="8503920" cy="594360"/>
-          </a:xfrm>
-          <a:prstGeom prst="roundRect">
-            <a:avLst>
-              <a:gd name="adj" fmla="val 12308"/>
-            </a:avLst>
-          </a:prstGeom>
-          <a:solidFill>
-            <a:schemeClr val="tx1">
-              <a:alpha val="50000"/>
-            </a:schemeClr>
-          </a:solidFill>
-          <a:ln w="6350">
-            <a:solidFill>
-              <a:srgbClr val="4A4A6A"/>
-            </a:solidFill>
-            <a:prstDash val="solid"/>
-          </a:ln>
-          <a:effectLst>
-            <a:outerShdw blurRad="127000" dist="38100" dir="2700000" algn="bl" rotWithShape="0">
-              <a:srgbClr val="000000">
-                <a:alpha val="50000"/>
-              </a:srgbClr>
-            </a:outerShdw>
-          </a:effectLst>
-        </p:spPr>
-        <p:txBody>
-          <a:bodyPr/>
-          <a:lstStyle/>
-          <a:p>
-            <a:endParaRPr lang="de-DE"/>
-          </a:p>
-        </p:txBody>
-      </p:sp>
-      <p:pic>
-        <p:nvPicPr>
-          <p:cNvPr id="18" name="Image 4" descr="preencoded.png"/>
-          <p:cNvPicPr>
-            <a:picLocks noChangeAspect="1"/>
-          </p:cNvPicPr>
-          <p:nvPr/>
-        </p:nvPicPr>
-        <p:blipFill>
-          <a:blip r:embed="rId7"/>
-          <a:stretch>
-            <a:fillRect/>
-          </a:stretch>
-        </p:blipFill>
-        <p:spPr>
-          <a:xfrm>
-            <a:off x="502920" y="3493008"/>
-            <a:ext cx="365760" cy="365760"/>
-          </a:xfrm>
-          <a:prstGeom prst="rect">
-            <a:avLst/>
-          </a:prstGeom>
-        </p:spPr>
-      </p:pic>
-      <p:sp>
-        <p:nvSpPr>
-          <p:cNvPr id="19" name="Text 12"/>
-          <p:cNvSpPr/>
-          <p:nvPr/>
-        </p:nvSpPr>
-        <p:spPr>
-          <a:xfrm>
-            <a:off x="1005840" y="3456432"/>
-            <a:ext cx="7680960" cy="457200"/>
-          </a:xfrm>
-          <a:prstGeom prst="rect">
-            <a:avLst/>
-          </a:prstGeom>
-          <a:noFill/>
-          <a:ln/>
-        </p:spPr>
-        <p:txBody>
-          <a:bodyPr wrap="square" lIns="0" tIns="0" rIns="0" bIns="0" rtlCol="0" anchor="ctr"/>
-          <a:lstStyle/>
-          <a:p>
-            <a:pPr marL="0" indent="0">
-              <a:buNone/>
-            </a:pPr>
-            <a:r>
-              <a:rPr lang="en-US" sz="1600" dirty="0">
-                <a:solidFill>
-                  <a:srgbClr val="DADAED"/>
-                </a:solidFill>
-                <a:latin typeface="Calibri" pitchFamily="34" charset="0"/>
-                <a:ea typeface="Calibri" pitchFamily="34" charset="-122"/>
-                <a:cs typeface="Calibri" pitchFamily="34" charset="-120"/>
-              </a:rPr>
-              <a:t>Spielzustände &amp; Logik beherrschen</a:t>
-            </a:r>
-            <a:endParaRPr lang="en-US" sz="1600" dirty="0"/>
-          </a:p>
-        </p:txBody>
-      </p:sp>
-      <p:sp>
-        <p:nvSpPr>
-          <p:cNvPr id="20" name="Shape 13"/>
-          <p:cNvSpPr/>
-          <p:nvPr/>
-        </p:nvSpPr>
-        <p:spPr>
-          <a:xfrm>
-            <a:off x="320040" y="4114800"/>
-            <a:ext cx="8503920" cy="594360"/>
-          </a:xfrm>
-          <a:prstGeom prst="roundRect">
-            <a:avLst>
-              <a:gd name="adj" fmla="val 12308"/>
-            </a:avLst>
-          </a:prstGeom>
-          <a:solidFill>
-            <a:schemeClr val="tx1">
-              <a:alpha val="50000"/>
-            </a:schemeClr>
-          </a:solidFill>
-          <a:ln w="6350">
-            <a:solidFill>
-              <a:srgbClr val="4A4A6A"/>
-            </a:solidFill>
-            <a:prstDash val="solid"/>
-          </a:ln>
-          <a:effectLst>
-            <a:outerShdw blurRad="127000" dist="38100" dir="2700000" algn="bl" rotWithShape="0">
-              <a:srgbClr val="000000">
-                <a:alpha val="50000"/>
-              </a:srgbClr>
-            </a:outerShdw>
-          </a:effectLst>
-        </p:spPr>
-        <p:txBody>
-          <a:bodyPr/>
-          <a:lstStyle/>
-          <a:p>
-            <a:endParaRPr lang="de-DE"/>
-          </a:p>
-        </p:txBody>
-      </p:sp>
-      <p:pic>
-        <p:nvPicPr>
-          <p:cNvPr id="21" name="Image 5" descr="preencoded.png"/>
-          <p:cNvPicPr>
-            <a:picLocks noChangeAspect="1"/>
-          </p:cNvPicPr>
-          <p:nvPr/>
-        </p:nvPicPr>
-        <p:blipFill>
-          <a:blip r:embed="rId8"/>
-          <a:stretch>
-            <a:fillRect/>
-          </a:stretch>
-        </p:blipFill>
-        <p:spPr>
-          <a:xfrm>
-            <a:off x="502920" y="4224528"/>
-            <a:ext cx="365760" cy="365760"/>
-          </a:xfrm>
-          <a:prstGeom prst="rect">
-            <a:avLst/>
-          </a:prstGeom>
-        </p:spPr>
-      </p:pic>
-      <p:sp>
-        <p:nvSpPr>
-          <p:cNvPr id="22" name="Text 14"/>
-          <p:cNvSpPr/>
-          <p:nvPr/>
-        </p:nvSpPr>
-        <p:spPr>
-          <a:xfrm>
-            <a:off x="1005840" y="4187952"/>
-            <a:ext cx="7680960" cy="457200"/>
-          </a:xfrm>
-          <a:prstGeom prst="rect">
-            <a:avLst/>
-          </a:prstGeom>
-          <a:noFill/>
-          <a:ln/>
-        </p:spPr>
-        <p:txBody>
-          <a:bodyPr wrap="square" lIns="0" tIns="0" rIns="0" bIns="0" rtlCol="0" anchor="ctr"/>
-          <a:lstStyle/>
-          <a:p>
-            <a:pPr marL="0" indent="0">
-              <a:buNone/>
-            </a:pPr>
-            <a:r>
-              <a:rPr lang="en-US" sz="1600" dirty="0">
-                <a:solidFill>
-                  <a:srgbClr val="DADAED"/>
-                </a:solidFill>
-                <a:latin typeface="Calibri" pitchFamily="34" charset="0"/>
-                <a:ea typeface="Calibri" pitchFamily="34" charset="-122"/>
-                <a:cs typeface="Calibri" pitchFamily="34" charset="-120"/>
-              </a:rPr>
-              <a:t>Spannende Benutzererfahrung schaffen</a:t>
-            </a:r>
-            <a:endParaRPr lang="en-US" sz="1600" dirty="0"/>
-          </a:p>
-        </p:txBody>
-      </p:sp>
-    </p:spTree>
-  </p:cSld>
-  <p:clrMapOvr>
-    <a:masterClrMapping/>
-  </p:clrMapOvr>
-  <mc:AlternateContent xmlns:mc="http://schemas.openxmlformats.org/markup-compatibility/2006">
-    <mc:Choice xmlns:p159="http://schemas.microsoft.com/office/powerpoint/2015/09/main" Requires="p159">
-      <p:transition spd="slow">
-        <p159:morph option="byObject"/>
-      </p:transition>
-    </mc:Choice>
-    <mc:Fallback>
-      <p:transition spd="slow">
-        <p:fade/>
-      </p:transition>
-    </mc:Fallback>
-  </mc:AlternateContent>
-  <p:timing>
-    <p:tnLst>
-      <p:par>
-        <p:cTn id="1" dur="indefinite" restart="never" nodeType="tmRoot">
-          <p:childTnLst>
-            <p:seq concurrent="1" nextAc="seek">
-              <p:cTn id="2" dur="indefinite" nodeType="mainSeq">
-                <p:childTnLst>
-                  <p:par>
-                    <p:cTn id="3" fill="hold">
-                      <p:stCondLst>
-                        <p:cond delay="indefinite"/>
-                        <p:cond evt="onBegin" delay="0">
-                          <p:tn val="2"/>
-                        </p:cond>
-                      </p:stCondLst>
-                      <p:childTnLst>
-                        <p:par>
-                          <p:cTn id="4" fill="hold">
-                            <p:stCondLst>
-                              <p:cond delay="0"/>
-                            </p:stCondLst>
-                            <p:childTnLst>
-                              <p:par>
-                                <p:cTn id="5" presetID="16" presetClass="entr" presetSubtype="21" fill="hold" grpId="0" nodeType="afterEffect">
-                                  <p:stCondLst>
-                                    <p:cond delay="0"/>
-                                  </p:stCondLst>
-                                  <p:childTnLst>
-                                    <p:set>
-                                      <p:cBhvr>
-                                        <p:cTn id="6" dur="1" fill="hold">
-                                          <p:stCondLst>
-                                            <p:cond delay="0"/>
-                                          </p:stCondLst>
-                                        </p:cTn>
-                                        <p:tgtEl>
-                                          <p:spTgt spid="8"/>
-                                        </p:tgtEl>
-                                        <p:attrNameLst>
-                                          <p:attrName>style.visibility</p:attrName>
-                                        </p:attrNameLst>
-                                      </p:cBhvr>
-                                      <p:to>
-                                        <p:strVal val="visible"/>
-                                      </p:to>
-                                    </p:set>
-                                    <p:animEffect transition="in" filter="barn(inVertical)">
-                                      <p:cBhvr>
-                                        <p:cTn id="7" dur="500"/>
-                                        <p:tgtEl>
-                                          <p:spTgt spid="8"/>
-                                        </p:tgtEl>
-                                      </p:cBhvr>
-                                    </p:animEffect>
-                                  </p:childTnLst>
-                                </p:cTn>
-                              </p:par>
-                              <p:par>
-                                <p:cTn id="8" presetID="16" presetClass="entr" presetSubtype="21" fill="hold" nodeType="withEffect">
-                                  <p:stCondLst>
-                                    <p:cond delay="0"/>
-                                  </p:stCondLst>
-                                  <p:childTnLst>
-                                    <p:set>
-                                      <p:cBhvr>
-                                        <p:cTn id="9" dur="1" fill="hold">
-                                          <p:stCondLst>
-                                            <p:cond delay="0"/>
-                                          </p:stCondLst>
-                                        </p:cTn>
-                                        <p:tgtEl>
-                                          <p:spTgt spid="9"/>
-                                        </p:tgtEl>
-                                        <p:attrNameLst>
-                                          <p:attrName>style.visibility</p:attrName>
-                                        </p:attrNameLst>
-                                      </p:cBhvr>
-                                      <p:to>
-                                        <p:strVal val="visible"/>
-                                      </p:to>
-                                    </p:set>
-                                    <p:animEffect transition="in" filter="barn(inVertical)">
-                                      <p:cBhvr>
-                                        <p:cTn id="10" dur="500"/>
-                                        <p:tgtEl>
-                                          <p:spTgt spid="9"/>
-                                        </p:tgtEl>
-                                      </p:cBhvr>
-                                    </p:animEffect>
-                                  </p:childTnLst>
-                                </p:cTn>
-                              </p:par>
-                              <p:par>
-                                <p:cTn id="11" presetID="16" presetClass="entr" presetSubtype="21" fill="hold" grpId="0" nodeType="withEffect">
-                                  <p:stCondLst>
-                                    <p:cond delay="0"/>
-                                  </p:stCondLst>
-                                  <p:childTnLst>
-                                    <p:set>
-                                      <p:cBhvr>
-                                        <p:cTn id="12" dur="1" fill="hold">
-                                          <p:stCondLst>
-                                            <p:cond delay="0"/>
-                                          </p:stCondLst>
-                                        </p:cTn>
-                                        <p:tgtEl>
-                                          <p:spTgt spid="10"/>
-                                        </p:tgtEl>
-                                        <p:attrNameLst>
-                                          <p:attrName>style.visibility</p:attrName>
-                                        </p:attrNameLst>
-                                      </p:cBhvr>
-                                      <p:to>
-                                        <p:strVal val="visible"/>
-                                      </p:to>
-                                    </p:set>
-                                    <p:animEffect transition="in" filter="barn(inVertical)">
-                                      <p:cBhvr>
-                                        <p:cTn id="13" dur="500"/>
-                                        <p:tgtEl>
-                                          <p:spTgt spid="10"/>
-                                        </p:tgtEl>
-                                      </p:cBhvr>
-                                    </p:animEffect>
-                                  </p:childTnLst>
-                                </p:cTn>
-                              </p:par>
-                            </p:childTnLst>
-                          </p:cTn>
-                        </p:par>
-                      </p:childTnLst>
-                    </p:cTn>
-                  </p:par>
-                  <p:par>
-                    <p:cTn id="14" fill="hold">
-                      <p:stCondLst>
-                        <p:cond delay="indefinite"/>
-                      </p:stCondLst>
-                      <p:childTnLst>
-                        <p:par>
-                          <p:cTn id="15" fill="hold">
-                            <p:stCondLst>
-                              <p:cond delay="0"/>
-                            </p:stCondLst>
-                            <p:childTnLst>
-                              <p:par>
-                                <p:cTn id="16" presetID="16" presetClass="entr" presetSubtype="37" fill="hold" grpId="0" nodeType="clickEffect">
-                                  <p:stCondLst>
-                                    <p:cond delay="0"/>
-                                  </p:stCondLst>
-                                  <p:childTnLst>
-                                    <p:set>
-                                      <p:cBhvr>
-                                        <p:cTn id="17" dur="1" fill="hold">
-                                          <p:stCondLst>
-                                            <p:cond delay="0"/>
-                                          </p:stCondLst>
-                                        </p:cTn>
-                                        <p:tgtEl>
-                                          <p:spTgt spid="11"/>
-                                        </p:tgtEl>
-                                        <p:attrNameLst>
-                                          <p:attrName>style.visibility</p:attrName>
-                                        </p:attrNameLst>
-                                      </p:cBhvr>
-                                      <p:to>
-                                        <p:strVal val="visible"/>
-                                      </p:to>
-                                    </p:set>
-                                    <p:animEffect transition="in" filter="barn(outVertical)">
-                                      <p:cBhvr>
-                                        <p:cTn id="18" dur="500"/>
-                                        <p:tgtEl>
-                                          <p:spTgt spid="11"/>
-                                        </p:tgtEl>
-                                      </p:cBhvr>
-                                    </p:animEffect>
-                                  </p:childTnLst>
-                                </p:cTn>
-                              </p:par>
-                              <p:par>
-                                <p:cTn id="19" presetID="16" presetClass="entr" presetSubtype="37" fill="hold" nodeType="withEffect">
-                                  <p:stCondLst>
-                                    <p:cond delay="0"/>
-                                  </p:stCondLst>
-                                  <p:childTnLst>
-                                    <p:set>
-                                      <p:cBhvr>
-                                        <p:cTn id="20" dur="1" fill="hold">
-                                          <p:stCondLst>
-                                            <p:cond delay="0"/>
-                                          </p:stCondLst>
-                                        </p:cTn>
-                                        <p:tgtEl>
-                                          <p:spTgt spid="12"/>
-                                        </p:tgtEl>
-                                        <p:attrNameLst>
-                                          <p:attrName>style.visibility</p:attrName>
-                                        </p:attrNameLst>
-                                      </p:cBhvr>
-                                      <p:to>
-                                        <p:strVal val="visible"/>
-                                      </p:to>
-                                    </p:set>
-                                    <p:animEffect transition="in" filter="barn(outVertical)">
-                                      <p:cBhvr>
-                                        <p:cTn id="21" dur="500"/>
-                                        <p:tgtEl>
-                                          <p:spTgt spid="12"/>
-                                        </p:tgtEl>
-                                      </p:cBhvr>
-                                    </p:animEffect>
-                                  </p:childTnLst>
-                                </p:cTn>
-                              </p:par>
-                              <p:par>
-                                <p:cTn id="22" presetID="16" presetClass="entr" presetSubtype="37" fill="hold" grpId="0" nodeType="withEffect">
-                                  <p:stCondLst>
-                                    <p:cond delay="0"/>
-                                  </p:stCondLst>
-                                  <p:childTnLst>
-                                    <p:set>
-                                      <p:cBhvr>
-                                        <p:cTn id="23" dur="1" fill="hold">
-                                          <p:stCondLst>
-                                            <p:cond delay="0"/>
-                                          </p:stCondLst>
-                                        </p:cTn>
-                                        <p:tgtEl>
-                                          <p:spTgt spid="13"/>
-                                        </p:tgtEl>
-                                        <p:attrNameLst>
-                                          <p:attrName>style.visibility</p:attrName>
-                                        </p:attrNameLst>
-                                      </p:cBhvr>
-                                      <p:to>
-                                        <p:strVal val="visible"/>
-                                      </p:to>
-                                    </p:set>
-                                    <p:animEffect transition="in" filter="barn(outVertical)">
-                                      <p:cBhvr>
-                                        <p:cTn id="24" dur="500"/>
-                                        <p:tgtEl>
-                                          <p:spTgt spid="13"/>
-                                        </p:tgtEl>
-                                      </p:cBhvr>
-                                    </p:animEffect>
-                                  </p:childTnLst>
-                                </p:cTn>
-                              </p:par>
-                            </p:childTnLst>
-                          </p:cTn>
-                        </p:par>
-                      </p:childTnLst>
-                    </p:cTn>
-                  </p:par>
-                  <p:par>
-                    <p:cTn id="25" fill="hold">
-                      <p:stCondLst>
-                        <p:cond delay="indefinite"/>
-                      </p:stCondLst>
-                      <p:childTnLst>
-                        <p:par>
-                          <p:cTn id="26" fill="hold">
-                            <p:stCondLst>
-                              <p:cond delay="0"/>
-                            </p:stCondLst>
-                            <p:childTnLst>
-                              <p:par>
-                                <p:cTn id="27" presetID="16" presetClass="entr" presetSubtype="21" fill="hold" grpId="0" nodeType="clickEffect">
-                                  <p:stCondLst>
-                                    <p:cond delay="0"/>
-                                  </p:stCondLst>
-                                  <p:childTnLst>
-                                    <p:set>
-                                      <p:cBhvr>
-                                        <p:cTn id="28" dur="1" fill="hold">
-                                          <p:stCondLst>
-                                            <p:cond delay="0"/>
-                                          </p:stCondLst>
-                                        </p:cTn>
-                                        <p:tgtEl>
-                                          <p:spTgt spid="14"/>
-                                        </p:tgtEl>
-                                        <p:attrNameLst>
-                                          <p:attrName>style.visibility</p:attrName>
-                                        </p:attrNameLst>
-                                      </p:cBhvr>
-                                      <p:to>
-                                        <p:strVal val="visible"/>
-                                      </p:to>
-                                    </p:set>
-                                    <p:animEffect transition="in" filter="barn(inVertical)">
-                                      <p:cBhvr>
-                                        <p:cTn id="29" dur="500"/>
-                                        <p:tgtEl>
-                                          <p:spTgt spid="14"/>
-                                        </p:tgtEl>
-                                      </p:cBhvr>
-                                    </p:animEffect>
-                                  </p:childTnLst>
-                                </p:cTn>
-                              </p:par>
-                              <p:par>
-                                <p:cTn id="30" presetID="16" presetClass="entr" presetSubtype="21" fill="hold" nodeType="withEffect">
-                                  <p:stCondLst>
-                                    <p:cond delay="0"/>
-                                  </p:stCondLst>
-                                  <p:childTnLst>
-                                    <p:set>
-                                      <p:cBhvr>
-                                        <p:cTn id="31" dur="1" fill="hold">
-                                          <p:stCondLst>
-                                            <p:cond delay="0"/>
-                                          </p:stCondLst>
-                                        </p:cTn>
-                                        <p:tgtEl>
-                                          <p:spTgt spid="15"/>
-                                        </p:tgtEl>
-                                        <p:attrNameLst>
-                                          <p:attrName>style.visibility</p:attrName>
-                                        </p:attrNameLst>
-                                      </p:cBhvr>
-                                      <p:to>
-                                        <p:strVal val="visible"/>
-                                      </p:to>
-                                    </p:set>
-                                    <p:animEffect transition="in" filter="barn(inVertical)">
-                                      <p:cBhvr>
-                                        <p:cTn id="32" dur="500"/>
-                                        <p:tgtEl>
-                                          <p:spTgt spid="15"/>
-                                        </p:tgtEl>
-                                      </p:cBhvr>
-                                    </p:animEffect>
-                                  </p:childTnLst>
-                                </p:cTn>
-                              </p:par>
-                              <p:par>
-                                <p:cTn id="33" presetID="16" presetClass="entr" presetSubtype="21" fill="hold" grpId="0" nodeType="withEffect">
-                                  <p:stCondLst>
-                                    <p:cond delay="0"/>
-                                  </p:stCondLst>
-                                  <p:childTnLst>
-                                    <p:set>
-                                      <p:cBhvr>
-                                        <p:cTn id="34" dur="1" fill="hold">
-                                          <p:stCondLst>
-                                            <p:cond delay="0"/>
-                                          </p:stCondLst>
-                                        </p:cTn>
-                                        <p:tgtEl>
-                                          <p:spTgt spid="16"/>
-                                        </p:tgtEl>
-                                        <p:attrNameLst>
-                                          <p:attrName>style.visibility</p:attrName>
-                                        </p:attrNameLst>
-                                      </p:cBhvr>
-                                      <p:to>
-                                        <p:strVal val="visible"/>
-                                      </p:to>
-                                    </p:set>
-                                    <p:animEffect transition="in" filter="barn(inVertical)">
-                                      <p:cBhvr>
-                                        <p:cTn id="35" dur="500"/>
-                                        <p:tgtEl>
-                                          <p:spTgt spid="16"/>
-                                        </p:tgtEl>
-                                      </p:cBhvr>
-                                    </p:animEffect>
-                                  </p:childTnLst>
-                                </p:cTn>
-                              </p:par>
-                            </p:childTnLst>
-                          </p:cTn>
-                        </p:par>
-                      </p:childTnLst>
-                    </p:cTn>
-                  </p:par>
-                  <p:par>
-                    <p:cTn id="36" fill="hold">
-                      <p:stCondLst>
-                        <p:cond delay="indefinite"/>
-                      </p:stCondLst>
-                      <p:childTnLst>
-                        <p:par>
-                          <p:cTn id="37" fill="hold">
-                            <p:stCondLst>
-                              <p:cond delay="0"/>
-                            </p:stCondLst>
-                            <p:childTnLst>
-                              <p:par>
-                                <p:cTn id="38" presetID="16" presetClass="entr" presetSubtype="37" fill="hold" grpId="0" nodeType="clickEffect">
-                                  <p:stCondLst>
-                                    <p:cond delay="0"/>
-                                  </p:stCondLst>
-                                  <p:childTnLst>
-                                    <p:set>
-                                      <p:cBhvr>
-                                        <p:cTn id="39" dur="1" fill="hold">
-                                          <p:stCondLst>
-                                            <p:cond delay="0"/>
-                                          </p:stCondLst>
-                                        </p:cTn>
-                                        <p:tgtEl>
-                                          <p:spTgt spid="17"/>
-                                        </p:tgtEl>
-                                        <p:attrNameLst>
-                                          <p:attrName>style.visibility</p:attrName>
-                                        </p:attrNameLst>
-                                      </p:cBhvr>
-                                      <p:to>
-                                        <p:strVal val="visible"/>
-                                      </p:to>
-                                    </p:set>
-                                    <p:animEffect transition="in" filter="barn(outVertical)">
-                                      <p:cBhvr>
-                                        <p:cTn id="40" dur="500"/>
-                                        <p:tgtEl>
-                                          <p:spTgt spid="17"/>
-                                        </p:tgtEl>
-                                      </p:cBhvr>
-                                    </p:animEffect>
-                                  </p:childTnLst>
-                                </p:cTn>
-                              </p:par>
-                              <p:par>
-                                <p:cTn id="41" presetID="16" presetClass="entr" presetSubtype="37" fill="hold" nodeType="withEffect">
-                                  <p:stCondLst>
-                                    <p:cond delay="0"/>
-                                  </p:stCondLst>
-                                  <p:childTnLst>
-                                    <p:set>
-                                      <p:cBhvr>
-                                        <p:cTn id="42" dur="1" fill="hold">
-                                          <p:stCondLst>
-                                            <p:cond delay="0"/>
-                                          </p:stCondLst>
-                                        </p:cTn>
-                                        <p:tgtEl>
-                                          <p:spTgt spid="18"/>
-                                        </p:tgtEl>
-                                        <p:attrNameLst>
-                                          <p:attrName>style.visibility</p:attrName>
-                                        </p:attrNameLst>
-                                      </p:cBhvr>
-                                      <p:to>
-                                        <p:strVal val="visible"/>
-                                      </p:to>
-                                    </p:set>
-                                    <p:animEffect transition="in" filter="barn(outVertical)">
-                                      <p:cBhvr>
-                                        <p:cTn id="43" dur="500"/>
-                                        <p:tgtEl>
-                                          <p:spTgt spid="18"/>
-                                        </p:tgtEl>
-                                      </p:cBhvr>
-                                    </p:animEffect>
-                                  </p:childTnLst>
-                                </p:cTn>
-                              </p:par>
-                              <p:par>
-                                <p:cTn id="44" presetID="16" presetClass="entr" presetSubtype="37" fill="hold" grpId="0" nodeType="withEffect">
-                                  <p:stCondLst>
-                                    <p:cond delay="0"/>
-                                  </p:stCondLst>
-                                  <p:childTnLst>
-                                    <p:set>
-                                      <p:cBhvr>
-                                        <p:cTn id="45" dur="1" fill="hold">
-                                          <p:stCondLst>
-                                            <p:cond delay="0"/>
-                                          </p:stCondLst>
-                                        </p:cTn>
-                                        <p:tgtEl>
-                                          <p:spTgt spid="19"/>
-                                        </p:tgtEl>
-                                        <p:attrNameLst>
-                                          <p:attrName>style.visibility</p:attrName>
-                                        </p:attrNameLst>
-                                      </p:cBhvr>
-                                      <p:to>
-                                        <p:strVal val="visible"/>
-                                      </p:to>
-                                    </p:set>
-                                    <p:animEffect transition="in" filter="barn(outVertical)">
-                                      <p:cBhvr>
-                                        <p:cTn id="46" dur="500"/>
-                                        <p:tgtEl>
-                                          <p:spTgt spid="19"/>
-                                        </p:tgtEl>
-                                      </p:cBhvr>
-                                    </p:animEffect>
-                                  </p:childTnLst>
-                                </p:cTn>
-                              </p:par>
-                            </p:childTnLst>
-                          </p:cTn>
-                        </p:par>
-                      </p:childTnLst>
-                    </p:cTn>
-                  </p:par>
-                  <p:par>
-                    <p:cTn id="47" fill="hold">
-                      <p:stCondLst>
-                        <p:cond delay="indefinite"/>
-                      </p:stCondLst>
-                      <p:childTnLst>
-                        <p:par>
-                          <p:cTn id="48" fill="hold">
-                            <p:stCondLst>
-                              <p:cond delay="0"/>
-                            </p:stCondLst>
-                            <p:childTnLst>
-                              <p:par>
-                                <p:cTn id="49" presetID="16" presetClass="entr" presetSubtype="21" fill="hold" grpId="0" nodeType="clickEffect">
-                                  <p:stCondLst>
-                                    <p:cond delay="0"/>
-                                  </p:stCondLst>
-                                  <p:childTnLst>
-                                    <p:set>
-                                      <p:cBhvr>
-                                        <p:cTn id="50" dur="1" fill="hold">
-                                          <p:stCondLst>
-                                            <p:cond delay="0"/>
-                                          </p:stCondLst>
-                                        </p:cTn>
-                                        <p:tgtEl>
-                                          <p:spTgt spid="20"/>
-                                        </p:tgtEl>
-                                        <p:attrNameLst>
-                                          <p:attrName>style.visibility</p:attrName>
-                                        </p:attrNameLst>
-                                      </p:cBhvr>
-                                      <p:to>
-                                        <p:strVal val="visible"/>
-                                      </p:to>
-                                    </p:set>
-                                    <p:animEffect transition="in" filter="barn(inVertical)">
-                                      <p:cBhvr>
-                                        <p:cTn id="51" dur="500"/>
-                                        <p:tgtEl>
-                                          <p:spTgt spid="20"/>
-                                        </p:tgtEl>
-                                      </p:cBhvr>
-                                    </p:animEffect>
-                                  </p:childTnLst>
-                                </p:cTn>
-                              </p:par>
-                              <p:par>
-                                <p:cTn id="52" presetID="16" presetClass="entr" presetSubtype="21" fill="hold" nodeType="withEffect">
-                                  <p:stCondLst>
-                                    <p:cond delay="0"/>
-                                  </p:stCondLst>
-                                  <p:childTnLst>
-                                    <p:set>
-                                      <p:cBhvr>
-                                        <p:cTn id="53" dur="1" fill="hold">
-                                          <p:stCondLst>
-                                            <p:cond delay="0"/>
-                                          </p:stCondLst>
-                                        </p:cTn>
-                                        <p:tgtEl>
-                                          <p:spTgt spid="21"/>
-                                        </p:tgtEl>
-                                        <p:attrNameLst>
-                                          <p:attrName>style.visibility</p:attrName>
-                                        </p:attrNameLst>
-                                      </p:cBhvr>
-                                      <p:to>
-                                        <p:strVal val="visible"/>
-                                      </p:to>
-                                    </p:set>
-                                    <p:animEffect transition="in" filter="barn(inVertical)">
-                                      <p:cBhvr>
-                                        <p:cTn id="54" dur="500"/>
-                                        <p:tgtEl>
-                                          <p:spTgt spid="21"/>
-                                        </p:tgtEl>
-                                      </p:cBhvr>
-                                    </p:animEffect>
-                                  </p:childTnLst>
-                                </p:cTn>
-                              </p:par>
-                              <p:par>
-                                <p:cTn id="55" presetID="16" presetClass="entr" presetSubtype="21" fill="hold" grpId="0" nodeType="withEffect">
-                                  <p:stCondLst>
-                                    <p:cond delay="0"/>
-                                  </p:stCondLst>
-                                  <p:childTnLst>
-                                    <p:set>
-                                      <p:cBhvr>
-                                        <p:cTn id="56" dur="1" fill="hold">
-                                          <p:stCondLst>
-                                            <p:cond delay="0"/>
-                                          </p:stCondLst>
-                                        </p:cTn>
-                                        <p:tgtEl>
-                                          <p:spTgt spid="22"/>
-                                        </p:tgtEl>
-                                        <p:attrNameLst>
-                                          <p:attrName>style.visibility</p:attrName>
-                                        </p:attrNameLst>
-                                      </p:cBhvr>
-                                      <p:to>
-                                        <p:strVal val="visible"/>
-                                      </p:to>
-                                    </p:set>
-                                    <p:animEffect transition="in" filter="barn(inVertical)">
-                                      <p:cBhvr>
-                                        <p:cTn id="57" dur="500"/>
-                                        <p:tgtEl>
-                                          <p:spTgt spid="22"/>
-                                        </p:tgtEl>
-                                      </p:cBhvr>
-                                    </p:animEffect>
-                                  </p:childTnLst>
-                                </p:cTn>
-                              </p:par>
-                            </p:childTnLst>
-                          </p:cTn>
-                        </p:par>
-                      </p:childTnLst>
-                    </p:cTn>
-                  </p:par>
-                </p:childTnLst>
-              </p:cTn>
-              <p:prevCondLst>
-                <p:cond evt="onPrev" delay="0">
-                  <p:tgtEl>
-                    <p:sldTgt/>
-                  </p:tgtEl>
-                </p:cond>
-              </p:prevCondLst>
-              <p:nextCondLst>
-                <p:cond evt="onNext" delay="0">
-                  <p:tgtEl>
-                    <p:sldTgt/>
-                  </p:tgtEl>
-                </p:cond>
-              </p:nextCondLst>
-            </p:seq>
-          </p:childTnLst>
-        </p:cTn>
-      </p:par>
-    </p:tnLst>
-    <p:bldLst>
-      <p:bldP spid="8" grpId="0" animBg="1"/>
-      <p:bldP spid="10" grpId="0" animBg="1"/>
-      <p:bldP spid="11" grpId="0" animBg="1"/>
-      <p:bldP spid="13" grpId="0" animBg="1"/>
-      <p:bldP spid="14" grpId="0" animBg="1"/>
-      <p:bldP spid="16" grpId="0" animBg="1"/>
-      <p:bldP spid="17" grpId="0" animBg="1"/>
-      <p:bldP spid="19" grpId="0" animBg="1"/>
-      <p:bldP spid="20" grpId="0" animBg="1"/>
-      <p:bldP spid="22" grpId="0" animBg="1"/>
-    </p:bldLst>
-  </p:timing>
-</p:sld>
-</file>
-
-<file path=ppt/slides/slide4.xml><?xml version="1.0" encoding="utf-8"?>
 <p:sld xmlns:a="http://schemas.openxmlformats.org/drawingml/2006/main" xmlns:r="http://schemas.openxmlformats.org/officeDocument/2006/relationships" xmlns:p="http://schemas.openxmlformats.org/presentationml/2006/main">
   <p:cSld name="Slide 4">
     <p:bg>
@@ -21084,13 +17666,13 @@
   <p:clrMapOvr>
     <a:masterClrMapping/>
   </p:clrMapOvr>
-  <mc:AlternateContent xmlns:mc="http://schemas.openxmlformats.org/markup-compatibility/2006">
-    <mc:Choice xmlns:p159="http://schemas.microsoft.com/office/powerpoint/2015/09/main" Requires="p159">
+  <mc:AlternateContent xmlns:mc="http://schemas.openxmlformats.org/markup-compatibility/2006" xmlns:p159="http://schemas.microsoft.com/office/powerpoint/2015/09/main">
+    <mc:Choice Requires="p159">
       <p:transition spd="slow">
         <p159:morph option="byObject"/>
       </p:transition>
     </mc:Choice>
-    <mc:Fallback>
+    <mc:Fallback xmlns="">
       <p:transition spd="slow">
         <p:fade/>
       </p:transition>
@@ -21465,7 +18047,7 @@
 </p:sld>
 </file>
 
-<file path=ppt/slides/slide5.xml><?xml version="1.0" encoding="utf-8"?>
+<file path=ppt/slides/slide4.xml><?xml version="1.0" encoding="utf-8"?>
 <p:sld xmlns:a="http://schemas.openxmlformats.org/drawingml/2006/main" xmlns:r="http://schemas.openxmlformats.org/officeDocument/2006/relationships" xmlns:p="http://schemas.openxmlformats.org/presentationml/2006/main">
   <p:cSld name="Slide 6">
     <p:bg>
@@ -21598,7 +18180,7 @@
           <a:bodyPr/>
           <a:lstStyle/>
           <a:p>
-            <a:endParaRPr lang="de-DE"/>
+            <a:endParaRPr lang="de-DE" dirty="0"/>
           </a:p>
         </p:txBody>
       </p:sp>
@@ -21627,7 +18209,7 @@
               <a:buNone/>
             </a:pPr>
             <a:r>
-              <a:rPr lang="en-US" b="1" dirty="0" err="1">
+              <a:rPr lang="en-US" sz="2400" b="1" dirty="0" err="1">
                 <a:solidFill>
                   <a:srgbClr val="F0F0F0"/>
                 </a:solidFill>
@@ -21635,7 +18217,7 @@
               </a:rPr>
               <a:t>Handlung</a:t>
             </a:r>
-            <a:endParaRPr lang="en-US" b="1" dirty="0">
+            <a:endParaRPr lang="en-US" sz="2800" b="1" dirty="0">
               <a:solidFill>
                 <a:srgbClr val="F0F0F0"/>
               </a:solidFill>
@@ -21665,12 +18247,11 @@
           <a:bodyPr wrap="square" lIns="0" tIns="0" rIns="0" bIns="0" rtlCol="0" anchor="ctr"/>
           <a:lstStyle/>
           <a:p>
-            <a:pPr marL="342900" indent="-342900">
+            <a:pPr algn="ctr">
               <a:buSzPct val="100000"/>
-              <a:buChar char="•"/>
             </a:pPr>
             <a:r>
-              <a:rPr lang="en-US" sz="1400" dirty="0">
+              <a:rPr lang="en-US" dirty="0">
                 <a:solidFill>
                   <a:srgbClr val="DADAED"/>
                 </a:solidFill>
@@ -21680,15 +18261,14 @@
               </a:rPr>
               <a:t>Spieler betritt das Schloss</a:t>
             </a:r>
-            <a:endParaRPr lang="en-US" sz="1400" dirty="0"/>
+            <a:endParaRPr lang="en-US" dirty="0"/>
           </a:p>
           <a:p>
-            <a:pPr marL="342900" indent="-342900">
+            <a:pPr algn="ctr">
               <a:buSzPct val="100000"/>
-              <a:buChar char="•"/>
             </a:pPr>
             <a:r>
-              <a:rPr lang="en-US" sz="1400" dirty="0">
+              <a:rPr lang="en-US" dirty="0">
                 <a:solidFill>
                   <a:srgbClr val="DADAED"/>
                 </a:solidFill>
@@ -21698,15 +18278,14 @@
               </a:rPr>
               <a:t>Erkundung der ersten Räume</a:t>
             </a:r>
-            <a:endParaRPr lang="en-US" sz="1400" dirty="0"/>
+            <a:endParaRPr lang="en-US" dirty="0"/>
           </a:p>
           <a:p>
-            <a:pPr marL="342900" indent="-342900">
+            <a:pPr algn="ctr">
               <a:buSzPct val="100000"/>
-              <a:buChar char="•"/>
             </a:pPr>
             <a:r>
-              <a:rPr lang="en-US" sz="1400" dirty="0">
+              <a:rPr lang="en-US" dirty="0">
                 <a:solidFill>
                   <a:srgbClr val="DADAED"/>
                 </a:solidFill>
@@ -21716,15 +18295,14 @@
               </a:rPr>
               <a:t>Hebelmechanismus aktivieren</a:t>
             </a:r>
-            <a:endParaRPr lang="en-US" sz="1400" dirty="0"/>
+            <a:endParaRPr lang="en-US" dirty="0"/>
           </a:p>
           <a:p>
-            <a:pPr marL="342900" indent="-342900">
+            <a:pPr algn="ctr">
               <a:buSzPct val="100000"/>
-              <a:buChar char="•"/>
             </a:pPr>
             <a:r>
-              <a:rPr lang="en-US" sz="1400" dirty="0">
+              <a:rPr lang="en-US" dirty="0">
                 <a:solidFill>
                   <a:srgbClr val="DADAED"/>
                 </a:solidFill>
@@ -21734,15 +18312,14 @@
               </a:rPr>
               <a:t>Versteckte Tür aufdecken</a:t>
             </a:r>
-            <a:endParaRPr lang="en-US" sz="1400" dirty="0"/>
+            <a:endParaRPr lang="en-US" dirty="0"/>
           </a:p>
           <a:p>
-            <a:pPr marL="342900" indent="-342900">
+            <a:pPr algn="ctr">
               <a:buSzPct val="100000"/>
-              <a:buChar char="•"/>
             </a:pPr>
             <a:r>
-              <a:rPr lang="en-US" sz="1400" dirty="0">
+              <a:rPr lang="en-US" dirty="0">
                 <a:solidFill>
                   <a:srgbClr val="DADAED"/>
                 </a:solidFill>
@@ -21752,7 +18329,7 @@
               </a:rPr>
               <a:t>Geheimen Ausgang finden</a:t>
             </a:r>
-            <a:endParaRPr lang="en-US" sz="1400" dirty="0"/>
+            <a:endParaRPr lang="en-US" dirty="0"/>
           </a:p>
         </p:txBody>
       </p:sp>
@@ -21824,7 +18401,7 @@
               <a:buNone/>
             </a:pPr>
             <a:r>
-              <a:rPr lang="en-US" b="1" dirty="0" err="1">
+              <a:rPr lang="en-US" sz="2400" b="1" dirty="0" err="1">
                 <a:solidFill>
                   <a:srgbClr val="F0F0F0"/>
                 </a:solidFill>
@@ -21832,7 +18409,7 @@
               </a:rPr>
               <a:t>Programmierkonzepte</a:t>
             </a:r>
-            <a:endParaRPr lang="en-US" b="1" dirty="0">
+            <a:endParaRPr lang="en-US" sz="2400" b="1" dirty="0">
               <a:solidFill>
                 <a:srgbClr val="F0F0F0"/>
               </a:solidFill>
@@ -21850,7 +18427,7 @@
         <p:spPr>
           <a:xfrm>
             <a:off x="4800600" y="1691640"/>
-            <a:ext cx="3840480" cy="2286000"/>
+            <a:ext cx="3840480" cy="2743200"/>
           </a:xfrm>
           <a:prstGeom prst="rect">
             <a:avLst/>
@@ -21862,12 +18439,11 @@
           <a:bodyPr wrap="square" lIns="0" tIns="0" rIns="0" bIns="0" rtlCol="0" anchor="ctr"/>
           <a:lstStyle/>
           <a:p>
-            <a:pPr marL="342900" indent="-342900">
+            <a:pPr algn="ctr">
               <a:buSzPct val="100000"/>
-              <a:buChar char="•"/>
             </a:pPr>
             <a:r>
-              <a:rPr lang="en-US" sz="1400" dirty="0">
+              <a:rPr lang="en-US" dirty="0">
                 <a:solidFill>
                   <a:srgbClr val="DADAED"/>
                 </a:solidFill>
@@ -21877,15 +18453,13 @@
               </a:rPr>
               <a:t>Zustandsverwaltung (booleans)</a:t>
             </a:r>
-            <a:endParaRPr lang="en-US" sz="1400" dirty="0"/>
           </a:p>
           <a:p>
-            <a:pPr marL="342900" indent="-342900">
+            <a:pPr algn="ctr">
               <a:buSzPct val="100000"/>
-              <a:buChar char="•"/>
             </a:pPr>
             <a:r>
-              <a:rPr lang="en-US" sz="1400" dirty="0">
+              <a:rPr lang="en-US" dirty="0">
                 <a:solidFill>
                   <a:srgbClr val="DADAED"/>
                 </a:solidFill>
@@ -21895,15 +18469,13 @@
               </a:rPr>
               <a:t>Unsichtbare Clickboxen</a:t>
             </a:r>
-            <a:endParaRPr lang="en-US" sz="1400" dirty="0"/>
           </a:p>
           <a:p>
-            <a:pPr marL="342900" indent="-342900">
+            <a:pPr algn="ctr">
               <a:buSzPct val="100000"/>
-              <a:buChar char="•"/>
             </a:pPr>
             <a:r>
-              <a:rPr lang="en-US" sz="1400" dirty="0">
+              <a:rPr lang="en-US" dirty="0" err="1">
                 <a:solidFill>
                   <a:srgbClr val="DADAED"/>
                 </a:solidFill>
@@ -21911,17 +18483,23 @@
                 <a:ea typeface="Calibri" pitchFamily="34" charset="-122"/>
                 <a:cs typeface="Calibri" pitchFamily="34" charset="-120"/>
               </a:rPr>
-              <a:t>Raumwechsel-Funktionen</a:t>
+              <a:t>Raumwechsel-Funktion</a:t>
             </a:r>
-            <a:endParaRPr lang="en-US" sz="1400" dirty="0"/>
+            <a:endParaRPr lang="en-US" dirty="0">
+              <a:solidFill>
+                <a:srgbClr val="DADAED"/>
+              </a:solidFill>
+              <a:latin typeface="Calibri" pitchFamily="34" charset="0"/>
+              <a:ea typeface="Calibri" pitchFamily="34" charset="-122"/>
+              <a:cs typeface="Calibri" pitchFamily="34" charset="-120"/>
+            </a:endParaRPr>
           </a:p>
           <a:p>
-            <a:pPr marL="342900" indent="-342900">
+            <a:pPr algn="ctr">
               <a:buSzPct val="100000"/>
-              <a:buChar char="•"/>
             </a:pPr>
             <a:r>
-              <a:rPr lang="en-US" sz="1400" dirty="0">
+              <a:rPr lang="en-US" dirty="0">
                 <a:solidFill>
                   <a:srgbClr val="DADAED"/>
                 </a:solidFill>
@@ -21931,7 +18509,6 @@
               </a:rPr>
               <a:t>Interaktive Objekte (onclick)</a:t>
             </a:r>
-            <a:endParaRPr lang="en-US" sz="1400" dirty="0"/>
           </a:p>
         </p:txBody>
       </p:sp>
@@ -21940,13 +18517,13 @@
   <p:clrMapOvr>
     <a:masterClrMapping/>
   </p:clrMapOvr>
-  <mc:AlternateContent xmlns:mc="http://schemas.openxmlformats.org/markup-compatibility/2006">
-    <mc:Choice xmlns:p159="http://schemas.microsoft.com/office/powerpoint/2015/09/main" Requires="p159">
+  <mc:AlternateContent xmlns:mc="http://schemas.openxmlformats.org/markup-compatibility/2006" xmlns:p159="http://schemas.microsoft.com/office/powerpoint/2015/09/main">
+    <mc:Choice Requires="p159">
       <p:transition spd="slow">
         <p159:morph option="byObject"/>
       </p:transition>
     </mc:Choice>
-    <mc:Fallback>
+    <mc:Fallback xmlns="">
       <p:transition spd="slow">
         <p:fade/>
       </p:transition>
@@ -22045,24 +18622,15 @@
                                   </p:childTnLst>
                                 </p:cTn>
                               </p:par>
-                            </p:childTnLst>
-                          </p:cTn>
-                        </p:par>
-                        <p:par>
-                          <p:cTn id="9" fill="hold">
-                            <p:stCondLst>
-                              <p:cond delay="500"/>
-                            </p:stCondLst>
-                            <p:childTnLst>
                               <p:par>
-                                <p:cTn id="10" presetID="2" presetClass="entr" presetSubtype="8" fill="hold" grpId="0" nodeType="afterEffect">
+                                <p:cTn id="9" presetID="2" presetClass="entr" presetSubtype="8" fill="hold" grpId="0" nodeType="withEffect">
                                   <p:stCondLst>
                                     <p:cond delay="0"/>
                                   </p:stCondLst>
                                   <p:childTnLst>
                                     <p:set>
                                       <p:cBhvr>
-                                        <p:cTn id="11" dur="1" fill="hold">
+                                        <p:cTn id="10" dur="1" fill="hold">
                                           <p:stCondLst>
                                             <p:cond delay="0"/>
                                           </p:stCondLst>
@@ -22080,7 +18648,7 @@
                                     </p:set>
                                     <p:anim calcmode="lin" valueType="num">
                                       <p:cBhvr additive="base">
-                                        <p:cTn id="12" dur="500" fill="hold"/>
+                                        <p:cTn id="11" dur="500" fill="hold"/>
                                         <p:tgtEl>
                                           <p:spTgt spid="8"/>
                                         </p:tgtEl>
@@ -22103,7 +18671,7 @@
                                     </p:anim>
                                     <p:anim calcmode="lin" valueType="num">
                                       <p:cBhvr additive="base">
-                                        <p:cTn id="13" dur="500" fill="hold"/>
+                                        <p:cTn id="12" dur="500" fill="hold"/>
                                         <p:tgtEl>
                                           <p:spTgt spid="8"/>
                                         </p:tgtEl>
@@ -22128,14 +18696,14 @@
                                 </p:cTn>
                               </p:par>
                               <p:par>
-                                <p:cTn id="14" presetID="2" presetClass="entr" presetSubtype="8" fill="hold" grpId="0" nodeType="withEffect">
+                                <p:cTn id="13" presetID="2" presetClass="entr" presetSubtype="8" fill="hold" grpId="0" nodeType="withEffect">
                                   <p:stCondLst>
                                     <p:cond delay="0"/>
                                   </p:stCondLst>
                                   <p:childTnLst>
                                     <p:set>
                                       <p:cBhvr>
-                                        <p:cTn id="15" dur="1" fill="hold">
+                                        <p:cTn id="14" dur="1" fill="hold">
                                           <p:stCondLst>
                                             <p:cond delay="0"/>
                                           </p:stCondLst>
@@ -22153,7 +18721,7 @@
                                     </p:set>
                                     <p:anim calcmode="lin" valueType="num">
                                       <p:cBhvr additive="base">
-                                        <p:cTn id="16" dur="500" fill="hold"/>
+                                        <p:cTn id="15" dur="500" fill="hold"/>
                                         <p:tgtEl>
                                           <p:spTgt spid="9"/>
                                         </p:tgtEl>
@@ -22176,7 +18744,7 @@
                                     </p:anim>
                                     <p:anim calcmode="lin" valueType="num">
                                       <p:cBhvr additive="base">
-                                        <p:cTn id="17" dur="500" fill="hold"/>
+                                        <p:cTn id="16" dur="500" fill="hold"/>
                                         <p:tgtEl>
                                           <p:spTgt spid="9"/>
                                         </p:tgtEl>
@@ -22207,26 +18775,26 @@
                     </p:cTn>
                   </p:par>
                   <p:par>
-                    <p:cTn id="18" fill="hold">
+                    <p:cTn id="17" fill="hold">
                       <p:stCondLst>
                         <p:cond delay="indefinite"/>
                       </p:stCondLst>
                       <p:childTnLst>
                         <p:par>
-                          <p:cTn id="19" fill="hold">
+                          <p:cTn id="18" fill="hold">
                             <p:stCondLst>
                               <p:cond delay="0"/>
                             </p:stCondLst>
                             <p:childTnLst>
                               <p:par>
-                                <p:cTn id="20" presetID="2" presetClass="entr" presetSubtype="2" fill="hold" grpId="0" nodeType="clickEffect">
+                                <p:cTn id="19" presetID="2" presetClass="entr" presetSubtype="2" fill="hold" grpId="0" nodeType="clickEffect">
                                   <p:stCondLst>
                                     <p:cond delay="0"/>
                                   </p:stCondLst>
                                   <p:childTnLst>
                                     <p:set>
                                       <p:cBhvr>
-                                        <p:cTn id="21" dur="1" fill="hold">
+                                        <p:cTn id="20" dur="1" fill="hold">
                                           <p:stCondLst>
                                             <p:cond delay="0"/>
                                           </p:stCondLst>
@@ -22244,7 +18812,7 @@
                                     </p:set>
                                     <p:anim calcmode="lin" valueType="num">
                                       <p:cBhvr additive="base">
-                                        <p:cTn id="22" dur="500" fill="hold"/>
+                                        <p:cTn id="21" dur="500" fill="hold"/>
                                         <p:tgtEl>
                                           <p:spTgt spid="10"/>
                                         </p:tgtEl>
@@ -22267,7 +18835,7 @@
                                     </p:anim>
                                     <p:anim calcmode="lin" valueType="num">
                                       <p:cBhvr additive="base">
-                                        <p:cTn id="23" dur="500" fill="hold"/>
+                                        <p:cTn id="22" dur="500" fill="hold"/>
                                         <p:tgtEl>
                                           <p:spTgt spid="10"/>
                                         </p:tgtEl>
@@ -22292,14 +18860,14 @@
                                 </p:cTn>
                               </p:par>
                               <p:par>
-                                <p:cTn id="24" presetID="2" presetClass="entr" presetSubtype="2" fill="hold" grpId="0" nodeType="withEffect">
+                                <p:cTn id="23" presetID="2" presetClass="entr" presetSubtype="2" fill="hold" grpId="0" nodeType="withEffect">
                                   <p:stCondLst>
                                     <p:cond delay="0"/>
                                   </p:stCondLst>
                                   <p:childTnLst>
                                     <p:set>
                                       <p:cBhvr>
-                                        <p:cTn id="25" dur="1" fill="hold">
+                                        <p:cTn id="24" dur="1" fill="hold">
                                           <p:stCondLst>
                                             <p:cond delay="0"/>
                                           </p:stCondLst>
@@ -22317,7 +18885,7 @@
                                     </p:set>
                                     <p:anim calcmode="lin" valueType="num">
                                       <p:cBhvr additive="base">
-                                        <p:cTn id="26" dur="500" fill="hold"/>
+                                        <p:cTn id="25" dur="500" fill="hold"/>
                                         <p:tgtEl>
                                           <p:spTgt spid="11"/>
                                         </p:tgtEl>
@@ -22340,7 +18908,7 @@
                                     </p:anim>
                                     <p:anim calcmode="lin" valueType="num">
                                       <p:cBhvr additive="base">
-                                        <p:cTn id="27" dur="500" fill="hold"/>
+                                        <p:cTn id="26" dur="500" fill="hold"/>
                                         <p:tgtEl>
                                           <p:spTgt spid="11"/>
                                         </p:tgtEl>
@@ -22365,14 +18933,14 @@
                                 </p:cTn>
                               </p:par>
                               <p:par>
-                                <p:cTn id="28" presetID="2" presetClass="entr" presetSubtype="2" fill="hold" grpId="0" nodeType="withEffect">
+                                <p:cTn id="27" presetID="2" presetClass="entr" presetSubtype="2" fill="hold" grpId="0" nodeType="withEffect">
                                   <p:stCondLst>
                                     <p:cond delay="0"/>
                                   </p:stCondLst>
                                   <p:childTnLst>
                                     <p:set>
                                       <p:cBhvr>
-                                        <p:cTn id="29" dur="1" fill="hold">
+                                        <p:cTn id="28" dur="1" fill="hold">
                                           <p:stCondLst>
                                             <p:cond delay="0"/>
                                           </p:stCondLst>
@@ -22390,7 +18958,7 @@
                                     </p:set>
                                     <p:anim calcmode="lin" valueType="num">
                                       <p:cBhvr additive="base">
-                                        <p:cTn id="30" dur="500" fill="hold"/>
+                                        <p:cTn id="29" dur="500" fill="hold"/>
                                         <p:tgtEl>
                                           <p:spTgt spid="12"/>
                                         </p:tgtEl>
@@ -22413,7 +18981,7 @@
                                     </p:anim>
                                     <p:anim calcmode="lin" valueType="num">
                                       <p:cBhvr additive="base">
-                                        <p:cTn id="31" dur="500" fill="hold"/>
+                                        <p:cTn id="30" dur="500" fill="hold"/>
                                         <p:tgtEl>
                                           <p:spTgt spid="12"/>
                                         </p:tgtEl>
@@ -22476,7 +19044,7 @@
 </p:sld>
 </file>
 
-<file path=ppt/slides/slide6.xml><?xml version="1.0" encoding="utf-8"?>
+<file path=ppt/slides/slide5.xml><?xml version="1.0" encoding="utf-8"?>
 <p:sld xmlns:a="http://schemas.openxmlformats.org/drawingml/2006/main" xmlns:r="http://schemas.openxmlformats.org/officeDocument/2006/relationships" xmlns:p="http://schemas.openxmlformats.org/presentationml/2006/main">
   <p:cSld name="Slide 7">
     <p:bg>
@@ -22523,7 +19091,7 @@
         </p:blipFill>
         <p:spPr>
           <a:xfrm>
-            <a:off x="0" y="-5022"/>
+            <a:off x="0" y="0"/>
             <a:ext cx="9144000" cy="6096000"/>
           </a:xfrm>
           <a:prstGeom prst="rect">
@@ -23042,6 +19610,17 @@
               <a:buChar char="•"/>
             </a:pPr>
             <a:r>
+              <a:rPr lang="en-US" sz="1400" dirty="0" err="1">
+                <a:solidFill>
+                  <a:srgbClr val="DADAED"/>
+                </a:solidFill>
+                <a:latin typeface="Calibri" pitchFamily="34" charset="0"/>
+                <a:ea typeface="Calibri" pitchFamily="34" charset="-122"/>
+                <a:cs typeface="Calibri" pitchFamily="34" charset="-120"/>
+              </a:rPr>
+              <a:t>Fünfstelligen</a:t>
+            </a:r>
+            <a:r>
               <a:rPr lang="en-US" sz="1400" dirty="0">
                 <a:solidFill>
                   <a:srgbClr val="DADAED"/>
@@ -23050,7 +19629,7 @@
                 <a:ea typeface="Calibri" pitchFamily="34" charset="-122"/>
                 <a:cs typeface="Calibri" pitchFamily="34" charset="-120"/>
               </a:rPr>
-              <a:t>Vierstelligen Code eingeben</a:t>
+              <a:t> Code eingeben</a:t>
             </a:r>
             <a:endParaRPr lang="en-US" sz="1400" dirty="0"/>
           </a:p>
@@ -23261,8 +19840,8 @@
         </p:nvSpPr>
         <p:spPr>
           <a:xfrm>
-            <a:off x="5893024" y="2537460"/>
-            <a:ext cx="548640" cy="640080"/>
+            <a:off x="6543471" y="2537460"/>
+            <a:ext cx="319724" cy="640080"/>
           </a:xfrm>
           <a:prstGeom prst="roundRect">
             <a:avLst>
@@ -23295,8 +19874,8 @@
         </p:nvSpPr>
         <p:spPr>
           <a:xfrm>
-            <a:off x="5893024" y="2537460"/>
-            <a:ext cx="548640" cy="640080"/>
+            <a:off x="6543471" y="2537460"/>
+            <a:ext cx="319724" cy="640080"/>
           </a:xfrm>
           <a:prstGeom prst="rect">
             <a:avLst/>
@@ -23334,8 +19913,8 @@
         </p:nvSpPr>
         <p:spPr>
           <a:xfrm>
-            <a:off x="6578824" y="2537460"/>
-            <a:ext cx="548640" cy="640080"/>
+            <a:off x="7060656" y="2537460"/>
+            <a:ext cx="319724" cy="640080"/>
           </a:xfrm>
           <a:prstGeom prst="roundRect">
             <a:avLst>
@@ -23368,8 +19947,8 @@
         </p:nvSpPr>
         <p:spPr>
           <a:xfrm>
-            <a:off x="6578824" y="2537460"/>
-            <a:ext cx="548640" cy="640080"/>
+            <a:off x="7060656" y="2537460"/>
+            <a:ext cx="319724" cy="640080"/>
           </a:xfrm>
           <a:prstGeom prst="rect">
             <a:avLst/>
@@ -23407,8 +19986,8 @@
         </p:nvSpPr>
         <p:spPr>
           <a:xfrm>
-            <a:off x="7264624" y="2537460"/>
-            <a:ext cx="548640" cy="640080"/>
+            <a:off x="7558390" y="2537460"/>
+            <a:ext cx="319724" cy="640080"/>
           </a:xfrm>
           <a:prstGeom prst="roundRect">
             <a:avLst>
@@ -23441,8 +20020,8 @@
         </p:nvSpPr>
         <p:spPr>
           <a:xfrm>
-            <a:off x="7264624" y="2537460"/>
-            <a:ext cx="548640" cy="640080"/>
+            <a:off x="7558390" y="2537460"/>
+            <a:ext cx="319724" cy="640080"/>
           </a:xfrm>
           <a:prstGeom prst="rect">
             <a:avLst/>
@@ -23480,8 +20059,8 @@
         </p:nvSpPr>
         <p:spPr>
           <a:xfrm>
-            <a:off x="7950424" y="2537460"/>
-            <a:ext cx="548640" cy="640080"/>
+            <a:off x="8056125" y="2537460"/>
+            <a:ext cx="319724" cy="640080"/>
           </a:xfrm>
           <a:prstGeom prst="roundRect">
             <a:avLst>
@@ -23514,8 +20093,8 @@
         </p:nvSpPr>
         <p:spPr>
           <a:xfrm>
-            <a:off x="7950424" y="2537460"/>
-            <a:ext cx="548640" cy="640080"/>
+            <a:off x="8056125" y="2537460"/>
+            <a:ext cx="319724" cy="640080"/>
           </a:xfrm>
           <a:prstGeom prst="rect">
             <a:avLst/>
@@ -23668,18 +20247,103 @@
           </a:p>
         </p:txBody>
       </p:sp>
+      <p:sp>
+        <p:nvSpPr>
+          <p:cNvPr id="3" name="Shape 20">
+            <a:extLst>
+              <a:ext uri="{FF2B5EF4-FFF2-40B4-BE49-F238E27FC236}">
+                <a16:creationId xmlns:a16="http://schemas.microsoft.com/office/drawing/2014/main" id="{56D28647-7FAC-B18F-6558-8D6FF62BDAFA}"/>
+              </a:ext>
+            </a:extLst>
+          </p:cNvPr>
+          <p:cNvSpPr/>
+          <p:nvPr/>
+        </p:nvSpPr>
+        <p:spPr>
+          <a:xfrm>
+            <a:off x="6040883" y="2540705"/>
+            <a:ext cx="319724" cy="640080"/>
+          </a:xfrm>
+          <a:prstGeom prst="roundRect">
+            <a:avLst>
+              <a:gd name="adj" fmla="val 8333"/>
+            </a:avLst>
+          </a:prstGeom>
+          <a:solidFill>
+            <a:srgbClr val="0A0A14"/>
+          </a:solidFill>
+          <a:ln w="25400">
+            <a:solidFill>
+              <a:srgbClr val="E74C3C"/>
+            </a:solidFill>
+            <a:prstDash val="solid"/>
+          </a:ln>
+        </p:spPr>
+        <p:txBody>
+          <a:bodyPr/>
+          <a:lstStyle/>
+          <a:p>
+            <a:endParaRPr lang="de-DE"/>
+          </a:p>
+        </p:txBody>
+      </p:sp>
+      <p:sp>
+        <p:nvSpPr>
+          <p:cNvPr id="5" name="Text 21">
+            <a:extLst>
+              <a:ext uri="{FF2B5EF4-FFF2-40B4-BE49-F238E27FC236}">
+                <a16:creationId xmlns:a16="http://schemas.microsoft.com/office/drawing/2014/main" id="{1E51202F-5A4C-FE6E-56A9-D236AA21C9C9}"/>
+              </a:ext>
+            </a:extLst>
+          </p:cNvPr>
+          <p:cNvSpPr/>
+          <p:nvPr/>
+        </p:nvSpPr>
+        <p:spPr>
+          <a:xfrm>
+            <a:off x="6040883" y="2540705"/>
+            <a:ext cx="319724" cy="640080"/>
+          </a:xfrm>
+          <a:prstGeom prst="rect">
+            <a:avLst/>
+          </a:prstGeom>
+          <a:noFill/>
+          <a:ln/>
+        </p:spPr>
+        <p:txBody>
+          <a:bodyPr wrap="square" lIns="0" tIns="0" rIns="0" bIns="0" rtlCol="0" anchor="ctr"/>
+          <a:lstStyle/>
+          <a:p>
+            <a:pPr marL="0" indent="0" algn="ctr">
+              <a:buNone/>
+            </a:pPr>
+            <a:r>
+              <a:rPr lang="en-US" sz="2400" b="1" dirty="0">
+                <a:solidFill>
+                  <a:srgbClr val="E74C3C"/>
+                </a:solidFill>
+                <a:latin typeface="Courier New" pitchFamily="34" charset="0"/>
+                <a:ea typeface="Courier New" pitchFamily="34" charset="-122"/>
+                <a:cs typeface="Courier New" pitchFamily="34" charset="-120"/>
+              </a:rPr>
+              <a:t>?</a:t>
+            </a:r>
+            <a:endParaRPr lang="en-US" sz="2400" dirty="0"/>
+          </a:p>
+        </p:txBody>
+      </p:sp>
     </p:spTree>
   </p:cSld>
   <p:clrMapOvr>
     <a:masterClrMapping/>
   </p:clrMapOvr>
-  <mc:AlternateContent xmlns:mc="http://schemas.openxmlformats.org/markup-compatibility/2006">
-    <mc:Choice xmlns:p159="http://schemas.microsoft.com/office/powerpoint/2015/09/main" Requires="p159">
+  <mc:AlternateContent xmlns:mc="http://schemas.openxmlformats.org/markup-compatibility/2006" xmlns:p159="http://schemas.microsoft.com/office/powerpoint/2015/09/main">
+    <mc:Choice Requires="p159">
       <p:transition spd="slow">
         <p159:morph option="byObject"/>
       </p:transition>
     </mc:Choice>
-    <mc:Fallback>
+    <mc:Fallback xmlns="">
       <p:transition spd="slow">
         <p:fade/>
       </p:transition>
@@ -24785,33 +21449,15 @@
                                   </p:childTnLst>
                                 </p:cTn>
                               </p:par>
-                            </p:childTnLst>
-                          </p:cTn>
-                        </p:par>
-                      </p:childTnLst>
-                    </p:cTn>
-                  </p:par>
-                  <p:par>
-                    <p:cTn id="73" fill="hold">
-                      <p:stCondLst>
-                        <p:cond delay="indefinite"/>
-                      </p:stCondLst>
-                      <p:childTnLst>
-                        <p:par>
-                          <p:cTn id="74" fill="hold">
-                            <p:stCondLst>
-                              <p:cond delay="0"/>
-                            </p:stCondLst>
-                            <p:childTnLst>
                               <p:par>
-                                <p:cTn id="75" presetID="55" presetClass="entr" presetSubtype="0" fill="hold" grpId="0" nodeType="clickEffect">
+                                <p:cTn id="73" presetID="55" presetClass="entr" presetSubtype="0" fill="hold" grpId="0" nodeType="withEffect">
                                   <p:stCondLst>
                                     <p:cond delay="0"/>
                                   </p:stCondLst>
                                   <p:childTnLst>
                                     <p:set>
                                       <p:cBhvr>
-                                        <p:cTn id="76" dur="1" fill="hold">
+                                        <p:cTn id="74" dur="1" fill="hold">
                                           <p:stCondLst>
                                             <p:cond delay="0"/>
                                           </p:stCondLst>
@@ -24829,7 +21475,7 @@
                                     </p:set>
                                     <p:anim calcmode="lin" valueType="num">
                                       <p:cBhvr>
-                                        <p:cTn id="77" dur="500" fill="hold"/>
+                                        <p:cTn id="75" dur="500" fill="hold"/>
                                         <p:tgtEl>
                                           <p:spTgt spid="20"/>
                                         </p:tgtEl>
@@ -24852,7 +21498,7 @@
                                     </p:anim>
                                     <p:anim calcmode="lin" valueType="num">
                                       <p:cBhvr>
-                                        <p:cTn id="78" dur="500" fill="hold"/>
+                                        <p:cTn id="76" dur="500" fill="hold"/>
                                         <p:tgtEl>
                                           <p:spTgt spid="20"/>
                                         </p:tgtEl>
@@ -24875,7 +21521,7 @@
                                     </p:anim>
                                     <p:animEffect transition="in" filter="fade">
                                       <p:cBhvr>
-                                        <p:cTn id="79" dur="500"/>
+                                        <p:cTn id="77" dur="500"/>
                                         <p:tgtEl>
                                           <p:spTgt spid="20"/>
                                         </p:tgtEl>
@@ -24885,14 +21531,14 @@
                                 </p:cTn>
                               </p:par>
                               <p:par>
-                                <p:cTn id="80" presetID="55" presetClass="entr" presetSubtype="0" fill="hold" grpId="0" nodeType="withEffect">
+                                <p:cTn id="78" presetID="55" presetClass="entr" presetSubtype="0" fill="hold" grpId="0" nodeType="withEffect">
                                   <p:stCondLst>
                                     <p:cond delay="0"/>
                                   </p:stCondLst>
                                   <p:childTnLst>
                                     <p:set>
                                       <p:cBhvr>
-                                        <p:cTn id="81" dur="1" fill="hold">
+                                        <p:cTn id="79" dur="1" fill="hold">
                                           <p:stCondLst>
                                             <p:cond delay="0"/>
                                           </p:stCondLst>
@@ -24910,7 +21556,7 @@
                                     </p:set>
                                     <p:anim calcmode="lin" valueType="num">
                                       <p:cBhvr>
-                                        <p:cTn id="82" dur="500" fill="hold"/>
+                                        <p:cTn id="80" dur="500" fill="hold"/>
                                         <p:tgtEl>
                                           <p:spTgt spid="21"/>
                                         </p:tgtEl>
@@ -24933,7 +21579,7 @@
                                     </p:anim>
                                     <p:anim calcmode="lin" valueType="num">
                                       <p:cBhvr>
-                                        <p:cTn id="83" dur="500" fill="hold"/>
+                                        <p:cTn id="81" dur="500" fill="hold"/>
                                         <p:tgtEl>
                                           <p:spTgt spid="21"/>
                                         </p:tgtEl>
@@ -24956,7 +21602,7 @@
                                     </p:anim>
                                     <p:animEffect transition="in" filter="fade">
                                       <p:cBhvr>
-                                        <p:cTn id="84" dur="500"/>
+                                        <p:cTn id="82" dur="500"/>
                                         <p:tgtEl>
                                           <p:spTgt spid="21"/>
                                         </p:tgtEl>
@@ -24966,14 +21612,14 @@
                                 </p:cTn>
                               </p:par>
                               <p:par>
-                                <p:cTn id="85" presetID="55" presetClass="entr" presetSubtype="0" fill="hold" grpId="0" nodeType="withEffect">
+                                <p:cTn id="83" presetID="55" presetClass="entr" presetSubtype="0" fill="hold" grpId="0" nodeType="withEffect">
                                   <p:stCondLst>
                                     <p:cond delay="0"/>
                                   </p:stCondLst>
                                   <p:childTnLst>
                                     <p:set>
                                       <p:cBhvr>
-                                        <p:cTn id="86" dur="1" fill="hold">
+                                        <p:cTn id="84" dur="1" fill="hold">
                                           <p:stCondLst>
                                             <p:cond delay="0"/>
                                           </p:stCondLst>
@@ -24991,7 +21637,7 @@
                                     </p:set>
                                     <p:anim calcmode="lin" valueType="num">
                                       <p:cBhvr>
-                                        <p:cTn id="87" dur="500" fill="hold"/>
+                                        <p:cTn id="85" dur="500" fill="hold"/>
                                         <p:tgtEl>
                                           <p:spTgt spid="22"/>
                                         </p:tgtEl>
@@ -25014,7 +21660,7 @@
                                     </p:anim>
                                     <p:anim calcmode="lin" valueType="num">
                                       <p:cBhvr>
-                                        <p:cTn id="88" dur="500" fill="hold"/>
+                                        <p:cTn id="86" dur="500" fill="hold"/>
                                         <p:tgtEl>
                                           <p:spTgt spid="22"/>
                                         </p:tgtEl>
@@ -25037,7 +21683,7 @@
                                     </p:anim>
                                     <p:animEffect transition="in" filter="fade">
                                       <p:cBhvr>
-                                        <p:cTn id="89" dur="500"/>
+                                        <p:cTn id="87" dur="500"/>
                                         <p:tgtEl>
                                           <p:spTgt spid="22"/>
                                         </p:tgtEl>
@@ -25047,14 +21693,14 @@
                                 </p:cTn>
                               </p:par>
                               <p:par>
-                                <p:cTn id="90" presetID="55" presetClass="entr" presetSubtype="0" fill="hold" grpId="0" nodeType="withEffect">
+                                <p:cTn id="88" presetID="55" presetClass="entr" presetSubtype="0" fill="hold" grpId="0" nodeType="withEffect">
                                   <p:stCondLst>
                                     <p:cond delay="0"/>
                                   </p:stCondLst>
                                   <p:childTnLst>
                                     <p:set>
                                       <p:cBhvr>
-                                        <p:cTn id="91" dur="1" fill="hold">
+                                        <p:cTn id="89" dur="1" fill="hold">
                                           <p:stCondLst>
                                             <p:cond delay="0"/>
                                           </p:stCondLst>
@@ -25072,7 +21718,7 @@
                                     </p:set>
                                     <p:anim calcmode="lin" valueType="num">
                                       <p:cBhvr>
-                                        <p:cTn id="92" dur="500" fill="hold"/>
+                                        <p:cTn id="90" dur="500" fill="hold"/>
                                         <p:tgtEl>
                                           <p:spTgt spid="23"/>
                                         </p:tgtEl>
@@ -25095,7 +21741,7 @@
                                     </p:anim>
                                     <p:anim calcmode="lin" valueType="num">
                                       <p:cBhvr>
-                                        <p:cTn id="93" dur="500" fill="hold"/>
+                                        <p:cTn id="91" dur="500" fill="hold"/>
                                         <p:tgtEl>
                                           <p:spTgt spid="23"/>
                                         </p:tgtEl>
@@ -25118,7 +21764,7 @@
                                     </p:anim>
                                     <p:animEffect transition="in" filter="fade">
                                       <p:cBhvr>
-                                        <p:cTn id="94" dur="500"/>
+                                        <p:cTn id="92" dur="500"/>
                                         <p:tgtEl>
                                           <p:spTgt spid="23"/>
                                         </p:tgtEl>
@@ -25128,14 +21774,14 @@
                                 </p:cTn>
                               </p:par>
                               <p:par>
-                                <p:cTn id="95" presetID="55" presetClass="entr" presetSubtype="0" fill="hold" grpId="0" nodeType="withEffect">
+                                <p:cTn id="93" presetID="55" presetClass="entr" presetSubtype="0" fill="hold" grpId="0" nodeType="withEffect">
                                   <p:stCondLst>
                                     <p:cond delay="0"/>
                                   </p:stCondLst>
                                   <p:childTnLst>
                                     <p:set>
                                       <p:cBhvr>
-                                        <p:cTn id="96" dur="1" fill="hold">
+                                        <p:cTn id="94" dur="1" fill="hold">
                                           <p:stCondLst>
                                             <p:cond delay="0"/>
                                           </p:stCondLst>
@@ -25153,7 +21799,7 @@
                                     </p:set>
                                     <p:anim calcmode="lin" valueType="num">
                                       <p:cBhvr>
-                                        <p:cTn id="97" dur="500" fill="hold"/>
+                                        <p:cTn id="95" dur="500" fill="hold"/>
                                         <p:tgtEl>
                                           <p:spTgt spid="24"/>
                                         </p:tgtEl>
@@ -25176,7 +21822,7 @@
                                     </p:anim>
                                     <p:anim calcmode="lin" valueType="num">
                                       <p:cBhvr>
-                                        <p:cTn id="98" dur="500" fill="hold"/>
+                                        <p:cTn id="96" dur="500" fill="hold"/>
                                         <p:tgtEl>
                                           <p:spTgt spid="24"/>
                                         </p:tgtEl>
@@ -25199,7 +21845,7 @@
                                     </p:anim>
                                     <p:animEffect transition="in" filter="fade">
                                       <p:cBhvr>
-                                        <p:cTn id="99" dur="500"/>
+                                        <p:cTn id="97" dur="500"/>
                                         <p:tgtEl>
                                           <p:spTgt spid="24"/>
                                         </p:tgtEl>
@@ -25209,14 +21855,14 @@
                                 </p:cTn>
                               </p:par>
                               <p:par>
-                                <p:cTn id="100" presetID="55" presetClass="entr" presetSubtype="0" fill="hold" grpId="0" nodeType="withEffect">
+                                <p:cTn id="98" presetID="55" presetClass="entr" presetSubtype="0" fill="hold" grpId="0" nodeType="withEffect">
                                   <p:stCondLst>
                                     <p:cond delay="0"/>
                                   </p:stCondLst>
                                   <p:childTnLst>
                                     <p:set>
                                       <p:cBhvr>
-                                        <p:cTn id="101" dur="1" fill="hold">
+                                        <p:cTn id="99" dur="1" fill="hold">
                                           <p:stCondLst>
                                             <p:cond delay="0"/>
                                           </p:stCondLst>
@@ -25234,7 +21880,7 @@
                                     </p:set>
                                     <p:anim calcmode="lin" valueType="num">
                                       <p:cBhvr>
-                                        <p:cTn id="102" dur="500" fill="hold"/>
+                                        <p:cTn id="100" dur="500" fill="hold"/>
                                         <p:tgtEl>
                                           <p:spTgt spid="25"/>
                                         </p:tgtEl>
@@ -25257,7 +21903,7 @@
                                     </p:anim>
                                     <p:anim calcmode="lin" valueType="num">
                                       <p:cBhvr>
-                                        <p:cTn id="103" dur="500" fill="hold"/>
+                                        <p:cTn id="101" dur="500" fill="hold"/>
                                         <p:tgtEl>
                                           <p:spTgt spid="25"/>
                                         </p:tgtEl>
@@ -25280,7 +21926,7 @@
                                     </p:anim>
                                     <p:animEffect transition="in" filter="fade">
                                       <p:cBhvr>
-                                        <p:cTn id="104" dur="500"/>
+                                        <p:cTn id="102" dur="500"/>
                                         <p:tgtEl>
                                           <p:spTgt spid="25"/>
                                         </p:tgtEl>
@@ -25290,14 +21936,14 @@
                                 </p:cTn>
                               </p:par>
                               <p:par>
-                                <p:cTn id="105" presetID="55" presetClass="entr" presetSubtype="0" fill="hold" grpId="0" nodeType="withEffect">
+                                <p:cTn id="103" presetID="55" presetClass="entr" presetSubtype="0" fill="hold" grpId="0" nodeType="withEffect">
                                   <p:stCondLst>
                                     <p:cond delay="0"/>
                                   </p:stCondLst>
                                   <p:childTnLst>
                                     <p:set>
                                       <p:cBhvr>
-                                        <p:cTn id="106" dur="1" fill="hold">
+                                        <p:cTn id="104" dur="1" fill="hold">
                                           <p:stCondLst>
                                             <p:cond delay="0"/>
                                           </p:stCondLst>
@@ -25315,7 +21961,7 @@
                                     </p:set>
                                     <p:anim calcmode="lin" valueType="num">
                                       <p:cBhvr>
-                                        <p:cTn id="107" dur="500" fill="hold"/>
+                                        <p:cTn id="105" dur="500" fill="hold"/>
                                         <p:tgtEl>
                                           <p:spTgt spid="26"/>
                                         </p:tgtEl>
@@ -25338,7 +21984,7 @@
                                     </p:anim>
                                     <p:anim calcmode="lin" valueType="num">
                                       <p:cBhvr>
-                                        <p:cTn id="108" dur="500" fill="hold"/>
+                                        <p:cTn id="106" dur="500" fill="hold"/>
                                         <p:tgtEl>
                                           <p:spTgt spid="26"/>
                                         </p:tgtEl>
@@ -25361,7 +22007,7 @@
                                     </p:anim>
                                     <p:animEffect transition="in" filter="fade">
                                       <p:cBhvr>
-                                        <p:cTn id="109" dur="500"/>
+                                        <p:cTn id="107" dur="500"/>
                                         <p:tgtEl>
                                           <p:spTgt spid="26"/>
                                         </p:tgtEl>
@@ -25371,14 +22017,14 @@
                                 </p:cTn>
                               </p:par>
                               <p:par>
-                                <p:cTn id="110" presetID="55" presetClass="entr" presetSubtype="0" fill="hold" grpId="0" nodeType="withEffect">
+                                <p:cTn id="108" presetID="55" presetClass="entr" presetSubtype="0" fill="hold" grpId="0" nodeType="withEffect">
                                   <p:stCondLst>
                                     <p:cond delay="0"/>
                                   </p:stCondLst>
                                   <p:childTnLst>
                                     <p:set>
                                       <p:cBhvr>
-                                        <p:cTn id="111" dur="1" fill="hold">
+                                        <p:cTn id="109" dur="1" fill="hold">
                                           <p:stCondLst>
                                             <p:cond delay="0"/>
                                           </p:stCondLst>
@@ -25396,7 +22042,7 @@
                                     </p:set>
                                     <p:anim calcmode="lin" valueType="num">
                                       <p:cBhvr>
-                                        <p:cTn id="112" dur="500" fill="hold"/>
+                                        <p:cTn id="110" dur="500" fill="hold"/>
                                         <p:tgtEl>
                                           <p:spTgt spid="27"/>
                                         </p:tgtEl>
@@ -25419,7 +22065,7 @@
                                     </p:anim>
                                     <p:anim calcmode="lin" valueType="num">
                                       <p:cBhvr>
-                                        <p:cTn id="113" dur="500" fill="hold"/>
+                                        <p:cTn id="111" dur="500" fill="hold"/>
                                         <p:tgtEl>
                                           <p:spTgt spid="27"/>
                                         </p:tgtEl>
@@ -25442,7 +22088,7 @@
                                     </p:anim>
                                     <p:animEffect transition="in" filter="fade">
                                       <p:cBhvr>
-                                        <p:cTn id="114" dur="500"/>
+                                        <p:cTn id="112" dur="500"/>
                                         <p:tgtEl>
                                           <p:spTgt spid="27"/>
                                         </p:tgtEl>
@@ -25452,14 +22098,14 @@
                                 </p:cTn>
                               </p:par>
                               <p:par>
-                                <p:cTn id="115" presetID="55" presetClass="entr" presetSubtype="0" fill="hold" grpId="0" nodeType="withEffect">
+                                <p:cTn id="113" presetID="55" presetClass="entr" presetSubtype="0" fill="hold" grpId="0" nodeType="withEffect">
                                   <p:stCondLst>
                                     <p:cond delay="0"/>
                                   </p:stCondLst>
                                   <p:childTnLst>
                                     <p:set>
                                       <p:cBhvr>
-                                        <p:cTn id="116" dur="1" fill="hold">
+                                        <p:cTn id="114" dur="1" fill="hold">
                                           <p:stCondLst>
                                             <p:cond delay="0"/>
                                           </p:stCondLst>
@@ -25477,7 +22123,7 @@
                                     </p:set>
                                     <p:anim calcmode="lin" valueType="num">
                                       <p:cBhvr>
-                                        <p:cTn id="117" dur="500" fill="hold"/>
+                                        <p:cTn id="115" dur="500" fill="hold"/>
                                         <p:tgtEl>
                                           <p:spTgt spid="28"/>
                                         </p:tgtEl>
@@ -25500,7 +22146,7 @@
                                     </p:anim>
                                     <p:anim calcmode="lin" valueType="num">
                                       <p:cBhvr>
-                                        <p:cTn id="118" dur="500" fill="hold"/>
+                                        <p:cTn id="116" dur="500" fill="hold"/>
                                         <p:tgtEl>
                                           <p:spTgt spid="28"/>
                                         </p:tgtEl>
@@ -25523,7 +22169,7 @@
                                     </p:anim>
                                     <p:animEffect transition="in" filter="fade">
                                       <p:cBhvr>
-                                        <p:cTn id="119" dur="500"/>
+                                        <p:cTn id="117" dur="500"/>
                                         <p:tgtEl>
                                           <p:spTgt spid="28"/>
                                         </p:tgtEl>
@@ -25533,14 +22179,14 @@
                                 </p:cTn>
                               </p:par>
                               <p:par>
-                                <p:cTn id="120" presetID="55" presetClass="entr" presetSubtype="0" fill="hold" grpId="0" nodeType="withEffect">
+                                <p:cTn id="118" presetID="55" presetClass="entr" presetSubtype="0" fill="hold" grpId="0" nodeType="withEffect">
                                   <p:stCondLst>
                                     <p:cond delay="0"/>
                                   </p:stCondLst>
                                   <p:childTnLst>
                                     <p:set>
                                       <p:cBhvr>
-                                        <p:cTn id="121" dur="1" fill="hold">
+                                        <p:cTn id="119" dur="1" fill="hold">
                                           <p:stCondLst>
                                             <p:cond delay="0"/>
                                           </p:stCondLst>
@@ -25558,7 +22204,7 @@
                                     </p:set>
                                     <p:anim calcmode="lin" valueType="num">
                                       <p:cBhvr>
-                                        <p:cTn id="122" dur="500" fill="hold"/>
+                                        <p:cTn id="120" dur="500" fill="hold"/>
                                         <p:tgtEl>
                                           <p:spTgt spid="29"/>
                                         </p:tgtEl>
@@ -25581,7 +22227,7 @@
                                     </p:anim>
                                     <p:anim calcmode="lin" valueType="num">
                                       <p:cBhvr>
-                                        <p:cTn id="123" dur="500" fill="hold"/>
+                                        <p:cTn id="121" dur="500" fill="hold"/>
                                         <p:tgtEl>
                                           <p:spTgt spid="29"/>
                                         </p:tgtEl>
@@ -25604,7 +22250,7 @@
                                     </p:anim>
                                     <p:animEffect transition="in" filter="fade">
                                       <p:cBhvr>
-                                        <p:cTn id="124" dur="500"/>
+                                        <p:cTn id="122" dur="500"/>
                                         <p:tgtEl>
                                           <p:spTgt spid="29"/>
                                         </p:tgtEl>
@@ -25614,14 +22260,14 @@
                                 </p:cTn>
                               </p:par>
                               <p:par>
-                                <p:cTn id="125" presetID="55" presetClass="entr" presetSubtype="0" fill="hold" nodeType="withEffect">
+                                <p:cTn id="123" presetID="55" presetClass="entr" presetSubtype="0" fill="hold" nodeType="withEffect">
                                   <p:stCondLst>
                                     <p:cond delay="0"/>
                                   </p:stCondLst>
                                   <p:childTnLst>
                                     <p:set>
                                       <p:cBhvr>
-                                        <p:cTn id="126" dur="1" fill="hold">
+                                        <p:cTn id="124" dur="1" fill="hold">
                                           <p:stCondLst>
                                             <p:cond delay="0"/>
                                           </p:stCondLst>
@@ -25639,7 +22285,7 @@
                                     </p:set>
                                     <p:anim calcmode="lin" valueType="num">
                                       <p:cBhvr>
-                                        <p:cTn id="127" dur="500" fill="hold"/>
+                                        <p:cTn id="125" dur="500" fill="hold"/>
                                         <p:tgtEl>
                                           <p:spTgt spid="30"/>
                                         </p:tgtEl>
@@ -25662,7 +22308,7 @@
                                     </p:anim>
                                     <p:anim calcmode="lin" valueType="num">
                                       <p:cBhvr>
-                                        <p:cTn id="128" dur="500" fill="hold"/>
+                                        <p:cTn id="126" dur="500" fill="hold"/>
                                         <p:tgtEl>
                                           <p:spTgt spid="30"/>
                                         </p:tgtEl>
@@ -25685,7 +22331,7 @@
                                     </p:anim>
                                     <p:animEffect transition="in" filter="fade">
                                       <p:cBhvr>
-                                        <p:cTn id="129" dur="500"/>
+                                        <p:cTn id="127" dur="500"/>
                                         <p:tgtEl>
                                           <p:spTgt spid="30"/>
                                         </p:tgtEl>
@@ -25695,14 +22341,14 @@
                                 </p:cTn>
                               </p:par>
                               <p:par>
-                                <p:cTn id="130" presetID="55" presetClass="entr" presetSubtype="0" fill="hold" grpId="0" nodeType="withEffect">
+                                <p:cTn id="128" presetID="55" presetClass="entr" presetSubtype="0" fill="hold" grpId="0" nodeType="withEffect">
                                   <p:stCondLst>
                                     <p:cond delay="0"/>
                                   </p:stCondLst>
                                   <p:childTnLst>
                                     <p:set>
                                       <p:cBhvr>
-                                        <p:cTn id="131" dur="1" fill="hold">
+                                        <p:cTn id="129" dur="1" fill="hold">
                                           <p:stCondLst>
                                             <p:cond delay="0"/>
                                           </p:stCondLst>
@@ -25720,7 +22366,7 @@
                                     </p:set>
                                     <p:anim calcmode="lin" valueType="num">
                                       <p:cBhvr>
-                                        <p:cTn id="132" dur="500" fill="hold"/>
+                                        <p:cTn id="130" dur="500" fill="hold"/>
                                         <p:tgtEl>
                                           <p:spTgt spid="31"/>
                                         </p:tgtEl>
@@ -25743,7 +22389,7 @@
                                     </p:anim>
                                     <p:anim calcmode="lin" valueType="num">
                                       <p:cBhvr>
-                                        <p:cTn id="133" dur="500" fill="hold"/>
+                                        <p:cTn id="131" dur="500" fill="hold"/>
                                         <p:tgtEl>
                                           <p:spTgt spid="31"/>
                                         </p:tgtEl>
@@ -25766,7 +22412,7 @@
                                     </p:anim>
                                     <p:animEffect transition="in" filter="fade">
                                       <p:cBhvr>
-                                        <p:cTn id="134" dur="500"/>
+                                        <p:cTn id="132" dur="500"/>
                                         <p:tgtEl>
                                           <p:spTgt spid="31"/>
                                         </p:tgtEl>
@@ -25776,14 +22422,14 @@
                                 </p:cTn>
                               </p:par>
                               <p:par>
-                                <p:cTn id="135" presetID="55" presetClass="entr" presetSubtype="0" fill="hold" grpId="0" nodeType="withEffect">
+                                <p:cTn id="133" presetID="55" presetClass="entr" presetSubtype="0" fill="hold" grpId="0" nodeType="withEffect">
                                   <p:stCondLst>
                                     <p:cond delay="0"/>
                                   </p:stCondLst>
                                   <p:childTnLst>
                                     <p:set>
                                       <p:cBhvr>
-                                        <p:cTn id="136" dur="1" fill="hold">
+                                        <p:cTn id="134" dur="1" fill="hold">
                                           <p:stCondLst>
                                             <p:cond delay="0"/>
                                           </p:stCondLst>
@@ -25801,7 +22447,7 @@
                                     </p:set>
                                     <p:anim calcmode="lin" valueType="num">
                                       <p:cBhvr>
-                                        <p:cTn id="137" dur="500" fill="hold"/>
+                                        <p:cTn id="135" dur="500" fill="hold"/>
                                         <p:tgtEl>
                                           <p:spTgt spid="33"/>
                                         </p:tgtEl>
@@ -25824,7 +22470,7 @@
                                     </p:anim>
                                     <p:anim calcmode="lin" valueType="num">
                                       <p:cBhvr>
-                                        <p:cTn id="138" dur="500" fill="hold"/>
+                                        <p:cTn id="136" dur="500" fill="hold"/>
                                         <p:tgtEl>
                                           <p:spTgt spid="33"/>
                                         </p:tgtEl>
@@ -25847,9 +22493,171 @@
                                     </p:anim>
                                     <p:animEffect transition="in" filter="fade">
                                       <p:cBhvr>
-                                        <p:cTn id="139" dur="500"/>
+                                        <p:cTn id="137" dur="500"/>
                                         <p:tgtEl>
                                           <p:spTgt spid="33"/>
+                                        </p:tgtEl>
+                                      </p:cBhvr>
+                                    </p:animEffect>
+                                  </p:childTnLst>
+                                </p:cTn>
+                              </p:par>
+                              <p:par>
+                                <p:cTn id="138" presetID="55" presetClass="entr" presetSubtype="0" fill="hold" grpId="0" nodeType="withEffect">
+                                  <p:stCondLst>
+                                    <p:cond delay="0"/>
+                                  </p:stCondLst>
+                                  <p:childTnLst>
+                                    <p:set>
+                                      <p:cBhvr>
+                                        <p:cTn id="139" dur="1" fill="hold">
+                                          <p:stCondLst>
+                                            <p:cond delay="0"/>
+                                          </p:stCondLst>
+                                        </p:cTn>
+                                        <p:tgtEl>
+                                          <p:spTgt spid="3"/>
+                                        </p:tgtEl>
+                                        <p:attrNameLst>
+                                          <p:attrName>style.visibility</p:attrName>
+                                        </p:attrNameLst>
+                                      </p:cBhvr>
+                                      <p:to>
+                                        <p:strVal val="visible"/>
+                                      </p:to>
+                                    </p:set>
+                                    <p:anim calcmode="lin" valueType="num">
+                                      <p:cBhvr>
+                                        <p:cTn id="140" dur="500" fill="hold"/>
+                                        <p:tgtEl>
+                                          <p:spTgt spid="3"/>
+                                        </p:tgtEl>
+                                        <p:attrNameLst>
+                                          <p:attrName>ppt_w</p:attrName>
+                                        </p:attrNameLst>
+                                      </p:cBhvr>
+                                      <p:tavLst>
+                                        <p:tav tm="0">
+                                          <p:val>
+                                            <p:strVal val="#ppt_w*0.70"/>
+                                          </p:val>
+                                        </p:tav>
+                                        <p:tav tm="100000">
+                                          <p:val>
+                                            <p:strVal val="#ppt_w"/>
+                                          </p:val>
+                                        </p:tav>
+                                      </p:tavLst>
+                                    </p:anim>
+                                    <p:anim calcmode="lin" valueType="num">
+                                      <p:cBhvr>
+                                        <p:cTn id="141" dur="500" fill="hold"/>
+                                        <p:tgtEl>
+                                          <p:spTgt spid="3"/>
+                                        </p:tgtEl>
+                                        <p:attrNameLst>
+                                          <p:attrName>ppt_h</p:attrName>
+                                        </p:attrNameLst>
+                                      </p:cBhvr>
+                                      <p:tavLst>
+                                        <p:tav tm="0">
+                                          <p:val>
+                                            <p:strVal val="#ppt_h"/>
+                                          </p:val>
+                                        </p:tav>
+                                        <p:tav tm="100000">
+                                          <p:val>
+                                            <p:strVal val="#ppt_h"/>
+                                          </p:val>
+                                        </p:tav>
+                                      </p:tavLst>
+                                    </p:anim>
+                                    <p:animEffect transition="in" filter="fade">
+                                      <p:cBhvr>
+                                        <p:cTn id="142" dur="500"/>
+                                        <p:tgtEl>
+                                          <p:spTgt spid="3"/>
+                                        </p:tgtEl>
+                                      </p:cBhvr>
+                                    </p:animEffect>
+                                  </p:childTnLst>
+                                </p:cTn>
+                              </p:par>
+                              <p:par>
+                                <p:cTn id="143" presetID="55" presetClass="entr" presetSubtype="0" fill="hold" grpId="0" nodeType="withEffect">
+                                  <p:stCondLst>
+                                    <p:cond delay="0"/>
+                                  </p:stCondLst>
+                                  <p:childTnLst>
+                                    <p:set>
+                                      <p:cBhvr>
+                                        <p:cTn id="144" dur="1" fill="hold">
+                                          <p:stCondLst>
+                                            <p:cond delay="0"/>
+                                          </p:stCondLst>
+                                        </p:cTn>
+                                        <p:tgtEl>
+                                          <p:spTgt spid="5"/>
+                                        </p:tgtEl>
+                                        <p:attrNameLst>
+                                          <p:attrName>style.visibility</p:attrName>
+                                        </p:attrNameLst>
+                                      </p:cBhvr>
+                                      <p:to>
+                                        <p:strVal val="visible"/>
+                                      </p:to>
+                                    </p:set>
+                                    <p:anim calcmode="lin" valueType="num">
+                                      <p:cBhvr>
+                                        <p:cTn id="145" dur="500" fill="hold"/>
+                                        <p:tgtEl>
+                                          <p:spTgt spid="5"/>
+                                        </p:tgtEl>
+                                        <p:attrNameLst>
+                                          <p:attrName>ppt_w</p:attrName>
+                                        </p:attrNameLst>
+                                      </p:cBhvr>
+                                      <p:tavLst>
+                                        <p:tav tm="0">
+                                          <p:val>
+                                            <p:strVal val="#ppt_w*0.70"/>
+                                          </p:val>
+                                        </p:tav>
+                                        <p:tav tm="100000">
+                                          <p:val>
+                                            <p:strVal val="#ppt_w"/>
+                                          </p:val>
+                                        </p:tav>
+                                      </p:tavLst>
+                                    </p:anim>
+                                    <p:anim calcmode="lin" valueType="num">
+                                      <p:cBhvr>
+                                        <p:cTn id="146" dur="500" fill="hold"/>
+                                        <p:tgtEl>
+                                          <p:spTgt spid="5"/>
+                                        </p:tgtEl>
+                                        <p:attrNameLst>
+                                          <p:attrName>ppt_h</p:attrName>
+                                        </p:attrNameLst>
+                                      </p:cBhvr>
+                                      <p:tavLst>
+                                        <p:tav tm="0">
+                                          <p:val>
+                                            <p:strVal val="#ppt_h"/>
+                                          </p:val>
+                                        </p:tav>
+                                        <p:tav tm="100000">
+                                          <p:val>
+                                            <p:strVal val="#ppt_h"/>
+                                          </p:val>
+                                        </p:tav>
+                                      </p:tavLst>
+                                    </p:anim>
+                                    <p:animEffect transition="in" filter="fade">
+                                      <p:cBhvr>
+                                        <p:cTn id="147" dur="500"/>
+                                        <p:tgtEl>
+                                          <p:spTgt spid="5"/>
                                         </p:tgtEl>
                                       </p:cBhvr>
                                     </p:animEffect>
@@ -25909,12 +22717,14 @@
       <p:bldP spid="29" grpId="0" animBg="1"/>
       <p:bldP spid="31" grpId="0" animBg="1"/>
       <p:bldP spid="33" grpId="0" animBg="1"/>
+      <p:bldP spid="3" grpId="0" animBg="1"/>
+      <p:bldP spid="5" grpId="0" animBg="1"/>
     </p:bldLst>
   </p:timing>
 </p:sld>
 </file>
 
-<file path=ppt/slides/slide7.xml><?xml version="1.0" encoding="utf-8"?>
+<file path=ppt/slides/slide6.xml><?xml version="1.0" encoding="utf-8"?>
 <p:sld xmlns:a="http://schemas.openxmlformats.org/drawingml/2006/main" xmlns:r="http://schemas.openxmlformats.org/officeDocument/2006/relationships" xmlns:p="http://schemas.openxmlformats.org/presentationml/2006/main">
   <p:cSld name="Slide 8">
     <p:bg>
@@ -26794,13 +23604,13 @@
   <p:clrMapOvr>
     <a:masterClrMapping/>
   </p:clrMapOvr>
-  <mc:AlternateContent xmlns:mc="http://schemas.openxmlformats.org/markup-compatibility/2006">
-    <mc:Choice xmlns:p159="http://schemas.microsoft.com/office/powerpoint/2015/09/main" Requires="p159">
+  <mc:AlternateContent xmlns:mc="http://schemas.openxmlformats.org/markup-compatibility/2006" xmlns:p159="http://schemas.microsoft.com/office/powerpoint/2015/09/main">
+    <mc:Choice Requires="p159">
       <p:transition spd="slow">
         <p159:morph option="byObject"/>
       </p:transition>
     </mc:Choice>
-    <mc:Fallback>
+    <mc:Fallback xmlns="">
       <p:transition spd="slow">
         <p:fade/>
       </p:transition>
@@ -27489,6 +24299,133 @@
       <p:bldP spid="23" grpId="0" animBg="1"/>
     </p:bldLst>
   </p:timing>
+</p:sld>
+</file>
+
+<file path=ppt/slides/slide7.xml><?xml version="1.0" encoding="utf-8"?>
+<p:sld xmlns:a="http://schemas.openxmlformats.org/drawingml/2006/main" xmlns:r="http://schemas.openxmlformats.org/officeDocument/2006/relationships" xmlns:p="http://schemas.openxmlformats.org/presentationml/2006/main">
+  <p:cSld>
+    <p:spTree>
+      <p:nvGrpSpPr>
+        <p:cNvPr id="1" name="">
+          <a:extLst>
+            <a:ext uri="{FF2B5EF4-FFF2-40B4-BE49-F238E27FC236}">
+              <a16:creationId xmlns:a16="http://schemas.microsoft.com/office/drawing/2014/main" id="{7B7CD4EF-ACC1-17A7-753B-F9B826FE80DE}"/>
+            </a:ext>
+          </a:extLst>
+        </p:cNvPr>
+        <p:cNvGrpSpPr/>
+        <p:nvPr/>
+      </p:nvGrpSpPr>
+      <p:grpSpPr>
+        <a:xfrm>
+          <a:off x="0" y="0"/>
+          <a:ext cx="0" cy="0"/>
+          <a:chOff x="0" y="0"/>
+          <a:chExt cx="0" cy="0"/>
+        </a:xfrm>
+      </p:grpSpPr>
+      <p:pic>
+        <p:nvPicPr>
+          <p:cNvPr id="14" name="Inhaltsplatzhalter 4" descr="Ein Bild, das Himmel, Nebel, Mond, draußen enthält.&#10;&#10;KI-generierte Inhalte können fehlerhaft sein.">
+            <a:extLst>
+              <a:ext uri="{FF2B5EF4-FFF2-40B4-BE49-F238E27FC236}">
+                <a16:creationId xmlns:a16="http://schemas.microsoft.com/office/drawing/2014/main" id="{EEA56D78-0686-0C39-FCBB-ACBF9C251EBC}"/>
+              </a:ext>
+            </a:extLst>
+          </p:cNvPr>
+          <p:cNvPicPr>
+            <a:picLocks noChangeAspect="1"/>
+          </p:cNvPicPr>
+          <p:nvPr/>
+        </p:nvPicPr>
+        <p:blipFill>
+          <a:blip r:embed="rId3"/>
+          <a:stretch>
+            <a:fillRect/>
+          </a:stretch>
+        </p:blipFill>
+        <p:spPr>
+          <a:xfrm>
+            <a:off x="0" y="-5022"/>
+            <a:ext cx="9144000" cy="6096000"/>
+          </a:xfrm>
+          <a:prstGeom prst="rect">
+            <a:avLst/>
+          </a:prstGeom>
+        </p:spPr>
+      </p:pic>
+      <p:sp>
+        <p:nvSpPr>
+          <p:cNvPr id="4" name="Text 2">
+            <a:extLst>
+              <a:ext uri="{FF2B5EF4-FFF2-40B4-BE49-F238E27FC236}">
+                <a16:creationId xmlns:a16="http://schemas.microsoft.com/office/drawing/2014/main" id="{A048D539-79A7-1F40-B63C-A6115318797D}"/>
+              </a:ext>
+            </a:extLst>
+          </p:cNvPr>
+          <p:cNvSpPr/>
+          <p:nvPr/>
+        </p:nvSpPr>
+        <p:spPr>
+          <a:xfrm>
+            <a:off x="914400" y="2251710"/>
+            <a:ext cx="7315200" cy="640080"/>
+          </a:xfrm>
+          <a:prstGeom prst="rect">
+            <a:avLst/>
+          </a:prstGeom>
+          <a:noFill/>
+          <a:ln/>
+        </p:spPr>
+        <p:txBody>
+          <a:bodyPr wrap="square" lIns="0" tIns="0" rIns="0" bIns="0" rtlCol="0" anchor="ctr"/>
+          <a:lstStyle/>
+          <a:p>
+            <a:pPr marL="0" indent="0" algn="ctr">
+              <a:buNone/>
+            </a:pPr>
+            <a:r>
+              <a:rPr lang="en-US" sz="4400" b="1" kern="0" spc="1000" dirty="0">
+                <a:solidFill>
+                  <a:schemeClr val="bg1"/>
+                </a:solidFill>
+                <a:latin typeface="Cambria" pitchFamily="34" charset="0"/>
+                <a:ea typeface="Cambria" pitchFamily="34" charset="-122"/>
+                <a:cs typeface="Cambria" pitchFamily="34" charset="-120"/>
+              </a:rPr>
+              <a:t>Life Demo</a:t>
+            </a:r>
+            <a:endParaRPr lang="en-US" sz="4400" dirty="0">
+              <a:solidFill>
+                <a:schemeClr val="bg1"/>
+              </a:solidFill>
+            </a:endParaRPr>
+          </a:p>
+        </p:txBody>
+      </p:sp>
+    </p:spTree>
+    <p:extLst>
+      <p:ext uri="{BB962C8B-B14F-4D97-AF65-F5344CB8AC3E}">
+        <p14:creationId xmlns:p14="http://schemas.microsoft.com/office/powerpoint/2010/main" val="1381083898"/>
+      </p:ext>
+    </p:extLst>
+  </p:cSld>
+  <p:clrMapOvr>
+    <a:masterClrMapping/>
+  </p:clrMapOvr>
+  <mc:AlternateContent xmlns:mc="http://schemas.openxmlformats.org/markup-compatibility/2006" xmlns:p159="http://schemas.microsoft.com/office/powerpoint/2015/09/main">
+    <mc:Choice Requires="p159">
+      <p:transition spd="slow">
+        <p159:morph option="byObject"/>
+      </p:transition>
+    </mc:Choice>
+    <mc:Fallback xmlns="">
+      <p:transition spd="slow">
+        <p:fade/>
+      </p:transition>
+    </mc:Fallback>
+  </mc:AlternateContent>
 </p:sld>
 </file>
 
@@ -28348,13 +25285,13 @@
   <p:clrMapOvr>
     <a:masterClrMapping/>
   </p:clrMapOvr>
-  <mc:AlternateContent xmlns:mc="http://schemas.openxmlformats.org/markup-compatibility/2006">
-    <mc:Choice xmlns:p159="http://schemas.microsoft.com/office/powerpoint/2015/09/main" Requires="p159">
+  <mc:AlternateContent xmlns:mc="http://schemas.openxmlformats.org/markup-compatibility/2006" xmlns:p159="http://schemas.microsoft.com/office/powerpoint/2015/09/main">
+    <mc:Choice Requires="p159">
       <p:transition spd="slow">
         <p159:morph option="byObject"/>
       </p:transition>
     </mc:Choice>
-    <mc:Fallback>
+    <mc:Fallback xmlns="">
       <p:transition spd="slow">
         <p:fade/>
       </p:transition>
@@ -28954,13 +25891,13 @@
   <p:clrMapOvr>
     <a:masterClrMapping/>
   </p:clrMapOvr>
-  <mc:AlternateContent xmlns:mc="http://schemas.openxmlformats.org/markup-compatibility/2006">
-    <mc:Choice xmlns:p159="http://schemas.microsoft.com/office/powerpoint/2015/09/main" Requires="p159">
+  <mc:AlternateContent xmlns:mc="http://schemas.openxmlformats.org/markup-compatibility/2006" xmlns:p159="http://schemas.microsoft.com/office/powerpoint/2015/09/main">
+    <mc:Choice Requires="p159">
       <p:transition spd="slow">
         <p159:morph option="byObject"/>
       </p:transition>
     </mc:Choice>
-    <mc:Fallback>
+    <mc:Fallback xmlns="">
       <p:transition spd="slow">
         <p:fade/>
       </p:transition>
